--- a/企画書_格ゲー.pptx
+++ b/企画書_格ゲー.pptx
@@ -11,6 +11,7 @@
     <p:sldId id="259" r:id="rId5"/>
     <p:sldId id="260" r:id="rId6"/>
     <p:sldId id="261" r:id="rId7"/>
+    <p:sldId id="262" r:id="rId8"/>
   </p:sldIdLst>
   <p:sldSz cx="12192000" cy="6858000"/>
   <p:notesSz cx="6858000" cy="9144000"/>
@@ -959,7 +960,7 @@
           <a:p>
             <a:fld id="{96DFF08F-DC6B-4601-B491-B0F83F6DD2DA}" type="datetimeFigureOut">
               <a:rPr lang="en-US" dirty="0"/>
-              <a:t>10/17/2026</a:t>
+              <a:t>10/19/2026</a:t>
             </a:fld>
             <a:endParaRPr lang="en-US" dirty="0"/>
           </a:p>
@@ -1178,7 +1179,7 @@
           <a:p>
             <a:fld id="{96DFF08F-DC6B-4601-B491-B0F83F6DD2DA}" type="datetimeFigureOut">
               <a:rPr lang="en-US" dirty="0"/>
-              <a:t>10/17/2026</a:t>
+              <a:t>10/19/2026</a:t>
             </a:fld>
             <a:endParaRPr lang="en-US" dirty="0"/>
           </a:p>
@@ -1356,7 +1357,7 @@
           <a:p>
             <a:fld id="{96DFF08F-DC6B-4601-B491-B0F83F6DD2DA}" type="datetimeFigureOut">
               <a:rPr lang="en-US" dirty="0"/>
-              <a:t>10/17/2026</a:t>
+              <a:t>10/19/2026</a:t>
             </a:fld>
             <a:endParaRPr lang="en-US" dirty="0"/>
           </a:p>
@@ -1524,7 +1525,7 @@
           <a:p>
             <a:fld id="{96DFF08F-DC6B-4601-B491-B0F83F6DD2DA}" type="datetimeFigureOut">
               <a:rPr lang="en-US" dirty="0"/>
-              <a:t>10/17/2026</a:t>
+              <a:t>10/19/2026</a:t>
             </a:fld>
             <a:endParaRPr lang="en-US" dirty="0"/>
           </a:p>
@@ -1774,7 +1775,7 @@
           <a:p>
             <a:fld id="{96DFF08F-DC6B-4601-B491-B0F83F6DD2DA}" type="datetimeFigureOut">
               <a:rPr lang="en-US" dirty="0"/>
-              <a:t>10/17/2026</a:t>
+              <a:t>10/19/2026</a:t>
             </a:fld>
             <a:endParaRPr lang="en-US" dirty="0"/>
           </a:p>
@@ -2094,7 +2095,7 @@
           <a:p>
             <a:fld id="{96DFF08F-DC6B-4601-B491-B0F83F6DD2DA}" type="datetimeFigureOut">
               <a:rPr lang="en-US" dirty="0"/>
-              <a:t>10/17/2026</a:t>
+              <a:t>10/19/2026</a:t>
             </a:fld>
             <a:endParaRPr lang="en-US" dirty="0"/>
           </a:p>
@@ -2515,7 +2516,7 @@
           <a:p>
             <a:fld id="{96DFF08F-DC6B-4601-B491-B0F83F6DD2DA}" type="datetimeFigureOut">
               <a:rPr lang="en-US" dirty="0"/>
-              <a:t>10/17/2026</a:t>
+              <a:t>10/19/2026</a:t>
             </a:fld>
             <a:endParaRPr lang="en-US" dirty="0"/>
           </a:p>
@@ -2632,7 +2633,7 @@
           <a:p>
             <a:fld id="{96DFF08F-DC6B-4601-B491-B0F83F6DD2DA}" type="datetimeFigureOut">
               <a:rPr lang="en-US" dirty="0"/>
-              <a:t>10/17/2026</a:t>
+              <a:t>10/19/2026</a:t>
             </a:fld>
             <a:endParaRPr lang="en-US" dirty="0"/>
           </a:p>
@@ -2727,7 +2728,7 @@
           <a:p>
             <a:fld id="{96DFF08F-DC6B-4601-B491-B0F83F6DD2DA}" type="datetimeFigureOut">
               <a:rPr lang="en-US" dirty="0"/>
-              <a:t>10/17/2026</a:t>
+              <a:t>10/19/2026</a:t>
             </a:fld>
             <a:endParaRPr lang="en-US" dirty="0"/>
           </a:p>
@@ -3015,7 +3016,7 @@
           <a:p>
             <a:fld id="{96DFF08F-DC6B-4601-B491-B0F83F6DD2DA}" type="datetimeFigureOut">
               <a:rPr lang="en-US" dirty="0"/>
-              <a:t>10/17/2026</a:t>
+              <a:t>10/19/2026</a:t>
             </a:fld>
             <a:endParaRPr lang="en-US" dirty="0"/>
           </a:p>
@@ -3282,7 +3283,7 @@
           <a:p>
             <a:fld id="{96DFF08F-DC6B-4601-B491-B0F83F6DD2DA}" type="datetimeFigureOut">
               <a:rPr lang="en-US" dirty="0"/>
-              <a:t>10/17/2026</a:t>
+              <a:t>10/19/2026</a:t>
             </a:fld>
             <a:endParaRPr lang="en-US" dirty="0"/>
           </a:p>
@@ -3535,7 +3536,7 @@
             <a:fld id="{96DFF08F-DC6B-4601-B491-B0F83F6DD2DA}" type="datetimeFigureOut">
               <a:rPr lang="en-US" dirty="0"/>
               <a:pPr/>
-              <a:t>10/17/2026</a:t>
+              <a:t>10/19/2026</a:t>
             </a:fld>
             <a:endParaRPr lang="en-US" dirty="0"/>
           </a:p>
@@ -5147,6 +5148,272 @@
 </p:sld>
 </file>
 
+<file path=ppt/slides/slide7.xml><?xml version="1.0" encoding="utf-8"?>
+<p:sld xmlns:a="http://schemas.openxmlformats.org/drawingml/2006/main" xmlns:r="http://schemas.openxmlformats.org/officeDocument/2006/relationships" xmlns:p="http://schemas.openxmlformats.org/presentationml/2006/main">
+  <p:cSld>
+    <p:spTree>
+      <p:nvGrpSpPr>
+        <p:cNvPr id="1" name=""/>
+        <p:cNvGrpSpPr/>
+        <p:nvPr/>
+      </p:nvGrpSpPr>
+      <p:grpSpPr>
+        <a:xfrm>
+          <a:off x="0" y="0"/>
+          <a:ext cx="0" cy="0"/>
+          <a:chOff x="0" y="0"/>
+          <a:chExt cx="0" cy="0"/>
+        </a:xfrm>
+      </p:grpSpPr>
+      <p:sp>
+        <p:nvSpPr>
+          <p:cNvPr id="2" name="タイトル 1">
+            <a:extLst>
+              <a:ext uri="{FF2B5EF4-FFF2-40B4-BE49-F238E27FC236}">
+                <a16:creationId xmlns:a16="http://schemas.microsoft.com/office/drawing/2014/main" id="{B9ECD9EC-7595-41C4-8130-FE2694893EC1}"/>
+              </a:ext>
+            </a:extLst>
+          </p:cNvPr>
+          <p:cNvSpPr>
+            <a:spLocks noGrp="1"/>
+          </p:cNvSpPr>
+          <p:nvPr>
+            <p:ph type="title"/>
+          </p:nvPr>
+        </p:nvSpPr>
+        <p:spPr>
+          <a:xfrm>
+            <a:off x="397933" y="270933"/>
+            <a:ext cx="11590867" cy="1356360"/>
+          </a:xfrm>
+        </p:spPr>
+        <p:txBody>
+          <a:bodyPr/>
+          <a:lstStyle/>
+          <a:p>
+            <a:r>
+              <a:rPr kumimoji="1" lang="ja-JP" altLang="en-US" dirty="0"/>
+              <a:t>・ハブ空間の実装</a:t>
+            </a:r>
+            <a:r>
+              <a:rPr kumimoji="1" lang="en-US" altLang="ja-JP" dirty="0"/>
+              <a:t>(</a:t>
+            </a:r>
+            <a:r>
+              <a:rPr kumimoji="1" lang="ja-JP" altLang="en-US" dirty="0"/>
+              <a:t>参考 </a:t>
+            </a:r>
+            <a:r>
+              <a:rPr kumimoji="1" lang="en-US" altLang="ja-JP" dirty="0"/>
+              <a:t>: </a:t>
+            </a:r>
+            <a:r>
+              <a:rPr kumimoji="1" lang="ja-JP" altLang="en-US" dirty="0"/>
+              <a:t>スト</a:t>
+            </a:r>
+            <a:r>
+              <a:rPr kumimoji="1" lang="en-US" altLang="ja-JP" dirty="0"/>
+              <a:t>6</a:t>
+            </a:r>
+            <a:r>
+              <a:rPr kumimoji="1" lang="ja-JP" altLang="en-US" dirty="0"/>
+              <a:t>のバトルハブ</a:t>
+            </a:r>
+            <a:r>
+              <a:rPr kumimoji="1" lang="en-US" altLang="ja-JP" dirty="0"/>
+              <a:t>)</a:t>
+            </a:r>
+            <a:endParaRPr kumimoji="1" lang="ja-JP" altLang="en-US" dirty="0"/>
+          </a:p>
+        </p:txBody>
+      </p:sp>
+      <p:sp>
+        <p:nvSpPr>
+          <p:cNvPr id="3" name="コンテンツ プレースホルダー 2">
+            <a:extLst>
+              <a:ext uri="{FF2B5EF4-FFF2-40B4-BE49-F238E27FC236}">
+                <a16:creationId xmlns:a16="http://schemas.microsoft.com/office/drawing/2014/main" id="{9B6DBECE-F802-4EDC-95E8-47F0B9F2FE15}"/>
+              </a:ext>
+            </a:extLst>
+          </p:cNvPr>
+          <p:cNvSpPr>
+            <a:spLocks noGrp="1"/>
+          </p:cNvSpPr>
+          <p:nvPr>
+            <p:ph idx="1"/>
+          </p:nvPr>
+        </p:nvSpPr>
+        <p:spPr/>
+        <p:txBody>
+          <a:bodyPr>
+            <a:normAutofit lnSpcReduction="10000"/>
+          </a:bodyPr>
+          <a:lstStyle/>
+          <a:p>
+            <a:pPr marL="45720" indent="0">
+              <a:buNone/>
+            </a:pPr>
+            <a:r>
+              <a:rPr kumimoji="1" lang="ja-JP" altLang="en-US" b="1" dirty="0"/>
+              <a:t>・ハブ形式 </a:t>
+            </a:r>
+            <a:r>
+              <a:rPr kumimoji="1" lang="en-US" altLang="ja-JP" b="1" dirty="0"/>
+              <a:t>: 3D</a:t>
+            </a:r>
+            <a:r>
+              <a:rPr kumimoji="1" lang="ja-JP" altLang="en-US" b="1" dirty="0"/>
+              <a:t>ゲームセンター型オンラインハブ</a:t>
+            </a:r>
+            <a:endParaRPr kumimoji="1" lang="en-US" altLang="ja-JP" b="1" dirty="0"/>
+          </a:p>
+          <a:p>
+            <a:pPr marL="45720" indent="0">
+              <a:buNone/>
+            </a:pPr>
+            <a:r>
+              <a:rPr kumimoji="1" lang="ja-JP" altLang="en-US" b="1" dirty="0"/>
+              <a:t>・ネットワーク </a:t>
+            </a:r>
+            <a:r>
+              <a:rPr kumimoji="1" lang="en-US" altLang="ja-JP" b="1" dirty="0"/>
+              <a:t>: Photon Fusion2</a:t>
+            </a:r>
+          </a:p>
+          <a:p>
+            <a:pPr marL="45720" indent="0">
+              <a:buNone/>
+            </a:pPr>
+            <a:r>
+              <a:rPr kumimoji="1" lang="ja-JP" altLang="en-US" b="1" dirty="0"/>
+              <a:t>・ </a:t>
+            </a:r>
+            <a:r>
+              <a:rPr kumimoji="1" lang="en-US" altLang="ja-JP" b="1" dirty="0"/>
+              <a:t>1</a:t>
+            </a:r>
+            <a:r>
+              <a:rPr kumimoji="1" lang="ja-JP" altLang="en-US" b="1" dirty="0"/>
+              <a:t>ルームの最大人数 </a:t>
+            </a:r>
+            <a:r>
+              <a:rPr kumimoji="1" lang="en-US" altLang="ja-JP" b="1" dirty="0"/>
+              <a:t>: 8</a:t>
+            </a:r>
+            <a:r>
+              <a:rPr kumimoji="1" lang="ja-JP" altLang="en-US" b="1" dirty="0"/>
+              <a:t>人</a:t>
+            </a:r>
+            <a:endParaRPr kumimoji="1" lang="en-US" altLang="ja-JP" b="1" dirty="0"/>
+          </a:p>
+          <a:p>
+            <a:pPr marL="45720" indent="0">
+              <a:buNone/>
+            </a:pPr>
+            <a:r>
+              <a:rPr kumimoji="1" lang="ja-JP" altLang="en-US" b="1" dirty="0"/>
+              <a:t>・公開ルーム </a:t>
+            </a:r>
+            <a:r>
+              <a:rPr kumimoji="1" lang="en-US" altLang="ja-JP" b="1" dirty="0"/>
+              <a:t>: Public Server</a:t>
+            </a:r>
+          </a:p>
+          <a:p>
+            <a:pPr marL="45720" indent="0">
+              <a:buNone/>
+            </a:pPr>
+            <a:r>
+              <a:rPr kumimoji="1" lang="ja-JP" altLang="en-US" b="1" dirty="0"/>
+              <a:t>・プライベートルーム </a:t>
+            </a:r>
+            <a:r>
+              <a:rPr kumimoji="1" lang="en-US" altLang="ja-JP" b="1" dirty="0"/>
+              <a:t>: Private Server</a:t>
+            </a:r>
+          </a:p>
+          <a:p>
+            <a:pPr marL="45720" indent="0">
+              <a:buNone/>
+            </a:pPr>
+            <a:r>
+              <a:rPr kumimoji="1" lang="ja-JP" altLang="en-US" b="1" dirty="0"/>
+              <a:t>・ オフライン ローカルでハブに入場可能</a:t>
+            </a:r>
+            <a:endParaRPr kumimoji="1" lang="en-US" altLang="ja-JP" b="1" dirty="0"/>
+          </a:p>
+          <a:p>
+            <a:pPr marL="45720" indent="0">
+              <a:buNone/>
+            </a:pPr>
+            <a:r>
+              <a:rPr kumimoji="1" lang="ja-JP" altLang="en-US" b="1" dirty="0"/>
+              <a:t>・筐体 </a:t>
+            </a:r>
+            <a:r>
+              <a:rPr kumimoji="1" lang="en-US" altLang="ja-JP" b="1" dirty="0"/>
+              <a:t>: </a:t>
+            </a:r>
+            <a:r>
+              <a:rPr kumimoji="1" lang="ja-JP" altLang="en-US" b="1" dirty="0"/>
+              <a:t>チュートリアル・</a:t>
+            </a:r>
+            <a:r>
+              <a:rPr kumimoji="1" lang="en-US" altLang="ja-JP" b="1" dirty="0"/>
+              <a:t>CPU</a:t>
+            </a:r>
+            <a:r>
+              <a:rPr kumimoji="1" lang="ja-JP" altLang="en-US" b="1" dirty="0"/>
+              <a:t>戦から開始</a:t>
+            </a:r>
+            <a:endParaRPr kumimoji="1" lang="en-US" altLang="ja-JP" b="1" dirty="0"/>
+          </a:p>
+          <a:p>
+            <a:pPr marL="45720" indent="0">
+              <a:buNone/>
+            </a:pPr>
+            <a:r>
+              <a:rPr kumimoji="1" lang="ja-JP" altLang="en-US" b="1" dirty="0"/>
+              <a:t>・プレイヤー表示・頭上の名前</a:t>
+            </a:r>
+            <a:endParaRPr kumimoji="1" lang="en-US" altLang="ja-JP" b="1" dirty="0"/>
+          </a:p>
+          <a:p>
+            <a:pPr marL="45720" indent="0">
+              <a:buNone/>
+            </a:pPr>
+            <a:r>
+              <a:rPr kumimoji="1" lang="ja-JP" altLang="en-US" b="1" dirty="0"/>
+              <a:t>・将来的な拡張 </a:t>
+            </a:r>
+            <a:r>
+              <a:rPr kumimoji="1" lang="en-US" altLang="ja-JP" b="1" dirty="0"/>
+              <a:t>: </a:t>
+            </a:r>
+            <a:r>
+              <a:rPr kumimoji="1" lang="ja-JP" altLang="en-US" b="1" dirty="0"/>
+              <a:t>プレイヤー同士の筐体対戦・チャット</a:t>
+            </a:r>
+            <a:endParaRPr kumimoji="1" lang="en-US" altLang="ja-JP" b="1" dirty="0"/>
+          </a:p>
+          <a:p>
+            <a:endParaRPr kumimoji="1" lang="ja-JP" altLang="en-US" dirty="0"/>
+          </a:p>
+        </p:txBody>
+      </p:sp>
+    </p:spTree>
+    <p:extLst>
+      <p:ext uri="{BB962C8B-B14F-4D97-AF65-F5344CB8AC3E}">
+        <p14:creationId xmlns:p14="http://schemas.microsoft.com/office/powerpoint/2010/main" val="3596447639"/>
+      </p:ext>
+    </p:extLst>
+  </p:cSld>
+  <p:clrMapOvr>
+    <a:masterClrMapping/>
+  </p:clrMapOvr>
+</p:sld>
+</file>
+
 <file path=ppt/theme/theme1.xml><?xml version="1.0" encoding="utf-8"?>
 <a:theme xmlns:a="http://schemas.openxmlformats.org/drawingml/2006/main" name="Basis">
   <a:themeElements>

--- a/企画書_格ゲー.pptx
+++ b/企画書_格ゲー.pptx
@@ -58,7 +58,7 @@
         <p:spPr>
           <a:xfrm>
             <a:off x="1143000" y="609480"/>
-            <a:ext cx="9875160" cy="1356120"/>
+            <a:ext cx="9874800" cy="1355760"/>
           </a:xfrm>
           <a:prstGeom prst="rect">
             <a:avLst/>
@@ -73,14 +73,14 @@
             <a:noAutofit/>
           </a:bodyPr>
           <a:p>
-            <a:pPr indent="0">
-              <a:buNone/>
-            </a:pPr>
-            <a:endParaRPr b="0" lang="en-US" sz="1800" spc="-1" strike="noStrike">
-              <a:solidFill>
-                <a:schemeClr val="dk1"/>
-              </a:solidFill>
-              <a:latin typeface="Corbel"/>
+            <a:pPr indent="0" algn="ctr">
+              <a:buNone/>
+            </a:pPr>
+            <a:endParaRPr b="0" lang="en-US" sz="4400" spc="-1" strike="noStrike">
+              <a:solidFill>
+                <a:srgbClr val="000000"/>
+              </a:solidFill>
+              <a:latin typeface="Arial"/>
             </a:endParaRPr>
           </a:p>
         </p:txBody>
@@ -98,7 +98,7 @@
         <p:spPr>
           <a:xfrm>
             <a:off x="1143000" y="2057400"/>
-            <a:ext cx="9872640" cy="4038120"/>
+            <a:ext cx="9872280" cy="4037760"/>
           </a:xfrm>
           <a:prstGeom prst="rect">
             <a:avLst/>
@@ -132,7 +132,7 @@
             <a:spLocks noGrp="1"/>
           </p:cNvSpPr>
           <p:nvPr>
-            <p:ph type="ftr" idx="2"/>
+            <p:ph type="ftr" idx="1"/>
           </p:nvPr>
         </p:nvSpPr>
         <p:spPr/>
@@ -152,14 +152,14 @@
             <a:spLocks noGrp="1"/>
           </p:cNvSpPr>
           <p:nvPr>
-            <p:ph type="sldNum" idx="3"/>
+            <p:ph type="sldNum" idx="2"/>
           </p:nvPr>
         </p:nvSpPr>
         <p:spPr/>
         <p:txBody>
           <a:bodyPr/>
           <a:p>
-            <a:fld id="{C5392AF8-22D8-4ECF-9ADA-1C33322AFA7D}" type="slidenum">
+            <a:fld id="{9A4D16CF-5FB9-4AD4-9661-CA3996A9BA3F}" type="slidenum">
               <a:t>&lt;#&gt;</a:t>
             </a:fld>
           </a:p>
@@ -172,7 +172,7 @@
             <a:spLocks noGrp="1"/>
           </p:cNvSpPr>
           <p:nvPr>
-            <p:ph type="dt" idx="1"/>
+            <p:ph type="dt" idx="3"/>
           </p:nvPr>
         </p:nvSpPr>
         <p:spPr/>
@@ -215,7 +215,7 @@
             <a:spLocks noGrp="1"/>
           </p:cNvSpPr>
           <p:nvPr>
-            <p:ph type="ftr" idx="29"/>
+            <p:ph type="ftr" idx="28"/>
           </p:nvPr>
         </p:nvSpPr>
         <p:spPr/>
@@ -235,14 +235,14 @@
             <a:spLocks noGrp="1"/>
           </p:cNvSpPr>
           <p:nvPr>
-            <p:ph type="sldNum" idx="30"/>
+            <p:ph type="sldNum" idx="29"/>
           </p:nvPr>
         </p:nvSpPr>
         <p:spPr/>
         <p:txBody>
           <a:bodyPr/>
           <a:p>
-            <a:fld id="{254A154F-E815-44B4-8F82-493F441F5AB6}" type="slidenum">
+            <a:fld id="{5C280B2E-D9DC-4CBB-89DF-03770CF106DF}" type="slidenum">
               <a:t>&lt;#&gt;</a:t>
             </a:fld>
           </a:p>
@@ -255,7 +255,7 @@
             <a:spLocks noGrp="1"/>
           </p:cNvSpPr>
           <p:nvPr>
-            <p:ph type="dt" idx="28"/>
+            <p:ph type="dt" idx="30"/>
           </p:nvPr>
         </p:nvSpPr>
         <p:spPr/>
@@ -298,7 +298,7 @@
             <a:spLocks noGrp="1"/>
           </p:cNvSpPr>
           <p:nvPr>
-            <p:ph type="ftr" idx="32"/>
+            <p:ph type="ftr" idx="31"/>
           </p:nvPr>
         </p:nvSpPr>
         <p:spPr/>
@@ -318,14 +318,14 @@
             <a:spLocks noGrp="1"/>
           </p:cNvSpPr>
           <p:nvPr>
-            <p:ph type="sldNum" idx="33"/>
+            <p:ph type="sldNum" idx="32"/>
           </p:nvPr>
         </p:nvSpPr>
         <p:spPr/>
         <p:txBody>
           <a:bodyPr/>
           <a:p>
-            <a:fld id="{BBB1E0A6-E001-4ECA-8E6B-14FF3B92F667}" type="slidenum">
+            <a:fld id="{76D9FC80-FE31-4B11-9051-C3FFAFBA5AB2}" type="slidenum">
               <a:t>&lt;#&gt;</a:t>
             </a:fld>
           </a:p>
@@ -338,7 +338,7 @@
             <a:spLocks noGrp="1"/>
           </p:cNvSpPr>
           <p:nvPr>
-            <p:ph type="dt" idx="31"/>
+            <p:ph type="dt" idx="33"/>
           </p:nvPr>
         </p:nvSpPr>
         <p:spPr/>
@@ -381,7 +381,7 @@
             <a:spLocks noGrp="1"/>
           </p:cNvSpPr>
           <p:nvPr>
-            <p:ph type="ftr" idx="5"/>
+            <p:ph type="ftr" idx="4"/>
           </p:nvPr>
         </p:nvSpPr>
         <p:spPr/>
@@ -401,14 +401,14 @@
             <a:spLocks noGrp="1"/>
           </p:cNvSpPr>
           <p:nvPr>
-            <p:ph type="sldNum" idx="6"/>
+            <p:ph type="sldNum" idx="5"/>
           </p:nvPr>
         </p:nvSpPr>
         <p:spPr/>
         <p:txBody>
           <a:bodyPr/>
           <a:p>
-            <a:fld id="{7E9F2E62-A61F-4A32-A4DD-D0D7A781E209}" type="slidenum">
+            <a:fld id="{B27CC0DA-D091-48B5-8BC9-5885C7CE6CB3}" type="slidenum">
               <a:t>&lt;#&gt;</a:t>
             </a:fld>
           </a:p>
@@ -421,7 +421,7 @@
             <a:spLocks noGrp="1"/>
           </p:cNvSpPr>
           <p:nvPr>
-            <p:ph type="dt" idx="4"/>
+            <p:ph type="dt" idx="6"/>
           </p:nvPr>
         </p:nvSpPr>
         <p:spPr/>
@@ -464,7 +464,7 @@
             <a:spLocks noGrp="1"/>
           </p:cNvSpPr>
           <p:nvPr>
-            <p:ph type="ftr" idx="8"/>
+            <p:ph type="ftr" idx="7"/>
           </p:nvPr>
         </p:nvSpPr>
         <p:spPr/>
@@ -484,14 +484,14 @@
             <a:spLocks noGrp="1"/>
           </p:cNvSpPr>
           <p:nvPr>
-            <p:ph type="sldNum" idx="9"/>
+            <p:ph type="sldNum" idx="8"/>
           </p:nvPr>
         </p:nvSpPr>
         <p:spPr/>
         <p:txBody>
           <a:bodyPr/>
           <a:p>
-            <a:fld id="{6AD874C5-ECA9-4A22-9F7F-A045AA8CF34B}" type="slidenum">
+            <a:fld id="{52BC8534-8BFE-4E17-AF93-A30F9E7DC960}" type="slidenum">
               <a:t>&lt;#&gt;</a:t>
             </a:fld>
           </a:p>
@@ -504,7 +504,7 @@
             <a:spLocks noGrp="1"/>
           </p:cNvSpPr>
           <p:nvPr>
-            <p:ph type="dt" idx="7"/>
+            <p:ph type="dt" idx="9"/>
           </p:nvPr>
         </p:nvSpPr>
         <p:spPr/>
@@ -542,7 +542,7 @@
       </p:grpSpPr>
       <p:sp>
         <p:nvSpPr>
-          <p:cNvPr id="28" name="PlaceHolder 1"/>
+          <p:cNvPr id="24" name="PlaceHolder 1"/>
           <p:cNvSpPr>
             <a:spLocks noGrp="1"/>
           </p:cNvSpPr>
@@ -553,7 +553,7 @@
         <p:spPr>
           <a:xfrm>
             <a:off x="1143000" y="609480"/>
-            <a:ext cx="9875160" cy="1356120"/>
+            <a:ext cx="9874800" cy="1355760"/>
           </a:xfrm>
           <a:prstGeom prst="rect">
             <a:avLst/>
@@ -568,21 +568,21 @@
             <a:noAutofit/>
           </a:bodyPr>
           <a:p>
-            <a:pPr indent="0">
-              <a:buNone/>
-            </a:pPr>
-            <a:endParaRPr b="0" lang="en-US" sz="1800" spc="-1" strike="noStrike">
-              <a:solidFill>
-                <a:schemeClr val="dk1"/>
-              </a:solidFill>
-              <a:latin typeface="Corbel"/>
-            </a:endParaRPr>
-          </a:p>
-        </p:txBody>
-      </p:sp>
-      <p:sp>
-        <p:nvSpPr>
-          <p:cNvPr id="29" name="PlaceHolder 2"/>
+            <a:pPr indent="0" algn="ctr">
+              <a:buNone/>
+            </a:pPr>
+            <a:endParaRPr b="0" lang="en-US" sz="4400" spc="-1" strike="noStrike">
+              <a:solidFill>
+                <a:srgbClr val="000000"/>
+              </a:solidFill>
+              <a:latin typeface="Arial"/>
+            </a:endParaRPr>
+          </a:p>
+        </p:txBody>
+      </p:sp>
+      <p:sp>
+        <p:nvSpPr>
+          <p:cNvPr id="25" name="PlaceHolder 2"/>
           <p:cNvSpPr>
             <a:spLocks noGrp="1"/>
           </p:cNvSpPr>
@@ -593,7 +593,7 @@
         <p:spPr>
           <a:xfrm>
             <a:off x="1143000" y="2057400"/>
-            <a:ext cx="9872640" cy="4038120"/>
+            <a:ext cx="9872280" cy="4037760"/>
           </a:xfrm>
           <a:prstGeom prst="rect">
             <a:avLst/>
@@ -609,19 +609,16 @@
           </a:bodyPr>
           <a:p>
             <a:pPr indent="0">
-              <a:lnSpc>
-                <a:spcPct val="90000"/>
-              </a:lnSpc>
               <a:spcBef>
                 <a:spcPts val="1417"/>
               </a:spcBef>
               <a:buNone/>
             </a:pPr>
-            <a:endParaRPr b="0" lang="en-US" sz="2200" spc="-1" strike="noStrike">
-              <a:solidFill>
-                <a:schemeClr val="accent1"/>
-              </a:solidFill>
-              <a:latin typeface="Corbel"/>
+            <a:endParaRPr b="0" lang="en-US" sz="3200" spc="-1" strike="noStrike">
+              <a:solidFill>
+                <a:srgbClr val="000000"/>
+              </a:solidFill>
+              <a:latin typeface="Arial"/>
             </a:endParaRPr>
           </a:p>
         </p:txBody>
@@ -633,7 +630,7 @@
             <a:spLocks noGrp="1"/>
           </p:cNvSpPr>
           <p:nvPr>
-            <p:ph type="ftr" idx="11"/>
+            <p:ph type="ftr" idx="10"/>
           </p:nvPr>
         </p:nvSpPr>
         <p:spPr/>
@@ -653,14 +650,14 @@
             <a:spLocks noGrp="1"/>
           </p:cNvSpPr>
           <p:nvPr>
-            <p:ph type="sldNum" idx="12"/>
+            <p:ph type="sldNum" idx="11"/>
           </p:nvPr>
         </p:nvSpPr>
         <p:spPr/>
         <p:txBody>
           <a:bodyPr/>
           <a:p>
-            <a:fld id="{A2B0AF1E-63B1-44BF-8ED8-44645E7B7580}" type="slidenum">
+            <a:fld id="{A83A3E1A-9D9F-40FA-B059-15E8EC2F6CC0}" type="slidenum">
               <a:t>&lt;#&gt;</a:t>
             </a:fld>
           </a:p>
@@ -673,7 +670,7 @@
             <a:spLocks noGrp="1"/>
           </p:cNvSpPr>
           <p:nvPr>
-            <p:ph type="dt" idx="10"/>
+            <p:ph type="dt" idx="12"/>
           </p:nvPr>
         </p:nvSpPr>
         <p:spPr/>
@@ -716,7 +713,7 @@
             <a:spLocks noGrp="1"/>
           </p:cNvSpPr>
           <p:nvPr>
-            <p:ph type="ftr" idx="14"/>
+            <p:ph type="ftr" idx="13"/>
           </p:nvPr>
         </p:nvSpPr>
         <p:spPr/>
@@ -736,14 +733,14 @@
             <a:spLocks noGrp="1"/>
           </p:cNvSpPr>
           <p:nvPr>
-            <p:ph type="sldNum" idx="15"/>
+            <p:ph type="sldNum" idx="14"/>
           </p:nvPr>
         </p:nvSpPr>
         <p:spPr/>
         <p:txBody>
           <a:bodyPr/>
           <a:p>
-            <a:fld id="{033FBF39-9872-451B-889F-5C19E82FE538}" type="slidenum">
+            <a:fld id="{07E79118-6AA5-4180-A608-8951762DD659}" type="slidenum">
               <a:t>&lt;#&gt;</a:t>
             </a:fld>
           </a:p>
@@ -756,7 +753,7 @@
             <a:spLocks noGrp="1"/>
           </p:cNvSpPr>
           <p:nvPr>
-            <p:ph type="dt" idx="13"/>
+            <p:ph type="dt" idx="15"/>
           </p:nvPr>
         </p:nvSpPr>
         <p:spPr/>
@@ -794,7 +791,7 @@
       </p:grpSpPr>
       <p:sp>
         <p:nvSpPr>
-          <p:cNvPr id="44" name="PlaceHolder 1"/>
+          <p:cNvPr id="38" name="PlaceHolder 1"/>
           <p:cNvSpPr>
             <a:spLocks noGrp="1"/>
           </p:cNvSpPr>
@@ -805,7 +802,7 @@
         <p:spPr>
           <a:xfrm>
             <a:off x="1143000" y="609480"/>
-            <a:ext cx="9875160" cy="1356120"/>
+            <a:ext cx="9874800" cy="1355760"/>
           </a:xfrm>
           <a:prstGeom prst="rect">
             <a:avLst/>
@@ -820,21 +817,21 @@
             <a:noAutofit/>
           </a:bodyPr>
           <a:p>
-            <a:pPr indent="0">
-              <a:buNone/>
-            </a:pPr>
-            <a:endParaRPr b="0" lang="en-US" sz="1800" spc="-1" strike="noStrike">
-              <a:solidFill>
-                <a:schemeClr val="dk1"/>
-              </a:solidFill>
-              <a:latin typeface="Corbel"/>
-            </a:endParaRPr>
-          </a:p>
-        </p:txBody>
-      </p:sp>
-      <p:sp>
-        <p:nvSpPr>
-          <p:cNvPr id="45" name="PlaceHolder 2"/>
+            <a:pPr indent="0" algn="ctr">
+              <a:buNone/>
+            </a:pPr>
+            <a:endParaRPr b="0" lang="en-US" sz="4400" spc="-1" strike="noStrike">
+              <a:solidFill>
+                <a:srgbClr val="000000"/>
+              </a:solidFill>
+              <a:latin typeface="Arial"/>
+            </a:endParaRPr>
+          </a:p>
+        </p:txBody>
+      </p:sp>
+      <p:sp>
+        <p:nvSpPr>
+          <p:cNvPr id="39" name="PlaceHolder 2"/>
           <p:cNvSpPr>
             <a:spLocks noGrp="1"/>
           </p:cNvSpPr>
@@ -845,7 +842,7 @@
         <p:spPr>
           <a:xfrm>
             <a:off x="1143000" y="2057400"/>
-            <a:ext cx="4817520" cy="4038120"/>
+            <a:ext cx="4817520" cy="4037760"/>
           </a:xfrm>
           <a:prstGeom prst="rect">
             <a:avLst/>
@@ -861,26 +858,23 @@
           </a:bodyPr>
           <a:p>
             <a:pPr indent="0">
-              <a:lnSpc>
-                <a:spcPct val="90000"/>
-              </a:lnSpc>
               <a:spcBef>
                 <a:spcPts val="1417"/>
               </a:spcBef>
               <a:buNone/>
             </a:pPr>
-            <a:endParaRPr b="0" lang="en-US" sz="2200" spc="-1" strike="noStrike">
-              <a:solidFill>
-                <a:schemeClr val="accent1"/>
-              </a:solidFill>
-              <a:latin typeface="Corbel"/>
-            </a:endParaRPr>
-          </a:p>
-        </p:txBody>
-      </p:sp>
-      <p:sp>
-        <p:nvSpPr>
-          <p:cNvPr id="46" name="PlaceHolder 3"/>
+            <a:endParaRPr b="0" lang="en-US" sz="3200" spc="-1" strike="noStrike">
+              <a:solidFill>
+                <a:srgbClr val="000000"/>
+              </a:solidFill>
+              <a:latin typeface="Arial"/>
+            </a:endParaRPr>
+          </a:p>
+        </p:txBody>
+      </p:sp>
+      <p:sp>
+        <p:nvSpPr>
+          <p:cNvPr id="40" name="PlaceHolder 3"/>
           <p:cNvSpPr>
             <a:spLocks noGrp="1"/>
           </p:cNvSpPr>
@@ -891,7 +885,7 @@
         <p:spPr>
           <a:xfrm>
             <a:off x="6201720" y="2057400"/>
-            <a:ext cx="4817520" cy="4038120"/>
+            <a:ext cx="4817520" cy="4037760"/>
           </a:xfrm>
           <a:prstGeom prst="rect">
             <a:avLst/>
@@ -907,19 +901,16 @@
           </a:bodyPr>
           <a:p>
             <a:pPr indent="0">
-              <a:lnSpc>
-                <a:spcPct val="90000"/>
-              </a:lnSpc>
               <a:spcBef>
                 <a:spcPts val="1417"/>
               </a:spcBef>
               <a:buNone/>
             </a:pPr>
-            <a:endParaRPr b="0" lang="en-US" sz="2200" spc="-1" strike="noStrike">
-              <a:solidFill>
-                <a:schemeClr val="accent1"/>
-              </a:solidFill>
-              <a:latin typeface="Corbel"/>
+            <a:endParaRPr b="0" lang="en-US" sz="3200" spc="-1" strike="noStrike">
+              <a:solidFill>
+                <a:srgbClr val="000000"/>
+              </a:solidFill>
+              <a:latin typeface="Arial"/>
             </a:endParaRPr>
           </a:p>
         </p:txBody>
@@ -931,7 +922,7 @@
             <a:spLocks noGrp="1"/>
           </p:cNvSpPr>
           <p:nvPr>
-            <p:ph type="ftr" idx="17"/>
+            <p:ph type="ftr" idx="16"/>
           </p:nvPr>
         </p:nvSpPr>
         <p:spPr/>
@@ -951,14 +942,14 @@
             <a:spLocks noGrp="1"/>
           </p:cNvSpPr>
           <p:nvPr>
-            <p:ph type="sldNum" idx="18"/>
+            <p:ph type="sldNum" idx="17"/>
           </p:nvPr>
         </p:nvSpPr>
         <p:spPr/>
         <p:txBody>
           <a:bodyPr/>
           <a:p>
-            <a:fld id="{4C39F6C3-0DF2-4E98-8F9E-B307B5BA20DA}" type="slidenum">
+            <a:fld id="{5117B8D0-A2CC-44FF-BF57-70A46B98512B}" type="slidenum">
               <a:t>&lt;#&gt;</a:t>
             </a:fld>
           </a:p>
@@ -971,7 +962,7 @@
             <a:spLocks noGrp="1"/>
           </p:cNvSpPr>
           <p:nvPr>
-            <p:ph type="dt" idx="16"/>
+            <p:ph type="dt" idx="18"/>
           </p:nvPr>
         </p:nvSpPr>
         <p:spPr/>
@@ -1014,7 +1005,7 @@
             <a:spLocks noGrp="1"/>
           </p:cNvSpPr>
           <p:nvPr>
-            <p:ph type="ftr" idx="20"/>
+            <p:ph type="ftr" idx="19"/>
           </p:nvPr>
         </p:nvSpPr>
         <p:spPr/>
@@ -1034,14 +1025,14 @@
             <a:spLocks noGrp="1"/>
           </p:cNvSpPr>
           <p:nvPr>
-            <p:ph type="sldNum" idx="21"/>
+            <p:ph type="sldNum" idx="20"/>
           </p:nvPr>
         </p:nvSpPr>
         <p:spPr/>
         <p:txBody>
           <a:bodyPr/>
           <a:p>
-            <a:fld id="{D54173CD-1DAA-4307-98C7-A7AE002C6459}" type="slidenum">
+            <a:fld id="{397D2395-72A8-493C-A2C5-8629C0B6AFA0}" type="slidenum">
               <a:t>&lt;#&gt;</a:t>
             </a:fld>
           </a:p>
@@ -1054,7 +1045,7 @@
             <a:spLocks noGrp="1"/>
           </p:cNvSpPr>
           <p:nvPr>
-            <p:ph type="dt" idx="19"/>
+            <p:ph type="dt" idx="21"/>
           </p:nvPr>
         </p:nvSpPr>
         <p:spPr/>
@@ -1092,7 +1083,7 @@
       </p:grpSpPr>
       <p:sp>
         <p:nvSpPr>
-          <p:cNvPr id="61" name="PlaceHolder 1"/>
+          <p:cNvPr id="50" name="PlaceHolder 1"/>
           <p:cNvSpPr>
             <a:spLocks noGrp="1"/>
           </p:cNvSpPr>
@@ -1103,7 +1094,7 @@
         <p:spPr>
           <a:xfrm>
             <a:off x="1143000" y="609480"/>
-            <a:ext cx="9875160" cy="1356120"/>
+            <a:ext cx="9874800" cy="1355760"/>
           </a:xfrm>
           <a:prstGeom prst="rect">
             <a:avLst/>
@@ -1118,14 +1109,14 @@
             <a:noAutofit/>
           </a:bodyPr>
           <a:p>
-            <a:pPr indent="0">
-              <a:buNone/>
-            </a:pPr>
-            <a:endParaRPr b="0" lang="en-US" sz="1800" spc="-1" strike="noStrike">
-              <a:solidFill>
-                <a:schemeClr val="dk1"/>
-              </a:solidFill>
-              <a:latin typeface="Corbel"/>
+            <a:pPr indent="0" algn="ctr">
+              <a:buNone/>
+            </a:pPr>
+            <a:endParaRPr b="0" lang="en-US" sz="4400" spc="-1" strike="noStrike">
+              <a:solidFill>
+                <a:srgbClr val="000000"/>
+              </a:solidFill>
+              <a:latin typeface="Arial"/>
             </a:endParaRPr>
           </a:p>
         </p:txBody>
@@ -1137,7 +1128,7 @@
             <a:spLocks noGrp="1"/>
           </p:cNvSpPr>
           <p:nvPr>
-            <p:ph type="ftr" idx="23"/>
+            <p:ph type="ftr" idx="22"/>
           </p:nvPr>
         </p:nvSpPr>
         <p:spPr/>
@@ -1157,14 +1148,14 @@
             <a:spLocks noGrp="1"/>
           </p:cNvSpPr>
           <p:nvPr>
-            <p:ph type="sldNum" idx="24"/>
+            <p:ph type="sldNum" idx="23"/>
           </p:nvPr>
         </p:nvSpPr>
         <p:spPr/>
         <p:txBody>
           <a:bodyPr/>
           <a:p>
-            <a:fld id="{974FD778-7AC3-4ADD-B298-506D6E0BC16F}" type="slidenum">
+            <a:fld id="{7D5350FF-2145-40DF-B6DC-06EB5B09FCC6}" type="slidenum">
               <a:t>&lt;#&gt;</a:t>
             </a:fld>
           </a:p>
@@ -1177,7 +1168,7 @@
             <a:spLocks noGrp="1"/>
           </p:cNvSpPr>
           <p:nvPr>
-            <p:ph type="dt" idx="22"/>
+            <p:ph type="dt" idx="24"/>
           </p:nvPr>
         </p:nvSpPr>
         <p:spPr/>
@@ -1220,7 +1211,7 @@
             <a:spLocks noGrp="1"/>
           </p:cNvSpPr>
           <p:nvPr>
-            <p:ph type="ftr" idx="26"/>
+            <p:ph type="ftr" idx="25"/>
           </p:nvPr>
         </p:nvSpPr>
         <p:spPr/>
@@ -1240,14 +1231,14 @@
             <a:spLocks noGrp="1"/>
           </p:cNvSpPr>
           <p:nvPr>
-            <p:ph type="sldNum" idx="27"/>
+            <p:ph type="sldNum" idx="26"/>
           </p:nvPr>
         </p:nvSpPr>
         <p:spPr/>
         <p:txBody>
           <a:bodyPr/>
           <a:p>
-            <a:fld id="{ABFAB303-0F42-4EEE-99FC-A8A016287407}" type="slidenum">
+            <a:fld id="{DB9C8651-EE67-414C-823C-87F00F08DC04}" type="slidenum">
               <a:t>&lt;#&gt;</a:t>
             </a:fld>
           </a:p>
@@ -1260,7 +1251,7 @@
             <a:spLocks noGrp="1"/>
           </p:cNvSpPr>
           <p:nvPr>
-            <p:ph type="dt" idx="25"/>
+            <p:ph type="dt" idx="27"/>
           </p:nvPr>
         </p:nvSpPr>
         <p:spPr/>
@@ -1312,7 +1303,7 @@
         <p:spPr>
           <a:xfrm>
             <a:off x="231120" y="243720"/>
-            <a:ext cx="11724120" cy="6377400"/>
+            <a:ext cx="11723760" cy="6377040"/>
           </a:xfrm>
           <a:prstGeom prst="rect">
             <a:avLst/>
@@ -1343,6 +1334,11 @@
             <a:noAutofit/>
           </a:bodyPr>
           <a:p>
+            <a:pPr>
+              <a:lnSpc>
+                <a:spcPct val="100000"/>
+              </a:lnSpc>
+            </a:pPr>
             <a:endParaRPr b="0" lang="en-US" sz="1800" spc="-1" strike="noStrike">
               <a:solidFill>
                 <a:srgbClr val="000000"/>
@@ -1361,7 +1357,7 @@
         <p:spPr>
           <a:xfrm>
             <a:off x="231120" y="243720"/>
-            <a:ext cx="11724120" cy="6377400"/>
+            <a:ext cx="11723760" cy="6377040"/>
           </a:xfrm>
           <a:prstGeom prst="rect">
             <a:avLst/>
@@ -1395,6 +1391,11 @@
             <a:noAutofit/>
           </a:bodyPr>
           <a:p>
+            <a:pPr>
+              <a:lnSpc>
+                <a:spcPct val="100000"/>
+              </a:lnSpc>
+            </a:pPr>
             <a:endParaRPr b="0" lang="en-US" sz="1800" spc="-1" strike="noStrike">
               <a:solidFill>
                 <a:srgbClr val="000000"/>
@@ -1404,9 +1405,30 @@
           </a:p>
         </p:txBody>
       </p:sp>
-      <p:sp>
-        <p:nvSpPr>
-          <p:cNvPr id="2" name="PlaceHolder 1"/>
+      <p:cxnSp>
+        <p:nvCxnSpPr>
+          <p:cNvPr id="2" name="Straight Connector 7"/>
+          <p:cNvCxnSpPr/>
+          <p:nvPr/>
+        </p:nvCxnSpPr>
+        <p:spPr>
+          <a:xfrm>
+            <a:off x="1978560" y="3733560"/>
+            <a:ext cx="8230320" cy="720"/>
+          </a:xfrm>
+          <a:prstGeom prst="straightConnector1">
+            <a:avLst/>
+          </a:prstGeom>
+          <a:ln w="0">
+            <a:solidFill>
+              <a:srgbClr val="ffffff"/>
+            </a:solidFill>
+          </a:ln>
+        </p:spPr>
+      </p:cxnSp>
+      <p:sp>
+        <p:nvSpPr>
+          <p:cNvPr id="3" name="PlaceHolder 1"/>
           <p:cNvSpPr>
             <a:spLocks noGrp="1"/>
           </p:cNvSpPr>
@@ -1416,8 +1438,8 @@
         </p:nvSpPr>
         <p:spPr>
           <a:xfrm>
-            <a:off x="1109880" y="882360"/>
-            <a:ext cx="9966600" cy="2925720"/>
+            <a:off x="1143000" y="609480"/>
+            <a:ext cx="9874800" cy="1355760"/>
           </a:xfrm>
           <a:prstGeom prst="rect">
             <a:avLst/>
@@ -1428,48 +1450,45 @@
           </a:ln>
         </p:spPr>
         <p:txBody>
-          <a:bodyPr lIns="91440" rIns="91440" tIns="45720" bIns="45720" anchor="b">
-            <a:normAutofit/>
+          <a:bodyPr lIns="0" rIns="0" tIns="0" bIns="0" anchor="ctr">
+            <a:noAutofit/>
           </a:bodyPr>
           <a:p>
-            <a:pPr indent="0" algn="ctr" defTabSz="914400">
-              <a:lnSpc>
-                <a:spcPct val="85000"/>
-              </a:lnSpc>
-              <a:buNone/>
-            </a:pPr>
-            <a:r>
-              <a:rPr b="1" lang="en-US" sz="7200" spc="-1" strike="noStrike" cap="all">
-                <a:solidFill>
-                  <a:srgbClr val="ffffff"/>
-                </a:solidFill>
-                <a:latin typeface="Corbel"/>
-              </a:rPr>
-              <a:t>Click to edit Master title style</a:t>
-            </a:r>
-            <a:endParaRPr b="0" lang="en-US" sz="7200" spc="-1" strike="noStrike">
-              <a:solidFill>
-                <a:schemeClr val="dk1"/>
-              </a:solidFill>
-              <a:latin typeface="Corbel"/>
-            </a:endParaRPr>
-          </a:p>
-        </p:txBody>
-      </p:sp>
-      <p:sp>
-        <p:nvSpPr>
-          <p:cNvPr id="3" name="PlaceHolder 2"/>
+            <a:pPr indent="0">
+              <a:buNone/>
+            </a:pPr>
+            <a:r>
+              <a:rPr b="0" lang="ja-JP" sz="1800" spc="-1" strike="noStrike">
+                <a:solidFill>
+                  <a:srgbClr val="000000"/>
+                </a:solidFill>
+                <a:latin typeface="Arial"/>
+              </a:rPr>
+              <a:t>クリックしてタイトルテキストを編集</a:t>
+            </a:r>
+            <a:endParaRPr b="0" lang="en-US" sz="1800" spc="-1" strike="noStrike">
+              <a:solidFill>
+                <a:srgbClr val="000000"/>
+              </a:solidFill>
+              <a:latin typeface="Arial"/>
+            </a:endParaRPr>
+          </a:p>
+        </p:txBody>
+      </p:sp>
+      <p:sp>
+        <p:nvSpPr>
+          <p:cNvPr id="4" name="PlaceHolder 2"/>
           <p:cNvSpPr>
             <a:spLocks noGrp="1"/>
           </p:cNvSpPr>
           <p:nvPr>
-            <p:ph type="dt" idx="1"/>
+            <p:ph type="ftr" idx="1"/>
           </p:nvPr>
         </p:nvSpPr>
         <p:spPr>
           <a:xfrm>
-            <a:off x="1143000" y="6223680"/>
-            <a:ext cx="2328840" cy="364680"/>
+            <a:off x="3949200" y="6223680"/>
+            <a:ext cx="4717080" cy="364320"/>
           </a:xfrm>
           <a:prstGeom prst="rect">
             <a:avLst/>
@@ -1484,36 +1503,42 @@
             <a:noAutofit/>
           </a:bodyPr>
           <a:lstStyle>
-            <a:lvl1pPr indent="0" defTabSz="914400">
+            <a:lvl1pPr indent="0" algn="ctr">
               <a:lnSpc>
                 <a:spcPct val="100000"/>
               </a:lnSpc>
               <a:buNone/>
-              <a:defRPr b="0" lang="en-US" sz="1200" spc="-1" strike="noStrike">
-                <a:solidFill>
-                  <a:schemeClr val="accent1"/>
-                </a:solidFill>
-                <a:latin typeface="Corbel"/>
+              <a:tabLst>
+                <a:tab algn="l" pos="0"/>
+              </a:tabLst>
+              <a:defRPr b="0" lang="en-US" sz="1400" spc="-1" strike="noStrike">
+                <a:solidFill>
+                  <a:srgbClr val="000000"/>
+                </a:solidFill>
+                <a:latin typeface="Noto Serif JP"/>
               </a:defRPr>
             </a:lvl1pPr>
           </a:lstStyle>
           <a:p>
-            <a:pPr indent="0" defTabSz="914400">
+            <a:pPr indent="0" algn="ctr">
               <a:lnSpc>
                 <a:spcPct val="100000"/>
               </a:lnSpc>
               <a:buNone/>
-            </a:pPr>
-            <a:r>
-              <a:rPr b="0" lang="en-US" sz="1200" spc="-1" strike="noStrike">
-                <a:solidFill>
-                  <a:schemeClr val="accent1"/>
-                </a:solidFill>
-                <a:latin typeface="Corbel"/>
-              </a:rPr>
-              <a:t>&lt;日付/時刻&gt;</a:t>
-            </a:r>
-            <a:endParaRPr b="0" lang="en-US" sz="1200" spc="-1" strike="noStrike">
+              <a:tabLst>
+                <a:tab algn="l" pos="0"/>
+              </a:tabLst>
+            </a:pPr>
+            <a:r>
+              <a:rPr b="0" lang="en-US" sz="1400" spc="-1" strike="noStrike">
+                <a:solidFill>
+                  <a:srgbClr val="000000"/>
+                </a:solidFill>
+                <a:latin typeface="Noto Serif JP"/>
+              </a:rPr>
+              <a:t> </a:t>
+            </a:r>
+            <a:endParaRPr b="0" lang="en-US" sz="1400" spc="-1" strike="noStrike">
               <a:solidFill>
                 <a:srgbClr val="000000"/>
               </a:solidFill>
@@ -1524,18 +1549,18 @@
       </p:sp>
       <p:sp>
         <p:nvSpPr>
-          <p:cNvPr id="4" name="PlaceHolder 3"/>
+          <p:cNvPr id="5" name="PlaceHolder 3"/>
           <p:cNvSpPr>
             <a:spLocks noGrp="1"/>
           </p:cNvSpPr>
           <p:nvPr>
-            <p:ph type="ftr" idx="2"/>
+            <p:ph type="sldNum" idx="2"/>
           </p:nvPr>
         </p:nvSpPr>
         <p:spPr>
           <a:xfrm>
-            <a:off x="3949200" y="6223680"/>
-            <a:ext cx="4717440" cy="364680"/>
+            <a:off x="9329400" y="6223680"/>
+            <a:ext cx="1705320" cy="364320"/>
           </a:xfrm>
           <a:prstGeom prst="rect">
             <a:avLst/>
@@ -1550,30 +1575,42 @@
             <a:noAutofit/>
           </a:bodyPr>
           <a:lstStyle>
-            <a:lvl1pPr indent="0" algn="ctr">
-              <a:buNone/>
-              <a:defRPr b="0" lang="en-US" sz="1400" spc="-1" strike="noStrike">
-                <a:solidFill>
-                  <a:srgbClr val="000000"/>
-                </a:solidFill>
-                <a:latin typeface="Noto Serif JP"/>
+            <a:lvl1pPr indent="0" algn="r" defTabSz="914400">
+              <a:lnSpc>
+                <a:spcPct val="100000"/>
+              </a:lnSpc>
+              <a:buNone/>
+              <a:tabLst>
+                <a:tab algn="l" pos="0"/>
+              </a:tabLst>
+              <a:defRPr b="0" lang="en-US" sz="1200" spc="-1" strike="noStrike">
+                <a:solidFill>
+                  <a:schemeClr val="accent1"/>
+                </a:solidFill>
+                <a:latin typeface="Corbel"/>
               </a:defRPr>
             </a:lvl1pPr>
           </a:lstStyle>
           <a:p>
-            <a:pPr indent="0" algn="ctr">
-              <a:buNone/>
-            </a:pPr>
-            <a:r>
-              <a:rPr b="0" lang="en-US" sz="1400" spc="-1" strike="noStrike">
-                <a:solidFill>
-                  <a:srgbClr val="000000"/>
-                </a:solidFill>
-                <a:latin typeface="Noto Serif JP"/>
-              </a:rPr>
-              <a:t>&lt;フッター&gt;</a:t>
-            </a:r>
-            <a:endParaRPr b="0" lang="en-US" sz="1400" spc="-1" strike="noStrike">
+            <a:pPr indent="0" algn="r" defTabSz="914400">
+              <a:lnSpc>
+                <a:spcPct val="100000"/>
+              </a:lnSpc>
+              <a:buNone/>
+              <a:tabLst>
+                <a:tab algn="l" pos="0"/>
+              </a:tabLst>
+            </a:pPr>
+            <a:fld id="{747E0CFC-A317-4C09-A5E4-677334BA956E}" type="slidenum">
+              <a:rPr b="0" lang="en-US" sz="1200" spc="-1" strike="noStrike">
+                <a:solidFill>
+                  <a:schemeClr val="accent1"/>
+                </a:solidFill>
+                <a:latin typeface="Corbel"/>
+              </a:rPr>
+              <a:t>3</a:t>
+            </a:fld>
+            <a:endParaRPr b="0" lang="en-US" sz="1200" spc="-1" strike="noStrike">
               <a:solidFill>
                 <a:srgbClr val="000000"/>
               </a:solidFill>
@@ -1584,18 +1621,18 @@
       </p:sp>
       <p:sp>
         <p:nvSpPr>
-          <p:cNvPr id="5" name="PlaceHolder 4"/>
+          <p:cNvPr id="6" name="PlaceHolder 4"/>
           <p:cNvSpPr>
             <a:spLocks noGrp="1"/>
           </p:cNvSpPr>
           <p:nvPr>
-            <p:ph type="sldNum" idx="3"/>
+            <p:ph type="dt" idx="3"/>
           </p:nvPr>
         </p:nvSpPr>
         <p:spPr>
           <a:xfrm>
-            <a:off x="9329400" y="6223680"/>
-            <a:ext cx="1705680" cy="364680"/>
+            <a:off x="1143000" y="6223680"/>
+            <a:ext cx="2328480" cy="364320"/>
           </a:xfrm>
           <a:prstGeom prst="rect">
             <a:avLst/>
@@ -1610,36 +1647,30 @@
             <a:noAutofit/>
           </a:bodyPr>
           <a:lstStyle>
-            <a:lvl1pPr indent="0" algn="r" defTabSz="914400">
-              <a:lnSpc>
-                <a:spcPct val="100000"/>
-              </a:lnSpc>
-              <a:buNone/>
-              <a:defRPr b="0" lang="en-US" sz="1200" spc="-1" strike="noStrike">
-                <a:solidFill>
-                  <a:schemeClr val="accent1"/>
-                </a:solidFill>
-                <a:latin typeface="Corbel"/>
+            <a:lvl1pPr indent="0">
+              <a:buNone/>
+              <a:defRPr b="0" lang="en-US" sz="1400" spc="-1" strike="noStrike">
+                <a:solidFill>
+                  <a:srgbClr val="000000"/>
+                </a:solidFill>
+                <a:latin typeface="Noto Serif JP"/>
               </a:defRPr>
             </a:lvl1pPr>
           </a:lstStyle>
           <a:p>
-            <a:pPr indent="0" algn="r" defTabSz="914400">
-              <a:lnSpc>
-                <a:spcPct val="100000"/>
-              </a:lnSpc>
-              <a:buNone/>
-            </a:pPr>
-            <a:fld id="{AEE1D58D-94AA-4255-968E-B0AE11E17B6A}" type="slidenum">
-              <a:rPr b="0" lang="en-US" sz="1200" spc="-1" strike="noStrike">
-                <a:solidFill>
-                  <a:schemeClr val="accent1"/>
-                </a:solidFill>
-                <a:latin typeface="Corbel"/>
-              </a:rPr>
-              <a:t>&lt;番号&gt;</a:t>
-            </a:fld>
-            <a:endParaRPr b="0" lang="en-US" sz="1200" spc="-1" strike="noStrike">
+            <a:pPr indent="0">
+              <a:buNone/>
+            </a:pPr>
+            <a:r>
+              <a:rPr b="0" lang="en-US" sz="1400" spc="-1" strike="noStrike">
+                <a:solidFill>
+                  <a:srgbClr val="000000"/>
+                </a:solidFill>
+                <a:latin typeface="Noto Serif JP"/>
+              </a:rPr>
+              <a:t> </a:t>
+            </a:r>
+            <a:endParaRPr b="0" lang="en-US" sz="1400" spc="-1" strike="noStrike">
               <a:solidFill>
                 <a:srgbClr val="000000"/>
               </a:solidFill>
@@ -1648,28 +1679,6 @@
           </a:p>
         </p:txBody>
       </p:sp>
-      <p:cxnSp>
-        <p:nvCxnSpPr>
-          <p:cNvPr id="6" name="Straight Connector 7"/>
-          <p:cNvCxnSpPr/>
-          <p:nvPr/>
-        </p:nvCxnSpPr>
-        <p:spPr>
-          <a:xfrm>
-            <a:off x="1978560" y="3733560"/>
-            <a:ext cx="8229960" cy="360"/>
-          </a:xfrm>
-          <a:prstGeom prst="straightConnector1">
-            <a:avLst/>
-          </a:prstGeom>
-          <a:ln>
-            <a:solidFill>
-              <a:srgbClr val="ffffff"/>
-            </a:solidFill>
-            <a:round/>
-          </a:ln>
-        </p:spPr>
-      </p:cxnSp>
       <p:sp>
         <p:nvSpPr>
           <p:cNvPr id="7" name="PlaceHolder 5"/>
@@ -1699,9 +1708,6 @@
           </a:bodyPr>
           <a:p>
             <a:pPr marL="432000" indent="-324000">
-              <a:lnSpc>
-                <a:spcPct val="90000"/>
-              </a:lnSpc>
               <a:spcBef>
                 <a:spcPts val="1417"/>
               </a:spcBef>
@@ -1713,26 +1719,23 @@
               <a:buChar char=""/>
             </a:pPr>
             <a:r>
-              <a:rPr b="0" lang="ja-JP" sz="2200" spc="-1" strike="noStrike">
-                <a:solidFill>
-                  <a:schemeClr val="accent1"/>
-                </a:solidFill>
-                <a:latin typeface="Corbel"/>
+              <a:rPr b="0" lang="ja-JP" sz="3200" spc="-1" strike="noStrike">
+                <a:solidFill>
+                  <a:srgbClr val="000000"/>
+                </a:solidFill>
+                <a:latin typeface="Arial"/>
               </a:rPr>
               <a:t>クリックしてアウトラインのテキストを編集</a:t>
             </a:r>
-            <a:endParaRPr b="0" lang="en-US" sz="2200" spc="-1" strike="noStrike">
-              <a:solidFill>
-                <a:schemeClr val="accent1"/>
-              </a:solidFill>
-              <a:latin typeface="Corbel"/>
+            <a:endParaRPr b="0" lang="en-US" sz="3200" spc="-1" strike="noStrike">
+              <a:solidFill>
+                <a:srgbClr val="000000"/>
+              </a:solidFill>
+              <a:latin typeface="Arial"/>
             </a:endParaRPr>
           </a:p>
           <a:p>
             <a:pPr lvl="1" marL="864000" indent="-324000">
-              <a:lnSpc>
-                <a:spcPct val="90000"/>
-              </a:lnSpc>
               <a:spcBef>
                 <a:spcPts val="1134"/>
               </a:spcBef>
@@ -1744,35 +1747,32 @@
               <a:buChar char=""/>
             </a:pPr>
             <a:r>
-              <a:rPr b="0" lang="en-US" sz="1800" spc="-1" strike="noStrike">
-                <a:solidFill>
-                  <a:schemeClr val="accent1"/>
-                </a:solidFill>
-                <a:latin typeface="Corbel"/>
+              <a:rPr b="0" lang="en-US" sz="2800" spc="-1" strike="noStrike">
+                <a:solidFill>
+                  <a:srgbClr val="000000"/>
+                </a:solidFill>
+                <a:latin typeface="Arial"/>
               </a:rPr>
               <a:t>2</a:t>
             </a:r>
             <a:r>
-              <a:rPr b="0" lang="ja-JP" sz="1800" spc="-1" strike="noStrike">
-                <a:solidFill>
-                  <a:schemeClr val="accent1"/>
-                </a:solidFill>
-                <a:latin typeface="Corbel"/>
+              <a:rPr b="0" lang="ja-JP" sz="2800" spc="-1" strike="noStrike">
+                <a:solidFill>
+                  <a:srgbClr val="000000"/>
+                </a:solidFill>
+                <a:latin typeface="Arial"/>
               </a:rPr>
               <a:t>レベル目のアウトライン</a:t>
             </a:r>
-            <a:endParaRPr b="0" lang="en-US" sz="1800" spc="-1" strike="noStrike">
-              <a:solidFill>
-                <a:schemeClr val="accent1"/>
-              </a:solidFill>
-              <a:latin typeface="Corbel"/>
+            <a:endParaRPr b="0" lang="en-US" sz="2800" spc="-1" strike="noStrike">
+              <a:solidFill>
+                <a:srgbClr val="000000"/>
+              </a:solidFill>
+              <a:latin typeface="Arial"/>
             </a:endParaRPr>
           </a:p>
           <a:p>
             <a:pPr lvl="2" marL="1296000" indent="-288000">
-              <a:lnSpc>
-                <a:spcPct val="90000"/>
-              </a:lnSpc>
               <a:spcBef>
                 <a:spcPts val="850"/>
               </a:spcBef>
@@ -1784,35 +1784,32 @@
               <a:buChar char=""/>
             </a:pPr>
             <a:r>
-              <a:rPr b="0" lang="en-US" sz="1600" spc="-1" strike="noStrike">
-                <a:solidFill>
-                  <a:schemeClr val="accent1"/>
-                </a:solidFill>
-                <a:latin typeface="Corbel"/>
+              <a:rPr b="0" lang="en-US" sz="2400" spc="-1" strike="noStrike">
+                <a:solidFill>
+                  <a:srgbClr val="000000"/>
+                </a:solidFill>
+                <a:latin typeface="Arial"/>
               </a:rPr>
               <a:t>3</a:t>
             </a:r>
             <a:r>
-              <a:rPr b="0" lang="ja-JP" sz="1600" spc="-1" strike="noStrike">
-                <a:solidFill>
-                  <a:schemeClr val="accent1"/>
-                </a:solidFill>
-                <a:latin typeface="Corbel"/>
+              <a:rPr b="0" lang="ja-JP" sz="2400" spc="-1" strike="noStrike">
+                <a:solidFill>
+                  <a:srgbClr val="000000"/>
+                </a:solidFill>
+                <a:latin typeface="Arial"/>
               </a:rPr>
               <a:t>レベル目のアウトライン</a:t>
             </a:r>
-            <a:endParaRPr b="0" lang="en-US" sz="1600" spc="-1" strike="noStrike">
-              <a:solidFill>
-                <a:schemeClr val="accent1"/>
-              </a:solidFill>
-              <a:latin typeface="Corbel"/>
+            <a:endParaRPr b="0" lang="en-US" sz="2400" spc="-1" strike="noStrike">
+              <a:solidFill>
+                <a:srgbClr val="000000"/>
+              </a:solidFill>
+              <a:latin typeface="Arial"/>
             </a:endParaRPr>
           </a:p>
           <a:p>
             <a:pPr lvl="3" marL="1728000" indent="-216000">
-              <a:lnSpc>
-                <a:spcPct val="90000"/>
-              </a:lnSpc>
               <a:spcBef>
                 <a:spcPts val="567"/>
               </a:spcBef>
@@ -1824,35 +1821,32 @@
               <a:buChar char=""/>
             </a:pPr>
             <a:r>
-              <a:rPr b="0" lang="en-US" sz="1600" spc="-1" strike="noStrike">
-                <a:solidFill>
-                  <a:schemeClr val="accent1"/>
-                </a:solidFill>
-                <a:latin typeface="Corbel"/>
+              <a:rPr b="0" lang="en-US" sz="2000" spc="-1" strike="noStrike">
+                <a:solidFill>
+                  <a:srgbClr val="000000"/>
+                </a:solidFill>
+                <a:latin typeface="Arial"/>
               </a:rPr>
               <a:t>4</a:t>
             </a:r>
             <a:r>
-              <a:rPr b="0" lang="ja-JP" sz="1600" spc="-1" strike="noStrike">
-                <a:solidFill>
-                  <a:schemeClr val="accent1"/>
-                </a:solidFill>
-                <a:latin typeface="Corbel"/>
+              <a:rPr b="0" lang="ja-JP" sz="2000" spc="-1" strike="noStrike">
+                <a:solidFill>
+                  <a:srgbClr val="000000"/>
+                </a:solidFill>
+                <a:latin typeface="Arial"/>
               </a:rPr>
               <a:t>レベル目のアウトライン</a:t>
             </a:r>
-            <a:endParaRPr b="0" lang="en-US" sz="1600" spc="-1" strike="noStrike">
-              <a:solidFill>
-                <a:schemeClr val="accent1"/>
-              </a:solidFill>
-              <a:latin typeface="Corbel"/>
+            <a:endParaRPr b="0" lang="en-US" sz="2000" spc="-1" strike="noStrike">
+              <a:solidFill>
+                <a:srgbClr val="000000"/>
+              </a:solidFill>
+              <a:latin typeface="Arial"/>
             </a:endParaRPr>
           </a:p>
           <a:p>
             <a:pPr lvl="4" marL="2160000" indent="-216000">
-              <a:lnSpc>
-                <a:spcPct val="90000"/>
-              </a:lnSpc>
               <a:spcBef>
                 <a:spcPts val="283"/>
               </a:spcBef>
@@ -1866,33 +1860,30 @@
             <a:r>
               <a:rPr b="0" lang="en-US" sz="2000" spc="-1" strike="noStrike">
                 <a:solidFill>
-                  <a:schemeClr val="accent1"/>
-                </a:solidFill>
-                <a:latin typeface="Corbel"/>
+                  <a:srgbClr val="000000"/>
+                </a:solidFill>
+                <a:latin typeface="Arial"/>
               </a:rPr>
               <a:t>5</a:t>
             </a:r>
             <a:r>
               <a:rPr b="0" lang="ja-JP" sz="2000" spc="-1" strike="noStrike">
                 <a:solidFill>
-                  <a:schemeClr val="accent1"/>
-                </a:solidFill>
-                <a:latin typeface="Corbel"/>
+                  <a:srgbClr val="000000"/>
+                </a:solidFill>
+                <a:latin typeface="Arial"/>
               </a:rPr>
               <a:t>レベル目のアウトライン</a:t>
             </a:r>
             <a:endParaRPr b="0" lang="en-US" sz="2000" spc="-1" strike="noStrike">
               <a:solidFill>
-                <a:schemeClr val="accent1"/>
-              </a:solidFill>
-              <a:latin typeface="Corbel"/>
+                <a:srgbClr val="000000"/>
+              </a:solidFill>
+              <a:latin typeface="Arial"/>
             </a:endParaRPr>
           </a:p>
           <a:p>
             <a:pPr lvl="5" marL="2592000" indent="-216000">
-              <a:lnSpc>
-                <a:spcPct val="90000"/>
-              </a:lnSpc>
               <a:spcBef>
                 <a:spcPts val="283"/>
               </a:spcBef>
@@ -1906,33 +1897,30 @@
             <a:r>
               <a:rPr b="0" lang="en-US" sz="2000" spc="-1" strike="noStrike">
                 <a:solidFill>
-                  <a:schemeClr val="accent1"/>
-                </a:solidFill>
-                <a:latin typeface="Corbel"/>
+                  <a:srgbClr val="000000"/>
+                </a:solidFill>
+                <a:latin typeface="Arial"/>
               </a:rPr>
               <a:t>6</a:t>
             </a:r>
             <a:r>
               <a:rPr b="0" lang="ja-JP" sz="2000" spc="-1" strike="noStrike">
                 <a:solidFill>
-                  <a:schemeClr val="accent1"/>
-                </a:solidFill>
-                <a:latin typeface="Corbel"/>
+                  <a:srgbClr val="000000"/>
+                </a:solidFill>
+                <a:latin typeface="Arial"/>
               </a:rPr>
               <a:t>レベル目のアウトライン</a:t>
             </a:r>
             <a:endParaRPr b="0" lang="en-US" sz="2000" spc="-1" strike="noStrike">
               <a:solidFill>
-                <a:schemeClr val="accent1"/>
-              </a:solidFill>
-              <a:latin typeface="Corbel"/>
+                <a:srgbClr val="000000"/>
+              </a:solidFill>
+              <a:latin typeface="Arial"/>
             </a:endParaRPr>
           </a:p>
           <a:p>
             <a:pPr lvl="6" marL="3024000" indent="-216000">
-              <a:lnSpc>
-                <a:spcPct val="90000"/>
-              </a:lnSpc>
               <a:spcBef>
                 <a:spcPts val="283"/>
               </a:spcBef>
@@ -1946,26 +1934,26 @@
             <a:r>
               <a:rPr b="0" lang="en-US" sz="2000" spc="-1" strike="noStrike">
                 <a:solidFill>
-                  <a:schemeClr val="accent1"/>
-                </a:solidFill>
-                <a:latin typeface="Corbel"/>
+                  <a:srgbClr val="000000"/>
+                </a:solidFill>
+                <a:latin typeface="Arial"/>
               </a:rPr>
               <a:t>7</a:t>
             </a:r>
             <a:r>
               <a:rPr b="0" lang="ja-JP" sz="2000" spc="-1" strike="noStrike">
                 <a:solidFill>
-                  <a:schemeClr val="accent1"/>
-                </a:solidFill>
-                <a:latin typeface="Corbel"/>
+                  <a:srgbClr val="000000"/>
+                </a:solidFill>
+                <a:latin typeface="Arial"/>
               </a:rPr>
               <a:t>レベル目のアウトライン</a:t>
             </a:r>
             <a:endParaRPr b="0" lang="en-US" sz="2000" spc="-1" strike="noStrike">
               <a:solidFill>
-                <a:schemeClr val="accent1"/>
-              </a:solidFill>
-              <a:latin typeface="Corbel"/>
+                <a:srgbClr val="000000"/>
+              </a:solidFill>
+              <a:latin typeface="Arial"/>
             </a:endParaRPr>
           </a:p>
         </p:txBody>
@@ -2005,14 +1993,14 @@
       </p:grpSpPr>
       <p:sp>
         <p:nvSpPr>
-          <p:cNvPr id="66" name="Rectangle 6"/>
+          <p:cNvPr id="55" name="Rectangle 6"/>
           <p:cNvSpPr/>
           <p:nvPr/>
         </p:nvSpPr>
         <p:spPr>
           <a:xfrm>
             <a:off x="231120" y="243720"/>
-            <a:ext cx="11724120" cy="6377400"/>
+            <a:ext cx="11723760" cy="6377040"/>
           </a:xfrm>
           <a:prstGeom prst="rect">
             <a:avLst/>
@@ -2043,6 +2031,11 @@
             <a:noAutofit/>
           </a:bodyPr>
           <a:p>
+            <a:pPr>
+              <a:lnSpc>
+                <a:spcPct val="100000"/>
+              </a:lnSpc>
+            </a:pPr>
             <a:endParaRPr b="0" lang="en-US" sz="1800" spc="-1" strike="noStrike">
               <a:solidFill>
                 <a:srgbClr val="000000"/>
@@ -2054,18 +2047,18 @@
       </p:sp>
       <p:sp>
         <p:nvSpPr>
-          <p:cNvPr id="67" name="PlaceHolder 1"/>
+          <p:cNvPr id="56" name="PlaceHolder 1"/>
           <p:cNvSpPr>
             <a:spLocks noGrp="1"/>
           </p:cNvSpPr>
           <p:nvPr>
-            <p:ph type="title"/>
+            <p:ph type="ftr" idx="28"/>
           </p:nvPr>
         </p:nvSpPr>
         <p:spPr>
           <a:xfrm>
-            <a:off x="1143000" y="1097280"/>
-            <a:ext cx="3931560" cy="1737000"/>
+            <a:off x="3949200" y="6223680"/>
+            <a:ext cx="4717080" cy="364320"/>
           </a:xfrm>
           <a:prstGeom prst="rect">
             <a:avLst/>
@@ -2076,48 +2069,68 @@
           </a:ln>
         </p:spPr>
         <p:txBody>
-          <a:bodyPr lIns="91440" rIns="91440" tIns="45720" bIns="45720" anchor="b">
+          <a:bodyPr lIns="91440" rIns="91440" tIns="45720" bIns="45720" anchor="ctr">
             <a:noAutofit/>
           </a:bodyPr>
-          <a:p>
-            <a:pPr indent="0" defTabSz="914400">
+          <a:lstStyle>
+            <a:lvl1pPr indent="0" algn="ctr">
               <a:lnSpc>
-                <a:spcPct val="90000"/>
+                <a:spcPct val="100000"/>
               </a:lnSpc>
               <a:buNone/>
-            </a:pPr>
-            <a:r>
-              <a:rPr b="0" lang="en-US" sz="4000" spc="-1" strike="noStrike">
-                <a:solidFill>
-                  <a:schemeClr val="accent1"/>
-                </a:solidFill>
-                <a:latin typeface="Corbel"/>
-              </a:rPr>
-              <a:t>Click to edit Master title style</a:t>
-            </a:r>
-            <a:endParaRPr b="0" lang="en-US" sz="4000" spc="-1" strike="noStrike">
-              <a:solidFill>
-                <a:schemeClr val="dk1"/>
-              </a:solidFill>
-              <a:latin typeface="Corbel"/>
-            </a:endParaRPr>
-          </a:p>
-        </p:txBody>
-      </p:sp>
-      <p:sp>
-        <p:nvSpPr>
-          <p:cNvPr id="68" name="PlaceHolder 2"/>
+              <a:tabLst>
+                <a:tab algn="l" pos="0"/>
+              </a:tabLst>
+              <a:defRPr b="0" lang="en-US" sz="1400" spc="-1" strike="noStrike">
+                <a:solidFill>
+                  <a:srgbClr val="000000"/>
+                </a:solidFill>
+                <a:latin typeface="Noto Serif JP"/>
+              </a:defRPr>
+            </a:lvl1pPr>
+          </a:lstStyle>
+          <a:p>
+            <a:pPr indent="0" algn="ctr">
+              <a:lnSpc>
+                <a:spcPct val="100000"/>
+              </a:lnSpc>
+              <a:buNone/>
+              <a:tabLst>
+                <a:tab algn="l" pos="0"/>
+              </a:tabLst>
+            </a:pPr>
+            <a:r>
+              <a:rPr b="0" lang="en-US" sz="1400" spc="-1" strike="noStrike">
+                <a:solidFill>
+                  <a:srgbClr val="000000"/>
+                </a:solidFill>
+                <a:latin typeface="Noto Serif JP"/>
+              </a:rPr>
+              <a:t>&lt;フッター&gt;</a:t>
+            </a:r>
+            <a:endParaRPr b="0" lang="en-US" sz="1400" spc="-1" strike="noStrike">
+              <a:solidFill>
+                <a:srgbClr val="000000"/>
+              </a:solidFill>
+              <a:latin typeface="Noto Serif JP"/>
+            </a:endParaRPr>
+          </a:p>
+        </p:txBody>
+      </p:sp>
+      <p:sp>
+        <p:nvSpPr>
+          <p:cNvPr id="57" name="PlaceHolder 2"/>
           <p:cNvSpPr>
             <a:spLocks noGrp="1"/>
           </p:cNvSpPr>
           <p:nvPr>
-            <p:ph type="body"/>
+            <p:ph type="sldNum" idx="29"/>
           </p:nvPr>
         </p:nvSpPr>
         <p:spPr>
           <a:xfrm>
-            <a:off x="5852160" y="1097280"/>
-            <a:ext cx="5211720" cy="4663080"/>
+            <a:off x="9329400" y="6223680"/>
+            <a:ext cx="1705320" cy="364320"/>
           </a:xfrm>
           <a:prstGeom prst="rect">
             <a:avLst/>
@@ -2128,192 +2141,68 @@
           </a:ln>
         </p:spPr>
         <p:txBody>
-          <a:bodyPr lIns="91440" rIns="91440" tIns="45720" bIns="45720" anchor="t">
+          <a:bodyPr lIns="91440" rIns="91440" tIns="45720" bIns="45720" anchor="ctr">
             <a:noAutofit/>
           </a:bodyPr>
-          <a:p>
-            <a:pPr marL="228600" indent="-182880" defTabSz="914400">
+          <a:lstStyle>
+            <a:lvl1pPr indent="0" algn="r" defTabSz="914400">
               <a:lnSpc>
-                <a:spcPct val="90000"/>
+                <a:spcPct val="100000"/>
               </a:lnSpc>
-              <a:spcBef>
-                <a:spcPts val="1400"/>
-              </a:spcBef>
-              <a:buClr>
-                <a:srgbClr val="a6b727"/>
-              </a:buClr>
-              <a:buSzPct val="80000"/>
-              <a:buFont typeface="Corbel"/>
-              <a:buChar char="•"/>
-            </a:pPr>
-            <a:r>
-              <a:rPr b="0" lang="en-US" sz="3200" spc="-1" strike="noStrike">
+              <a:buNone/>
+              <a:tabLst>
+                <a:tab algn="l" pos="0"/>
+              </a:tabLst>
+              <a:defRPr b="0" lang="en-US" sz="1200" spc="-1" strike="noStrike">
                 <a:solidFill>
                   <a:schemeClr val="accent1"/>
                 </a:solidFill>
                 <a:latin typeface="Corbel"/>
-              </a:rPr>
-              <a:t>Click to edit Master text styles</a:t>
-            </a:r>
-            <a:endParaRPr b="0" lang="en-US" sz="3200" spc="-1" strike="noStrike">
-              <a:solidFill>
-                <a:schemeClr val="accent1"/>
-              </a:solidFill>
-              <a:latin typeface="Corbel"/>
-            </a:endParaRPr>
-          </a:p>
-          <a:p>
-            <a:pPr lvl="1" marL="457200" indent="-182880" defTabSz="914400">
+              </a:defRPr>
+            </a:lvl1pPr>
+          </a:lstStyle>
+          <a:p>
+            <a:pPr indent="0" algn="r" defTabSz="914400">
               <a:lnSpc>
-                <a:spcPct val="90000"/>
+                <a:spcPct val="100000"/>
               </a:lnSpc>
-              <a:spcBef>
-                <a:spcPts val="201"/>
-              </a:spcBef>
-              <a:spcAft>
-                <a:spcPts val="400"/>
-              </a:spcAft>
-              <a:buClr>
-                <a:srgbClr val="a6b727"/>
-              </a:buClr>
-              <a:buSzPct val="80000"/>
-              <a:buFont typeface="Corbel"/>
-              <a:buChar char="•"/>
-            </a:pPr>
-            <a:r>
-              <a:rPr b="0" lang="en-US" sz="2800" spc="-1" strike="noStrike">
+              <a:buNone/>
+              <a:tabLst>
+                <a:tab algn="l" pos="0"/>
+              </a:tabLst>
+            </a:pPr>
+            <a:fld id="{87B99CAE-6F5D-4798-A819-4F7534482F6C}" type="slidenum">
+              <a:rPr b="0" lang="en-US" sz="1200" spc="-1" strike="noStrike">
                 <a:solidFill>
                   <a:schemeClr val="accent1"/>
                 </a:solidFill>
                 <a:latin typeface="Corbel"/>
               </a:rPr>
-              <a:t>Second level</a:t>
-            </a:r>
-            <a:endParaRPr b="0" lang="en-US" sz="2800" spc="-1" strike="noStrike">
-              <a:solidFill>
-                <a:schemeClr val="accent1"/>
-              </a:solidFill>
-              <a:latin typeface="Corbel"/>
-            </a:endParaRPr>
-          </a:p>
-          <a:p>
-            <a:pPr lvl="2" marL="731520" indent="-182880" defTabSz="914400">
-              <a:lnSpc>
-                <a:spcPct val="90000"/>
-              </a:lnSpc>
-              <a:spcBef>
-                <a:spcPts val="201"/>
-              </a:spcBef>
-              <a:spcAft>
-                <a:spcPts val="400"/>
-              </a:spcAft>
-              <a:buClr>
-                <a:srgbClr val="a6b727"/>
-              </a:buClr>
-              <a:buSzPct val="80000"/>
-              <a:buFont typeface="Corbel"/>
-              <a:buChar char="•"/>
-            </a:pPr>
-            <a:r>
-              <a:rPr b="0" lang="en-US" sz="2400" spc="-1" strike="noStrike">
-                <a:solidFill>
-                  <a:schemeClr val="accent1"/>
-                </a:solidFill>
-                <a:latin typeface="Corbel"/>
-              </a:rPr>
-              <a:t>Third level</a:t>
-            </a:r>
-            <a:endParaRPr b="0" lang="en-US" sz="2400" spc="-1" strike="noStrike">
-              <a:solidFill>
-                <a:schemeClr val="accent1"/>
-              </a:solidFill>
-              <a:latin typeface="Corbel"/>
-            </a:endParaRPr>
-          </a:p>
-          <a:p>
-            <a:pPr lvl="3" marL="1005840" indent="-182880" defTabSz="914400">
-              <a:lnSpc>
-                <a:spcPct val="90000"/>
-              </a:lnSpc>
-              <a:spcBef>
-                <a:spcPts val="201"/>
-              </a:spcBef>
-              <a:spcAft>
-                <a:spcPts val="400"/>
-              </a:spcAft>
-              <a:buClr>
-                <a:srgbClr val="a6b727"/>
-              </a:buClr>
-              <a:buSzPct val="80000"/>
-              <a:buFont typeface="Corbel"/>
-              <a:buChar char="•"/>
-            </a:pPr>
-            <a:r>
-              <a:rPr b="0" lang="en-US" sz="2000" spc="-1" strike="noStrike">
-                <a:solidFill>
-                  <a:schemeClr val="accent1"/>
-                </a:solidFill>
-                <a:latin typeface="Corbel"/>
-              </a:rPr>
-              <a:t>Fourth level</a:t>
-            </a:r>
-            <a:endParaRPr b="0" lang="en-US" sz="2000" spc="-1" strike="noStrike">
-              <a:solidFill>
-                <a:schemeClr val="accent1"/>
-              </a:solidFill>
-              <a:latin typeface="Corbel"/>
-            </a:endParaRPr>
-          </a:p>
-          <a:p>
-            <a:pPr lvl="4" marL="1280160" indent="-182880" defTabSz="914400">
-              <a:lnSpc>
-                <a:spcPct val="90000"/>
-              </a:lnSpc>
-              <a:spcBef>
-                <a:spcPts val="201"/>
-              </a:spcBef>
-              <a:spcAft>
-                <a:spcPts val="400"/>
-              </a:spcAft>
-              <a:buClr>
-                <a:srgbClr val="a6b727"/>
-              </a:buClr>
-              <a:buSzPct val="80000"/>
-              <a:buFont typeface="Corbel"/>
-              <a:buChar char="•"/>
-            </a:pPr>
-            <a:r>
-              <a:rPr b="0" lang="en-US" sz="2000" spc="-1" strike="noStrike">
-                <a:solidFill>
-                  <a:schemeClr val="accent1"/>
-                </a:solidFill>
-                <a:latin typeface="Corbel"/>
-              </a:rPr>
-              <a:t>Fifth level</a:t>
-            </a:r>
-            <a:endParaRPr b="0" lang="en-US" sz="2000" spc="-1" strike="noStrike">
-              <a:solidFill>
-                <a:schemeClr val="accent1"/>
-              </a:solidFill>
-              <a:latin typeface="Corbel"/>
-            </a:endParaRPr>
-          </a:p>
-        </p:txBody>
-      </p:sp>
-      <p:sp>
-        <p:nvSpPr>
-          <p:cNvPr id="69" name="PlaceHolder 3"/>
+              <a:t>&lt;番号&gt;</a:t>
+            </a:fld>
+            <a:endParaRPr b="0" lang="en-US" sz="1200" spc="-1" strike="noStrike">
+              <a:solidFill>
+                <a:srgbClr val="000000"/>
+              </a:solidFill>
+              <a:latin typeface="Noto Serif JP"/>
+            </a:endParaRPr>
+          </a:p>
+        </p:txBody>
+      </p:sp>
+      <p:sp>
+        <p:nvSpPr>
+          <p:cNvPr id="58" name="PlaceHolder 3"/>
           <p:cNvSpPr>
             <a:spLocks noGrp="1"/>
           </p:cNvSpPr>
           <p:nvPr>
-            <p:ph type="body"/>
+            <p:ph type="dt" idx="30"/>
           </p:nvPr>
         </p:nvSpPr>
         <p:spPr>
           <a:xfrm>
-            <a:off x="1143000" y="2834640"/>
-            <a:ext cx="3931560" cy="3017160"/>
+            <a:off x="1143000" y="6223680"/>
+            <a:ext cx="2328480" cy="364320"/>
           </a:xfrm>
           <a:prstGeom prst="rect">
             <a:avLst/>
@@ -2324,135 +2213,11 @@
           </a:ln>
         </p:spPr>
         <p:txBody>
-          <a:bodyPr lIns="91440" rIns="91440" tIns="45720" bIns="45720" anchor="t">
-            <a:normAutofit/>
-          </a:bodyPr>
-          <a:p>
-            <a:pPr indent="0" defTabSz="914400">
-              <a:lnSpc>
-                <a:spcPct val="100000"/>
-              </a:lnSpc>
-              <a:spcBef>
-                <a:spcPts val="1001"/>
-              </a:spcBef>
-              <a:buNone/>
-              <a:tabLst>
-                <a:tab algn="l" pos="0"/>
-              </a:tabLst>
-            </a:pPr>
-            <a:r>
-              <a:rPr b="0" lang="en-US" sz="1700" spc="-1" strike="noStrike">
-                <a:solidFill>
-                  <a:schemeClr val="accent1"/>
-                </a:solidFill>
-                <a:latin typeface="Corbel"/>
-              </a:rPr>
-              <a:t>Click to edit Master text styles</a:t>
-            </a:r>
-            <a:endParaRPr b="0" lang="en-US" sz="1700" spc="-1" strike="noStrike">
-              <a:solidFill>
-                <a:schemeClr val="accent1"/>
-              </a:solidFill>
-              <a:latin typeface="Corbel"/>
-            </a:endParaRPr>
-          </a:p>
-        </p:txBody>
-      </p:sp>
-      <p:sp>
-        <p:nvSpPr>
-          <p:cNvPr id="70" name="PlaceHolder 4"/>
-          <p:cNvSpPr>
-            <a:spLocks noGrp="1"/>
-          </p:cNvSpPr>
-          <p:nvPr>
-            <p:ph type="dt" idx="28"/>
-          </p:nvPr>
-        </p:nvSpPr>
-        <p:spPr>
-          <a:xfrm>
-            <a:off x="1143000" y="6223680"/>
-            <a:ext cx="2328840" cy="364680"/>
-          </a:xfrm>
-          <a:prstGeom prst="rect">
-            <a:avLst/>
-          </a:prstGeom>
-          <a:noFill/>
-          <a:ln w="0">
-            <a:noFill/>
-          </a:ln>
-        </p:spPr>
-        <p:txBody>
           <a:bodyPr lIns="91440" rIns="91440" tIns="45720" bIns="45720" anchor="ctr">
             <a:noAutofit/>
           </a:bodyPr>
           <a:lstStyle>
-            <a:lvl1pPr indent="0" defTabSz="914400">
-              <a:lnSpc>
-                <a:spcPct val="100000"/>
-              </a:lnSpc>
-              <a:buNone/>
-              <a:defRPr b="0" lang="en-US" sz="1200" spc="-1" strike="noStrike">
-                <a:solidFill>
-                  <a:schemeClr val="accent1"/>
-                </a:solidFill>
-                <a:latin typeface="Corbel"/>
-              </a:defRPr>
-            </a:lvl1pPr>
-          </a:lstStyle>
-          <a:p>
-            <a:pPr indent="0" defTabSz="914400">
-              <a:lnSpc>
-                <a:spcPct val="100000"/>
-              </a:lnSpc>
-              <a:buNone/>
-            </a:pPr>
-            <a:r>
-              <a:rPr b="0" lang="en-US" sz="1200" spc="-1" strike="noStrike">
-                <a:solidFill>
-                  <a:schemeClr val="accent1"/>
-                </a:solidFill>
-                <a:latin typeface="Corbel"/>
-              </a:rPr>
-              <a:t>&lt;日付/時刻&gt;</a:t>
-            </a:r>
-            <a:endParaRPr b="0" lang="en-US" sz="1200" spc="-1" strike="noStrike">
-              <a:solidFill>
-                <a:srgbClr val="000000"/>
-              </a:solidFill>
-              <a:latin typeface="Noto Serif JP"/>
-            </a:endParaRPr>
-          </a:p>
-        </p:txBody>
-      </p:sp>
-      <p:sp>
-        <p:nvSpPr>
-          <p:cNvPr id="71" name="PlaceHolder 5"/>
-          <p:cNvSpPr>
-            <a:spLocks noGrp="1"/>
-          </p:cNvSpPr>
-          <p:nvPr>
-            <p:ph type="ftr" idx="29"/>
-          </p:nvPr>
-        </p:nvSpPr>
-        <p:spPr>
-          <a:xfrm>
-            <a:off x="3949200" y="6223680"/>
-            <a:ext cx="4717440" cy="364680"/>
-          </a:xfrm>
-          <a:prstGeom prst="rect">
-            <a:avLst/>
-          </a:prstGeom>
-          <a:noFill/>
-          <a:ln w="0">
-            <a:noFill/>
-          </a:ln>
-        </p:spPr>
-        <p:txBody>
-          <a:bodyPr lIns="91440" rIns="91440" tIns="45720" bIns="45720" anchor="ctr">
-            <a:noAutofit/>
-          </a:bodyPr>
-          <a:lstStyle>
-            <a:lvl1pPr indent="0" algn="ctr">
+            <a:lvl1pPr indent="0">
               <a:buNone/>
               <a:defRPr b="0" lang="en-US" sz="1400" spc="-1" strike="noStrike">
                 <a:solidFill>
@@ -2463,7 +2228,7 @@
             </a:lvl1pPr>
           </a:lstStyle>
           <a:p>
-            <a:pPr indent="0" algn="ctr">
+            <a:pPr indent="0">
               <a:buNone/>
             </a:pPr>
             <a:r>
@@ -2473,75 +2238,9 @@
                 </a:solidFill>
                 <a:latin typeface="Noto Serif JP"/>
               </a:rPr>
-              <a:t>&lt;フッター&gt;</a:t>
+              <a:t>&lt;日付/時刻&gt;</a:t>
             </a:r>
             <a:endParaRPr b="0" lang="en-US" sz="1400" spc="-1" strike="noStrike">
-              <a:solidFill>
-                <a:srgbClr val="000000"/>
-              </a:solidFill>
-              <a:latin typeface="Noto Serif JP"/>
-            </a:endParaRPr>
-          </a:p>
-        </p:txBody>
-      </p:sp>
-      <p:sp>
-        <p:nvSpPr>
-          <p:cNvPr id="72" name="PlaceHolder 6"/>
-          <p:cNvSpPr>
-            <a:spLocks noGrp="1"/>
-          </p:cNvSpPr>
-          <p:nvPr>
-            <p:ph type="sldNum" idx="30"/>
-          </p:nvPr>
-        </p:nvSpPr>
-        <p:spPr>
-          <a:xfrm>
-            <a:off x="9329400" y="6223680"/>
-            <a:ext cx="1705680" cy="364680"/>
-          </a:xfrm>
-          <a:prstGeom prst="rect">
-            <a:avLst/>
-          </a:prstGeom>
-          <a:noFill/>
-          <a:ln w="0">
-            <a:noFill/>
-          </a:ln>
-        </p:spPr>
-        <p:txBody>
-          <a:bodyPr lIns="91440" rIns="91440" tIns="45720" bIns="45720" anchor="ctr">
-            <a:noAutofit/>
-          </a:bodyPr>
-          <a:lstStyle>
-            <a:lvl1pPr indent="0" algn="r" defTabSz="914400">
-              <a:lnSpc>
-                <a:spcPct val="100000"/>
-              </a:lnSpc>
-              <a:buNone/>
-              <a:defRPr b="0" lang="en-US" sz="1200" spc="-1" strike="noStrike">
-                <a:solidFill>
-                  <a:schemeClr val="accent1"/>
-                </a:solidFill>
-                <a:latin typeface="Corbel"/>
-              </a:defRPr>
-            </a:lvl1pPr>
-          </a:lstStyle>
-          <a:p>
-            <a:pPr indent="0" algn="r" defTabSz="914400">
-              <a:lnSpc>
-                <a:spcPct val="100000"/>
-              </a:lnSpc>
-              <a:buNone/>
-            </a:pPr>
-            <a:fld id="{94A9A808-E204-43C2-B159-1A750A0F3C88}" type="slidenum">
-              <a:rPr b="0" lang="en-US" sz="1200" spc="-1" strike="noStrike">
-                <a:solidFill>
-                  <a:schemeClr val="accent1"/>
-                </a:solidFill>
-                <a:latin typeface="Corbel"/>
-              </a:rPr>
-              <a:t>&lt;番号&gt;</a:t>
-            </a:fld>
-            <a:endParaRPr b="0" lang="en-US" sz="1200" spc="-1" strike="noStrike">
               <a:solidFill>
                 <a:srgbClr val="000000"/>
               </a:solidFill>
@@ -2585,14 +2284,14 @@
       </p:grpSpPr>
       <p:sp>
         <p:nvSpPr>
-          <p:cNvPr id="73" name="Rectangle 6"/>
+          <p:cNvPr id="59" name="Rectangle 6"/>
           <p:cNvSpPr/>
           <p:nvPr/>
         </p:nvSpPr>
         <p:spPr>
           <a:xfrm>
             <a:off x="231120" y="243720"/>
-            <a:ext cx="11724120" cy="6377400"/>
+            <a:ext cx="11723760" cy="6377040"/>
           </a:xfrm>
           <a:prstGeom prst="rect">
             <a:avLst/>
@@ -2623,6 +2322,11 @@
             <a:noAutofit/>
           </a:bodyPr>
           <a:p>
+            <a:pPr>
+              <a:lnSpc>
+                <a:spcPct val="100000"/>
+              </a:lnSpc>
+            </a:pPr>
             <a:endParaRPr b="0" lang="en-US" sz="1800" spc="-1" strike="noStrike">
               <a:solidFill>
                 <a:srgbClr val="000000"/>
@@ -2634,18 +2338,18 @@
       </p:sp>
       <p:sp>
         <p:nvSpPr>
-          <p:cNvPr id="74" name="PlaceHolder 1"/>
+          <p:cNvPr id="60" name="PlaceHolder 1"/>
           <p:cNvSpPr>
             <a:spLocks noGrp="1"/>
           </p:cNvSpPr>
           <p:nvPr>
-            <p:ph type="title"/>
+            <p:ph type="ftr" idx="31"/>
           </p:nvPr>
         </p:nvSpPr>
         <p:spPr>
           <a:xfrm>
-            <a:off x="1143000" y="1097280"/>
-            <a:ext cx="3931560" cy="1737000"/>
+            <a:off x="3949200" y="6223680"/>
+            <a:ext cx="4717080" cy="364320"/>
           </a:xfrm>
           <a:prstGeom prst="rect">
             <a:avLst/>
@@ -2656,48 +2360,68 @@
           </a:ln>
         </p:spPr>
         <p:txBody>
-          <a:bodyPr lIns="91440" rIns="91440" tIns="45720" bIns="45720" anchor="b">
+          <a:bodyPr lIns="91440" rIns="91440" tIns="45720" bIns="45720" anchor="ctr">
             <a:noAutofit/>
           </a:bodyPr>
-          <a:p>
-            <a:pPr indent="0" defTabSz="914400">
+          <a:lstStyle>
+            <a:lvl1pPr indent="0" algn="ctr">
               <a:lnSpc>
-                <a:spcPct val="90000"/>
+                <a:spcPct val="100000"/>
               </a:lnSpc>
               <a:buNone/>
-            </a:pPr>
-            <a:r>
-              <a:rPr b="0" lang="en-US" sz="4000" spc="-1" strike="noStrike">
-                <a:solidFill>
-                  <a:schemeClr val="accent1"/>
-                </a:solidFill>
-                <a:latin typeface="Corbel"/>
-              </a:rPr>
-              <a:t>Click to edit Master title style</a:t>
-            </a:r>
-            <a:endParaRPr b="0" lang="en-US" sz="4000" spc="-1" strike="noStrike">
-              <a:solidFill>
-                <a:schemeClr val="dk1"/>
-              </a:solidFill>
-              <a:latin typeface="Corbel"/>
-            </a:endParaRPr>
-          </a:p>
-        </p:txBody>
-      </p:sp>
-      <p:sp>
-        <p:nvSpPr>
-          <p:cNvPr id="75" name="PlaceHolder 2"/>
+              <a:tabLst>
+                <a:tab algn="l" pos="0"/>
+              </a:tabLst>
+              <a:defRPr b="0" lang="en-US" sz="1400" spc="-1" strike="noStrike">
+                <a:solidFill>
+                  <a:srgbClr val="000000"/>
+                </a:solidFill>
+                <a:latin typeface="Noto Serif JP"/>
+              </a:defRPr>
+            </a:lvl1pPr>
+          </a:lstStyle>
+          <a:p>
+            <a:pPr indent="0" algn="ctr">
+              <a:lnSpc>
+                <a:spcPct val="100000"/>
+              </a:lnSpc>
+              <a:buNone/>
+              <a:tabLst>
+                <a:tab algn="l" pos="0"/>
+              </a:tabLst>
+            </a:pPr>
+            <a:r>
+              <a:rPr b="0" lang="en-US" sz="1400" spc="-1" strike="noStrike">
+                <a:solidFill>
+                  <a:srgbClr val="000000"/>
+                </a:solidFill>
+                <a:latin typeface="Noto Serif JP"/>
+              </a:rPr>
+              <a:t>&lt;フッター&gt;</a:t>
+            </a:r>
+            <a:endParaRPr b="0" lang="en-US" sz="1400" spc="-1" strike="noStrike">
+              <a:solidFill>
+                <a:srgbClr val="000000"/>
+              </a:solidFill>
+              <a:latin typeface="Noto Serif JP"/>
+            </a:endParaRPr>
+          </a:p>
+        </p:txBody>
+      </p:sp>
+      <p:sp>
+        <p:nvSpPr>
+          <p:cNvPr id="61" name="PlaceHolder 2"/>
           <p:cNvSpPr>
             <a:spLocks noGrp="1"/>
           </p:cNvSpPr>
           <p:nvPr>
-            <p:ph type="body"/>
+            <p:ph type="sldNum" idx="32"/>
           </p:nvPr>
         </p:nvSpPr>
         <p:spPr>
           <a:xfrm>
-            <a:off x="5413320" y="1069920"/>
-            <a:ext cx="6098760" cy="4800240"/>
+            <a:off x="9329400" y="6223680"/>
+            <a:ext cx="1705320" cy="364320"/>
           </a:xfrm>
           <a:prstGeom prst="rect">
             <a:avLst/>
@@ -2708,296 +2432,68 @@
           </a:ln>
         </p:spPr>
         <p:txBody>
-          <a:bodyPr lIns="274320" rIns="90000" tIns="182880" bIns="45000" anchor="t">
-            <a:normAutofit/>
+          <a:bodyPr lIns="91440" rIns="91440" tIns="45720" bIns="45720" anchor="ctr">
+            <a:noAutofit/>
           </a:bodyPr>
-          <a:p>
-            <a:pPr marL="432000" indent="-324000">
+          <a:lstStyle>
+            <a:lvl1pPr indent="0" algn="r" defTabSz="914400">
               <a:lnSpc>
-                <a:spcPct val="90000"/>
+                <a:spcPct val="100000"/>
               </a:lnSpc>
-              <a:spcBef>
-                <a:spcPts val="1417"/>
-              </a:spcBef>
-              <a:buClr>
-                <a:srgbClr val="000000"/>
-              </a:buClr>
-              <a:buSzPct val="45000"/>
-              <a:buFont typeface="Wingdings" charset="2"/>
-              <a:buChar char=""/>
-            </a:pPr>
-            <a:r>
-              <a:rPr b="0" lang="ja-JP" sz="2800" spc="-1" strike="noStrike">
+              <a:buNone/>
+              <a:tabLst>
+                <a:tab algn="l" pos="0"/>
+              </a:tabLst>
+              <a:defRPr b="0" lang="en-US" sz="1200" spc="-1" strike="noStrike">
                 <a:solidFill>
                   <a:schemeClr val="accent1"/>
                 </a:solidFill>
                 <a:latin typeface="Corbel"/>
-              </a:rPr>
-              <a:t>クリックしてアウトラインのテキストを編集</a:t>
-            </a:r>
-            <a:endParaRPr b="0" lang="en-US" sz="2800" spc="-1" strike="noStrike">
-              <a:solidFill>
-                <a:schemeClr val="accent1"/>
-              </a:solidFill>
-              <a:latin typeface="Corbel"/>
-            </a:endParaRPr>
-          </a:p>
-          <a:p>
-            <a:pPr lvl="1" marL="864000" indent="-324000">
+              </a:defRPr>
+            </a:lvl1pPr>
+          </a:lstStyle>
+          <a:p>
+            <a:pPr indent="0" algn="r" defTabSz="914400">
               <a:lnSpc>
-                <a:spcPct val="90000"/>
+                <a:spcPct val="100000"/>
               </a:lnSpc>
-              <a:spcBef>
-                <a:spcPts val="1134"/>
-              </a:spcBef>
-              <a:buClr>
-                <a:srgbClr val="000000"/>
-              </a:buClr>
-              <a:buSzPct val="75000"/>
-              <a:buFont typeface="Symbol" charset="2"/>
-              <a:buChar char=""/>
-            </a:pPr>
-            <a:r>
-              <a:rPr b="0" lang="en-US" sz="2800" spc="-1" strike="noStrike">
+              <a:buNone/>
+              <a:tabLst>
+                <a:tab algn="l" pos="0"/>
+              </a:tabLst>
+            </a:pPr>
+            <a:fld id="{EB024C01-717F-454B-8FD3-7F3610DA8091}" type="slidenum">
+              <a:rPr b="0" lang="en-US" sz="1200" spc="-1" strike="noStrike">
                 <a:solidFill>
                   <a:schemeClr val="accent1"/>
                 </a:solidFill>
                 <a:latin typeface="Corbel"/>
               </a:rPr>
-              <a:t>2</a:t>
-            </a:r>
-            <a:r>
-              <a:rPr b="0" lang="ja-JP" sz="2800" spc="-1" strike="noStrike">
-                <a:solidFill>
-                  <a:schemeClr val="accent1"/>
-                </a:solidFill>
-                <a:latin typeface="Corbel"/>
-              </a:rPr>
-              <a:t>レベル目のアウトライン</a:t>
-            </a:r>
-            <a:endParaRPr b="0" lang="en-US" sz="2800" spc="-1" strike="noStrike">
-              <a:solidFill>
-                <a:schemeClr val="accent1"/>
-              </a:solidFill>
-              <a:latin typeface="Corbel"/>
-            </a:endParaRPr>
-          </a:p>
-          <a:p>
-            <a:pPr lvl="2" marL="1296000" indent="-288000">
-              <a:lnSpc>
-                <a:spcPct val="90000"/>
-              </a:lnSpc>
-              <a:spcBef>
-                <a:spcPts val="850"/>
-              </a:spcBef>
-              <a:buClr>
-                <a:srgbClr val="000000"/>
-              </a:buClr>
-              <a:buSzPct val="45000"/>
-              <a:buFont typeface="Wingdings" charset="2"/>
-              <a:buChar char=""/>
-            </a:pPr>
-            <a:r>
-              <a:rPr b="0" lang="en-US" sz="2800" spc="-1" strike="noStrike">
-                <a:solidFill>
-                  <a:schemeClr val="accent1"/>
-                </a:solidFill>
-                <a:latin typeface="Corbel"/>
-              </a:rPr>
-              <a:t>3</a:t>
-            </a:r>
-            <a:r>
-              <a:rPr b="0" lang="ja-JP" sz="2800" spc="-1" strike="noStrike">
-                <a:solidFill>
-                  <a:schemeClr val="accent1"/>
-                </a:solidFill>
-                <a:latin typeface="Corbel"/>
-              </a:rPr>
-              <a:t>レベル目のアウトライン</a:t>
-            </a:r>
-            <a:endParaRPr b="0" lang="en-US" sz="2800" spc="-1" strike="noStrike">
-              <a:solidFill>
-                <a:schemeClr val="accent1"/>
-              </a:solidFill>
-              <a:latin typeface="Corbel"/>
-            </a:endParaRPr>
-          </a:p>
-          <a:p>
-            <a:pPr lvl="3" marL="1728000" indent="-216000">
-              <a:lnSpc>
-                <a:spcPct val="90000"/>
-              </a:lnSpc>
-              <a:spcBef>
-                <a:spcPts val="567"/>
-              </a:spcBef>
-              <a:buClr>
-                <a:srgbClr val="000000"/>
-              </a:buClr>
-              <a:buSzPct val="75000"/>
-              <a:buFont typeface="Symbol" charset="2"/>
-              <a:buChar char=""/>
-            </a:pPr>
-            <a:r>
-              <a:rPr b="0" lang="en-US" sz="2800" spc="-1" strike="noStrike">
-                <a:solidFill>
-                  <a:schemeClr val="accent1"/>
-                </a:solidFill>
-                <a:latin typeface="Corbel"/>
-              </a:rPr>
-              <a:t>4</a:t>
-            </a:r>
-            <a:r>
-              <a:rPr b="0" lang="ja-JP" sz="2800" spc="-1" strike="noStrike">
-                <a:solidFill>
-                  <a:schemeClr val="accent1"/>
-                </a:solidFill>
-                <a:latin typeface="Corbel"/>
-              </a:rPr>
-              <a:t>レベル目のアウトライン</a:t>
-            </a:r>
-            <a:endParaRPr b="0" lang="en-US" sz="2800" spc="-1" strike="noStrike">
-              <a:solidFill>
-                <a:schemeClr val="accent1"/>
-              </a:solidFill>
-              <a:latin typeface="Corbel"/>
-            </a:endParaRPr>
-          </a:p>
-          <a:p>
-            <a:pPr lvl="4" marL="2160000" indent="-216000">
-              <a:lnSpc>
-                <a:spcPct val="90000"/>
-              </a:lnSpc>
-              <a:spcBef>
-                <a:spcPts val="283"/>
-              </a:spcBef>
-              <a:buClr>
-                <a:srgbClr val="000000"/>
-              </a:buClr>
-              <a:buSzPct val="45000"/>
-              <a:buFont typeface="Wingdings" charset="2"/>
-              <a:buChar char=""/>
-            </a:pPr>
-            <a:r>
-              <a:rPr b="0" lang="en-US" sz="2800" spc="-1" strike="noStrike">
-                <a:solidFill>
-                  <a:schemeClr val="accent1"/>
-                </a:solidFill>
-                <a:latin typeface="Corbel"/>
-              </a:rPr>
-              <a:t>5</a:t>
-            </a:r>
-            <a:r>
-              <a:rPr b="0" lang="ja-JP" sz="2800" spc="-1" strike="noStrike">
-                <a:solidFill>
-                  <a:schemeClr val="accent1"/>
-                </a:solidFill>
-                <a:latin typeface="Corbel"/>
-              </a:rPr>
-              <a:t>レベル目のアウトライン</a:t>
-            </a:r>
-            <a:endParaRPr b="0" lang="en-US" sz="2800" spc="-1" strike="noStrike">
-              <a:solidFill>
-                <a:schemeClr val="accent1"/>
-              </a:solidFill>
-              <a:latin typeface="Corbel"/>
-            </a:endParaRPr>
-          </a:p>
-          <a:p>
-            <a:pPr lvl="5" marL="2592000" indent="-216000">
-              <a:lnSpc>
-                <a:spcPct val="90000"/>
-              </a:lnSpc>
-              <a:spcBef>
-                <a:spcPts val="283"/>
-              </a:spcBef>
-              <a:buClr>
-                <a:srgbClr val="000000"/>
-              </a:buClr>
-              <a:buSzPct val="45000"/>
-              <a:buFont typeface="Wingdings" charset="2"/>
-              <a:buChar char=""/>
-            </a:pPr>
-            <a:r>
-              <a:rPr b="0" lang="en-US" sz="2800" spc="-1" strike="noStrike">
-                <a:solidFill>
-                  <a:schemeClr val="accent1"/>
-                </a:solidFill>
-                <a:latin typeface="Corbel"/>
-              </a:rPr>
-              <a:t>6</a:t>
-            </a:r>
-            <a:r>
-              <a:rPr b="0" lang="ja-JP" sz="2800" spc="-1" strike="noStrike">
-                <a:solidFill>
-                  <a:schemeClr val="accent1"/>
-                </a:solidFill>
-                <a:latin typeface="Corbel"/>
-              </a:rPr>
-              <a:t>レベル目のアウトライン</a:t>
-            </a:r>
-            <a:endParaRPr b="0" lang="en-US" sz="2800" spc="-1" strike="noStrike">
-              <a:solidFill>
-                <a:schemeClr val="accent1"/>
-              </a:solidFill>
-              <a:latin typeface="Corbel"/>
-            </a:endParaRPr>
-          </a:p>
-          <a:p>
-            <a:pPr lvl="6" marL="3024000" indent="-216000">
-              <a:lnSpc>
-                <a:spcPct val="90000"/>
-              </a:lnSpc>
-              <a:spcBef>
-                <a:spcPts val="283"/>
-              </a:spcBef>
-              <a:buClr>
-                <a:srgbClr val="000000"/>
-              </a:buClr>
-              <a:buSzPct val="45000"/>
-              <a:buFont typeface="Wingdings" charset="2"/>
-              <a:buChar char=""/>
-            </a:pPr>
-            <a:r>
-              <a:rPr b="0" lang="en-US" sz="2800" spc="-1" strike="noStrike">
-                <a:solidFill>
-                  <a:schemeClr val="accent1"/>
-                </a:solidFill>
-                <a:latin typeface="Corbel"/>
-              </a:rPr>
-              <a:t>7</a:t>
-            </a:r>
-            <a:r>
-              <a:rPr b="0" lang="ja-JP" sz="2800" spc="-1" strike="noStrike">
-                <a:solidFill>
-                  <a:schemeClr val="accent1"/>
-                </a:solidFill>
-                <a:latin typeface="Corbel"/>
-              </a:rPr>
-              <a:t>レベル目のアウトライン</a:t>
-            </a:r>
-            <a:endParaRPr b="0" lang="en-US" sz="2800" spc="-1" strike="noStrike">
-              <a:solidFill>
-                <a:schemeClr val="accent1"/>
-              </a:solidFill>
-              <a:latin typeface="Corbel"/>
-            </a:endParaRPr>
-          </a:p>
-        </p:txBody>
-      </p:sp>
-      <p:sp>
-        <p:nvSpPr>
-          <p:cNvPr id="76" name="PlaceHolder 3"/>
+              <a:t>&lt;番号&gt;</a:t>
+            </a:fld>
+            <a:endParaRPr b="0" lang="en-US" sz="1200" spc="-1" strike="noStrike">
+              <a:solidFill>
+                <a:srgbClr val="000000"/>
+              </a:solidFill>
+              <a:latin typeface="Noto Serif JP"/>
+            </a:endParaRPr>
+          </a:p>
+        </p:txBody>
+      </p:sp>
+      <p:sp>
+        <p:nvSpPr>
+          <p:cNvPr id="62" name="PlaceHolder 3"/>
           <p:cNvSpPr>
             <a:spLocks noGrp="1"/>
           </p:cNvSpPr>
           <p:nvPr>
-            <p:ph type="body"/>
+            <p:ph type="dt" idx="33"/>
           </p:nvPr>
         </p:nvSpPr>
         <p:spPr>
           <a:xfrm>
-            <a:off x="1143000" y="2834640"/>
-            <a:ext cx="3931560" cy="2880000"/>
+            <a:off x="1143000" y="6223680"/>
+            <a:ext cx="2328480" cy="364320"/>
           </a:xfrm>
           <a:prstGeom prst="rect">
             <a:avLst/>
@@ -3008,135 +2504,11 @@
           </a:ln>
         </p:spPr>
         <p:txBody>
-          <a:bodyPr lIns="91440" rIns="91440" tIns="45720" bIns="45720" anchor="t">
-            <a:normAutofit/>
-          </a:bodyPr>
-          <a:p>
-            <a:pPr indent="0" defTabSz="914400">
-              <a:lnSpc>
-                <a:spcPct val="100000"/>
-              </a:lnSpc>
-              <a:spcBef>
-                <a:spcPts val="1001"/>
-              </a:spcBef>
-              <a:buNone/>
-              <a:tabLst>
-                <a:tab algn="l" pos="0"/>
-              </a:tabLst>
-            </a:pPr>
-            <a:r>
-              <a:rPr b="0" lang="en-US" sz="1700" spc="-1" strike="noStrike">
-                <a:solidFill>
-                  <a:schemeClr val="accent1"/>
-                </a:solidFill>
-                <a:latin typeface="Corbel"/>
-              </a:rPr>
-              <a:t>Click to edit Master text styles</a:t>
-            </a:r>
-            <a:endParaRPr b="0" lang="en-US" sz="1700" spc="-1" strike="noStrike">
-              <a:solidFill>
-                <a:schemeClr val="accent1"/>
-              </a:solidFill>
-              <a:latin typeface="Corbel"/>
-            </a:endParaRPr>
-          </a:p>
-        </p:txBody>
-      </p:sp>
-      <p:sp>
-        <p:nvSpPr>
-          <p:cNvPr id="77" name="PlaceHolder 4"/>
-          <p:cNvSpPr>
-            <a:spLocks noGrp="1"/>
-          </p:cNvSpPr>
-          <p:nvPr>
-            <p:ph type="dt" idx="31"/>
-          </p:nvPr>
-        </p:nvSpPr>
-        <p:spPr>
-          <a:xfrm>
-            <a:off x="1143000" y="6223680"/>
-            <a:ext cx="2328840" cy="364680"/>
-          </a:xfrm>
-          <a:prstGeom prst="rect">
-            <a:avLst/>
-          </a:prstGeom>
-          <a:noFill/>
-          <a:ln w="0">
-            <a:noFill/>
-          </a:ln>
-        </p:spPr>
-        <p:txBody>
           <a:bodyPr lIns="91440" rIns="91440" tIns="45720" bIns="45720" anchor="ctr">
             <a:noAutofit/>
           </a:bodyPr>
           <a:lstStyle>
-            <a:lvl1pPr indent="0" defTabSz="914400">
-              <a:lnSpc>
-                <a:spcPct val="100000"/>
-              </a:lnSpc>
-              <a:buNone/>
-              <a:defRPr b="0" lang="en-US" sz="1200" spc="-1" strike="noStrike">
-                <a:solidFill>
-                  <a:schemeClr val="accent1"/>
-                </a:solidFill>
-                <a:latin typeface="Corbel"/>
-              </a:defRPr>
-            </a:lvl1pPr>
-          </a:lstStyle>
-          <a:p>
-            <a:pPr indent="0" defTabSz="914400">
-              <a:lnSpc>
-                <a:spcPct val="100000"/>
-              </a:lnSpc>
-              <a:buNone/>
-            </a:pPr>
-            <a:r>
-              <a:rPr b="0" lang="en-US" sz="1200" spc="-1" strike="noStrike">
-                <a:solidFill>
-                  <a:schemeClr val="accent1"/>
-                </a:solidFill>
-                <a:latin typeface="Corbel"/>
-              </a:rPr>
-              <a:t>&lt;日付/時刻&gt;</a:t>
-            </a:r>
-            <a:endParaRPr b="0" lang="en-US" sz="1200" spc="-1" strike="noStrike">
-              <a:solidFill>
-                <a:srgbClr val="000000"/>
-              </a:solidFill>
-              <a:latin typeface="Noto Serif JP"/>
-            </a:endParaRPr>
-          </a:p>
-        </p:txBody>
-      </p:sp>
-      <p:sp>
-        <p:nvSpPr>
-          <p:cNvPr id="78" name="PlaceHolder 5"/>
-          <p:cNvSpPr>
-            <a:spLocks noGrp="1"/>
-          </p:cNvSpPr>
-          <p:nvPr>
-            <p:ph type="ftr" idx="32"/>
-          </p:nvPr>
-        </p:nvSpPr>
-        <p:spPr>
-          <a:xfrm>
-            <a:off x="3949200" y="6223680"/>
-            <a:ext cx="4717440" cy="364680"/>
-          </a:xfrm>
-          <a:prstGeom prst="rect">
-            <a:avLst/>
-          </a:prstGeom>
-          <a:noFill/>
-          <a:ln w="0">
-            <a:noFill/>
-          </a:ln>
-        </p:spPr>
-        <p:txBody>
-          <a:bodyPr lIns="91440" rIns="91440" tIns="45720" bIns="45720" anchor="ctr">
-            <a:noAutofit/>
-          </a:bodyPr>
-          <a:lstStyle>
-            <a:lvl1pPr indent="0" algn="ctr">
+            <a:lvl1pPr indent="0">
               <a:buNone/>
               <a:defRPr b="0" lang="en-US" sz="1400" spc="-1" strike="noStrike">
                 <a:solidFill>
@@ -3147,7 +2519,7 @@
             </a:lvl1pPr>
           </a:lstStyle>
           <a:p>
-            <a:pPr indent="0" algn="ctr">
+            <a:pPr indent="0">
               <a:buNone/>
             </a:pPr>
             <a:r>
@@ -3157,75 +2529,9 @@
                 </a:solidFill>
                 <a:latin typeface="Noto Serif JP"/>
               </a:rPr>
-              <a:t>&lt;フッター&gt;</a:t>
+              <a:t>&lt;日付/時刻&gt;</a:t>
             </a:r>
             <a:endParaRPr b="0" lang="en-US" sz="1400" spc="-1" strike="noStrike">
-              <a:solidFill>
-                <a:srgbClr val="000000"/>
-              </a:solidFill>
-              <a:latin typeface="Noto Serif JP"/>
-            </a:endParaRPr>
-          </a:p>
-        </p:txBody>
-      </p:sp>
-      <p:sp>
-        <p:nvSpPr>
-          <p:cNvPr id="79" name="PlaceHolder 6"/>
-          <p:cNvSpPr>
-            <a:spLocks noGrp="1"/>
-          </p:cNvSpPr>
-          <p:nvPr>
-            <p:ph type="sldNum" idx="33"/>
-          </p:nvPr>
-        </p:nvSpPr>
-        <p:spPr>
-          <a:xfrm>
-            <a:off x="9329400" y="6223680"/>
-            <a:ext cx="1705680" cy="364680"/>
-          </a:xfrm>
-          <a:prstGeom prst="rect">
-            <a:avLst/>
-          </a:prstGeom>
-          <a:noFill/>
-          <a:ln w="0">
-            <a:noFill/>
-          </a:ln>
-        </p:spPr>
-        <p:txBody>
-          <a:bodyPr lIns="91440" rIns="91440" tIns="45720" bIns="45720" anchor="ctr">
-            <a:noAutofit/>
-          </a:bodyPr>
-          <a:lstStyle>
-            <a:lvl1pPr indent="0" algn="r" defTabSz="914400">
-              <a:lnSpc>
-                <a:spcPct val="100000"/>
-              </a:lnSpc>
-              <a:buNone/>
-              <a:defRPr b="0" lang="en-US" sz="1200" spc="-1" strike="noStrike">
-                <a:solidFill>
-                  <a:schemeClr val="accent1"/>
-                </a:solidFill>
-                <a:latin typeface="Corbel"/>
-              </a:defRPr>
-            </a:lvl1pPr>
-          </a:lstStyle>
-          <a:p>
-            <a:pPr indent="0" algn="r" defTabSz="914400">
-              <a:lnSpc>
-                <a:spcPct val="100000"/>
-              </a:lnSpc>
-              <a:buNone/>
-            </a:pPr>
-            <a:fld id="{89C3ED8B-9B18-47DF-BC4C-DD6773454729}" type="slidenum">
-              <a:rPr b="0" lang="en-US" sz="1200" spc="-1" strike="noStrike">
-                <a:solidFill>
-                  <a:schemeClr val="accent1"/>
-                </a:solidFill>
-                <a:latin typeface="Corbel"/>
-              </a:rPr>
-              <a:t>&lt;番号&gt;</a:t>
-            </a:fld>
-            <a:endParaRPr b="0" lang="en-US" sz="1200" spc="-1" strike="noStrike">
               <a:solidFill>
                 <a:srgbClr val="000000"/>
               </a:solidFill>
@@ -3276,7 +2582,7 @@
         <p:spPr>
           <a:xfrm>
             <a:off x="231120" y="243720"/>
-            <a:ext cx="11724120" cy="6377400"/>
+            <a:ext cx="11723760" cy="6377040"/>
           </a:xfrm>
           <a:prstGeom prst="rect">
             <a:avLst/>
@@ -3307,6 +2613,11 @@
             <a:noAutofit/>
           </a:bodyPr>
           <a:p>
+            <a:pPr>
+              <a:lnSpc>
+                <a:spcPct val="100000"/>
+              </a:lnSpc>
+            </a:pPr>
             <a:endParaRPr b="0" lang="en-US" sz="1800" spc="-1" strike="noStrike">
               <a:solidFill>
                 <a:srgbClr val="000000"/>
@@ -3323,13 +2634,13 @@
             <a:spLocks noGrp="1"/>
           </p:cNvSpPr>
           <p:nvPr>
-            <p:ph type="title"/>
+            <p:ph type="ftr" idx="4"/>
           </p:nvPr>
         </p:nvSpPr>
         <p:spPr>
           <a:xfrm>
-            <a:off x="1143000" y="609480"/>
-            <a:ext cx="9875160" cy="1356120"/>
+            <a:off x="3949200" y="6223680"/>
+            <a:ext cx="4717080" cy="364320"/>
           </a:xfrm>
           <a:prstGeom prst="rect">
             <a:avLst/>
@@ -3343,27 +2654,47 @@
           <a:bodyPr lIns="91440" rIns="91440" tIns="45720" bIns="45720" anchor="ctr">
             <a:noAutofit/>
           </a:bodyPr>
-          <a:p>
-            <a:pPr indent="0" defTabSz="914400">
+          <a:lstStyle>
+            <a:lvl1pPr indent="0" algn="ctr">
               <a:lnSpc>
-                <a:spcPct val="90000"/>
+                <a:spcPct val="100000"/>
               </a:lnSpc>
               <a:buNone/>
-            </a:pPr>
-            <a:r>
-              <a:rPr b="0" lang="en-US" sz="4400" spc="-1" strike="noStrike">
-                <a:solidFill>
-                  <a:schemeClr val="accent1"/>
-                </a:solidFill>
-                <a:latin typeface="Corbel"/>
-              </a:rPr>
-              <a:t>Click to edit Master title style</a:t>
-            </a:r>
-            <a:endParaRPr b="0" lang="en-US" sz="4400" spc="-1" strike="noStrike">
-              <a:solidFill>
-                <a:schemeClr val="dk1"/>
-              </a:solidFill>
-              <a:latin typeface="Corbel"/>
+              <a:tabLst>
+                <a:tab algn="l" pos="0"/>
+              </a:tabLst>
+              <a:defRPr b="0" lang="en-US" sz="1400" spc="-1" strike="noStrike">
+                <a:solidFill>
+                  <a:srgbClr val="000000"/>
+                </a:solidFill>
+                <a:latin typeface="Noto Serif JP"/>
+              </a:defRPr>
+            </a:lvl1pPr>
+          </a:lstStyle>
+          <a:p>
+            <a:pPr indent="0" algn="ctr">
+              <a:lnSpc>
+                <a:spcPct val="100000"/>
+              </a:lnSpc>
+              <a:buNone/>
+              <a:tabLst>
+                <a:tab algn="l" pos="0"/>
+              </a:tabLst>
+            </a:pPr>
+            <a:r>
+              <a:rPr b="0" lang="en-US" sz="1400" spc="-1" strike="noStrike">
+                <a:solidFill>
+                  <a:srgbClr val="000000"/>
+                </a:solidFill>
+                <a:latin typeface="Noto Serif JP"/>
+              </a:rPr>
+              <a:t>&lt;フッター&gt;</a:t>
+            </a:r>
+            <a:endParaRPr b="0" lang="en-US" sz="1400" spc="-1" strike="noStrike">
+              <a:solidFill>
+                <a:srgbClr val="000000"/>
+              </a:solidFill>
+              <a:latin typeface="Noto Serif JP"/>
             </a:endParaRPr>
           </a:p>
         </p:txBody>
@@ -3375,13 +2706,13 @@
             <a:spLocks noGrp="1"/>
           </p:cNvSpPr>
           <p:nvPr>
-            <p:ph type="body"/>
+            <p:ph type="sldNum" idx="5"/>
           </p:nvPr>
         </p:nvSpPr>
         <p:spPr>
           <a:xfrm>
-            <a:off x="1143000" y="2057400"/>
-            <a:ext cx="9872640" cy="4038120"/>
+            <a:off x="9329400" y="6223680"/>
+            <a:ext cx="1705320" cy="364320"/>
           </a:xfrm>
           <a:prstGeom prst="rect">
             <a:avLst/>
@@ -3392,174 +2723,50 @@
           </a:ln>
         </p:spPr>
         <p:txBody>
-          <a:bodyPr lIns="91440" rIns="91440" tIns="45720" bIns="45720" anchor="t" vert="eaVert">
+          <a:bodyPr lIns="91440" rIns="91440" tIns="45720" bIns="45720" anchor="ctr">
             <a:noAutofit/>
           </a:bodyPr>
-          <a:p>
-            <a:pPr marL="228600" indent="-182880" defTabSz="914400">
+          <a:lstStyle>
+            <a:lvl1pPr indent="0" algn="r" defTabSz="914400">
               <a:lnSpc>
-                <a:spcPct val="90000"/>
+                <a:spcPct val="100000"/>
               </a:lnSpc>
-              <a:spcBef>
-                <a:spcPts val="1400"/>
-              </a:spcBef>
-              <a:buClr>
-                <a:srgbClr val="a6b727"/>
-              </a:buClr>
-              <a:buSzPct val="80000"/>
-              <a:buFont typeface="Corbel"/>
-              <a:buChar char="•"/>
-            </a:pPr>
-            <a:r>
-              <a:rPr b="0" lang="en-US" sz="2200" spc="-1" strike="noStrike">
+              <a:buNone/>
+              <a:tabLst>
+                <a:tab algn="l" pos="0"/>
+              </a:tabLst>
+              <a:defRPr b="0" lang="en-US" sz="1200" spc="-1" strike="noStrike">
                 <a:solidFill>
                   <a:schemeClr val="accent1"/>
                 </a:solidFill>
                 <a:latin typeface="Corbel"/>
-              </a:rPr>
-              <a:t>Click to edit Master text styles</a:t>
-            </a:r>
-            <a:endParaRPr b="0" lang="en-US" sz="2200" spc="-1" strike="noStrike">
-              <a:solidFill>
-                <a:schemeClr val="accent1"/>
-              </a:solidFill>
-              <a:latin typeface="Corbel"/>
-            </a:endParaRPr>
-          </a:p>
-          <a:p>
-            <a:pPr lvl="1" marL="457200" indent="-182880" defTabSz="914400">
+              </a:defRPr>
+            </a:lvl1pPr>
+          </a:lstStyle>
+          <a:p>
+            <a:pPr indent="0" algn="r" defTabSz="914400">
               <a:lnSpc>
-                <a:spcPct val="90000"/>
+                <a:spcPct val="100000"/>
               </a:lnSpc>
-              <a:spcBef>
-                <a:spcPts val="201"/>
-              </a:spcBef>
-              <a:spcAft>
-                <a:spcPts val="400"/>
-              </a:spcAft>
-              <a:buClr>
-                <a:srgbClr val="a6b727"/>
-              </a:buClr>
-              <a:buSzPct val="80000"/>
-              <a:buFont typeface="Corbel"/>
-              <a:buChar char="•"/>
-            </a:pPr>
-            <a:r>
-              <a:rPr b="0" lang="en-US" sz="2000" spc="-1" strike="noStrike">
+              <a:buNone/>
+              <a:tabLst>
+                <a:tab algn="l" pos="0"/>
+              </a:tabLst>
+            </a:pPr>
+            <a:fld id="{73C28478-CE5B-4942-8812-93126EBC69CF}" type="slidenum">
+              <a:rPr b="0" lang="en-US" sz="1200" spc="-1" strike="noStrike">
                 <a:solidFill>
                   <a:schemeClr val="accent1"/>
                 </a:solidFill>
                 <a:latin typeface="Corbel"/>
               </a:rPr>
-              <a:t>Second level</a:t>
-            </a:r>
-            <a:endParaRPr b="0" lang="en-US" sz="2000" spc="-1" strike="noStrike">
-              <a:solidFill>
-                <a:schemeClr val="accent1"/>
-              </a:solidFill>
-              <a:latin typeface="Corbel"/>
-            </a:endParaRPr>
-          </a:p>
-          <a:p>
-            <a:pPr lvl="2" marL="731520" indent="-182880" defTabSz="914400">
-              <a:lnSpc>
-                <a:spcPct val="90000"/>
-              </a:lnSpc>
-              <a:spcBef>
-                <a:spcPts val="201"/>
-              </a:spcBef>
-              <a:spcAft>
-                <a:spcPts val="400"/>
-              </a:spcAft>
-              <a:buClr>
-                <a:srgbClr val="a6b727"/>
-              </a:buClr>
-              <a:buSzPct val="80000"/>
-              <a:buFont typeface="Corbel"/>
-              <a:buChar char="•"/>
-            </a:pPr>
-            <a:r>
-              <a:rPr b="0" lang="en-US" sz="1800" spc="-1" strike="noStrike">
-                <a:solidFill>
-                  <a:schemeClr val="accent1"/>
-                </a:solidFill>
-                <a:latin typeface="Corbel"/>
-              </a:rPr>
-              <a:t>Third level</a:t>
-            </a:r>
-            <a:endParaRPr b="0" lang="en-US" sz="1800" spc="-1" strike="noStrike">
-              <a:solidFill>
-                <a:schemeClr val="accent1"/>
-              </a:solidFill>
-              <a:latin typeface="Corbel"/>
-            </a:endParaRPr>
-          </a:p>
-          <a:p>
-            <a:pPr lvl="3" marL="1005840" indent="-182880" defTabSz="914400">
-              <a:lnSpc>
-                <a:spcPct val="90000"/>
-              </a:lnSpc>
-              <a:spcBef>
-                <a:spcPts val="201"/>
-              </a:spcBef>
-              <a:spcAft>
-                <a:spcPts val="400"/>
-              </a:spcAft>
-              <a:buClr>
-                <a:srgbClr val="a6b727"/>
-              </a:buClr>
-              <a:buSzPct val="80000"/>
-              <a:buFont typeface="Corbel"/>
-              <a:buChar char="•"/>
-            </a:pPr>
-            <a:r>
-              <a:rPr b="0" lang="en-US" sz="1600" spc="-1" strike="noStrike">
-                <a:solidFill>
-                  <a:schemeClr val="accent1"/>
-                </a:solidFill>
-                <a:latin typeface="Corbel"/>
-              </a:rPr>
-              <a:t>Fourth level</a:t>
-            </a:r>
-            <a:endParaRPr b="0" lang="en-US" sz="1600" spc="-1" strike="noStrike">
-              <a:solidFill>
-                <a:schemeClr val="accent1"/>
-              </a:solidFill>
-              <a:latin typeface="Corbel"/>
-            </a:endParaRPr>
-          </a:p>
-          <a:p>
-            <a:pPr lvl="4" marL="1280160" indent="-182880" defTabSz="914400">
-              <a:lnSpc>
-                <a:spcPct val="90000"/>
-              </a:lnSpc>
-              <a:spcBef>
-                <a:spcPts val="201"/>
-              </a:spcBef>
-              <a:spcAft>
-                <a:spcPts val="400"/>
-              </a:spcAft>
-              <a:buClr>
-                <a:srgbClr val="a6b727"/>
-              </a:buClr>
-              <a:buSzPct val="80000"/>
-              <a:buFont typeface="Corbel"/>
-              <a:buChar char="•"/>
-            </a:pPr>
-            <a:r>
-              <a:rPr b="0" lang="en-US" sz="1600" spc="-1" strike="noStrike">
-                <a:solidFill>
-                  <a:schemeClr val="accent1"/>
-                </a:solidFill>
-                <a:latin typeface="Corbel"/>
-              </a:rPr>
-              <a:t>Fifth level</a:t>
-            </a:r>
-            <a:endParaRPr b="0" lang="en-US" sz="1600" spc="-1" strike="noStrike">
-              <a:solidFill>
-                <a:schemeClr val="accent1"/>
-              </a:solidFill>
-              <a:latin typeface="Corbel"/>
+              <a:t>&lt;番号&gt;</a:t>
+            </a:fld>
+            <a:endParaRPr b="0" lang="en-US" sz="1200" spc="-1" strike="noStrike">
+              <a:solidFill>
+                <a:srgbClr val="000000"/>
+              </a:solidFill>
+              <a:latin typeface="Noto Serif JP"/>
             </a:endParaRPr>
           </a:p>
         </p:txBody>
@@ -3571,13 +2778,13 @@
             <a:spLocks noGrp="1"/>
           </p:cNvSpPr>
           <p:nvPr>
-            <p:ph type="dt" idx="4"/>
+            <p:ph type="dt" idx="6"/>
           </p:nvPr>
         </p:nvSpPr>
         <p:spPr>
           <a:xfrm>
             <a:off x="1143000" y="6223680"/>
-            <a:ext cx="2328840" cy="364680"/>
+            <a:ext cx="2328480" cy="364320"/>
           </a:xfrm>
           <a:prstGeom prst="rect">
             <a:avLst/>
@@ -3592,73 +2799,7 @@
             <a:noAutofit/>
           </a:bodyPr>
           <a:lstStyle>
-            <a:lvl1pPr indent="0" defTabSz="914400">
-              <a:lnSpc>
-                <a:spcPct val="100000"/>
-              </a:lnSpc>
-              <a:buNone/>
-              <a:defRPr b="0" lang="en-US" sz="1200" spc="-1" strike="noStrike">
-                <a:solidFill>
-                  <a:schemeClr val="accent1"/>
-                </a:solidFill>
-                <a:latin typeface="Corbel"/>
-              </a:defRPr>
-            </a:lvl1pPr>
-          </a:lstStyle>
-          <a:p>
-            <a:pPr indent="0" defTabSz="914400">
-              <a:lnSpc>
-                <a:spcPct val="100000"/>
-              </a:lnSpc>
-              <a:buNone/>
-            </a:pPr>
-            <a:r>
-              <a:rPr b="0" lang="en-US" sz="1200" spc="-1" strike="noStrike">
-                <a:solidFill>
-                  <a:schemeClr val="accent1"/>
-                </a:solidFill>
-                <a:latin typeface="Corbel"/>
-              </a:rPr>
-              <a:t>&lt;日付/時刻&gt;</a:t>
-            </a:r>
-            <a:endParaRPr b="0" lang="en-US" sz="1200" spc="-1" strike="noStrike">
-              <a:solidFill>
-                <a:srgbClr val="000000"/>
-              </a:solidFill>
-              <a:latin typeface="Noto Serif JP"/>
-            </a:endParaRPr>
-          </a:p>
-        </p:txBody>
-      </p:sp>
-      <p:sp>
-        <p:nvSpPr>
-          <p:cNvPr id="14" name="PlaceHolder 4"/>
-          <p:cNvSpPr>
-            <a:spLocks noGrp="1"/>
-          </p:cNvSpPr>
-          <p:nvPr>
-            <p:ph type="ftr" idx="5"/>
-          </p:nvPr>
-        </p:nvSpPr>
-        <p:spPr>
-          <a:xfrm>
-            <a:off x="3949200" y="6223680"/>
-            <a:ext cx="4717440" cy="364680"/>
-          </a:xfrm>
-          <a:prstGeom prst="rect">
-            <a:avLst/>
-          </a:prstGeom>
-          <a:noFill/>
-          <a:ln w="0">
-            <a:noFill/>
-          </a:ln>
-        </p:spPr>
-        <p:txBody>
-          <a:bodyPr lIns="91440" rIns="91440" tIns="45720" bIns="45720" anchor="ctr">
-            <a:noAutofit/>
-          </a:bodyPr>
-          <a:lstStyle>
-            <a:lvl1pPr indent="0" algn="ctr">
+            <a:lvl1pPr indent="0">
               <a:buNone/>
               <a:defRPr b="0" lang="en-US" sz="1400" spc="-1" strike="noStrike">
                 <a:solidFill>
@@ -3669,7 +2810,7 @@
             </a:lvl1pPr>
           </a:lstStyle>
           <a:p>
-            <a:pPr indent="0" algn="ctr">
+            <a:pPr indent="0">
               <a:buNone/>
             </a:pPr>
             <a:r>
@@ -3679,75 +2820,9 @@
                 </a:solidFill>
                 <a:latin typeface="Noto Serif JP"/>
               </a:rPr>
-              <a:t>&lt;フッター&gt;</a:t>
+              <a:t>&lt;日付/時刻&gt;</a:t>
             </a:r>
             <a:endParaRPr b="0" lang="en-US" sz="1400" spc="-1" strike="noStrike">
-              <a:solidFill>
-                <a:srgbClr val="000000"/>
-              </a:solidFill>
-              <a:latin typeface="Noto Serif JP"/>
-            </a:endParaRPr>
-          </a:p>
-        </p:txBody>
-      </p:sp>
-      <p:sp>
-        <p:nvSpPr>
-          <p:cNvPr id="15" name="PlaceHolder 5"/>
-          <p:cNvSpPr>
-            <a:spLocks noGrp="1"/>
-          </p:cNvSpPr>
-          <p:nvPr>
-            <p:ph type="sldNum" idx="6"/>
-          </p:nvPr>
-        </p:nvSpPr>
-        <p:spPr>
-          <a:xfrm>
-            <a:off x="9329400" y="6223680"/>
-            <a:ext cx="1705680" cy="364680"/>
-          </a:xfrm>
-          <a:prstGeom prst="rect">
-            <a:avLst/>
-          </a:prstGeom>
-          <a:noFill/>
-          <a:ln w="0">
-            <a:noFill/>
-          </a:ln>
-        </p:spPr>
-        <p:txBody>
-          <a:bodyPr lIns="91440" rIns="91440" tIns="45720" bIns="45720" anchor="ctr">
-            <a:noAutofit/>
-          </a:bodyPr>
-          <a:lstStyle>
-            <a:lvl1pPr indent="0" algn="r" defTabSz="914400">
-              <a:lnSpc>
-                <a:spcPct val="100000"/>
-              </a:lnSpc>
-              <a:buNone/>
-              <a:defRPr b="0" lang="en-US" sz="1200" spc="-1" strike="noStrike">
-                <a:solidFill>
-                  <a:schemeClr val="accent1"/>
-                </a:solidFill>
-                <a:latin typeface="Corbel"/>
-              </a:defRPr>
-            </a:lvl1pPr>
-          </a:lstStyle>
-          <a:p>
-            <a:pPr indent="0" algn="r" defTabSz="914400">
-              <a:lnSpc>
-                <a:spcPct val="100000"/>
-              </a:lnSpc>
-              <a:buNone/>
-            </a:pPr>
-            <a:fld id="{3077A363-4627-4024-9B6B-B9B5F2D718DD}" type="slidenum">
-              <a:rPr b="0" lang="en-US" sz="1200" spc="-1" strike="noStrike">
-                <a:solidFill>
-                  <a:schemeClr val="accent1"/>
-                </a:solidFill>
-                <a:latin typeface="Corbel"/>
-              </a:rPr>
-              <a:t>&lt;番号&gt;</a:t>
-            </a:fld>
-            <a:endParaRPr b="0" lang="en-US" sz="1200" spc="-1" strike="noStrike">
               <a:solidFill>
                 <a:srgbClr val="000000"/>
               </a:solidFill>
@@ -3791,14 +2866,14 @@
       </p:grpSpPr>
       <p:sp>
         <p:nvSpPr>
-          <p:cNvPr id="16" name="Rectangle 6"/>
+          <p:cNvPr id="14" name="Rectangle 6"/>
           <p:cNvSpPr/>
           <p:nvPr/>
         </p:nvSpPr>
         <p:spPr>
           <a:xfrm>
             <a:off x="231120" y="243720"/>
-            <a:ext cx="11724120" cy="6377400"/>
+            <a:ext cx="11723760" cy="6377040"/>
           </a:xfrm>
           <a:prstGeom prst="rect">
             <a:avLst/>
@@ -3829,6 +2904,11 @@
             <a:noAutofit/>
           </a:bodyPr>
           <a:p>
+            <a:pPr>
+              <a:lnSpc>
+                <a:spcPct val="100000"/>
+              </a:lnSpc>
+            </a:pPr>
             <a:endParaRPr b="0" lang="en-US" sz="1800" spc="-1" strike="noStrike">
               <a:solidFill>
                 <a:srgbClr val="000000"/>
@@ -3840,18 +2920,18 @@
       </p:sp>
       <p:sp>
         <p:nvSpPr>
-          <p:cNvPr id="17" name="PlaceHolder 1"/>
+          <p:cNvPr id="15" name="PlaceHolder 1"/>
           <p:cNvSpPr>
             <a:spLocks noGrp="1"/>
           </p:cNvSpPr>
           <p:nvPr>
-            <p:ph type="title"/>
+            <p:ph type="ftr" idx="7"/>
           </p:nvPr>
         </p:nvSpPr>
         <p:spPr>
           <a:xfrm>
-            <a:off x="8724960" y="762120"/>
-            <a:ext cx="2323800" cy="5409720"/>
+            <a:off x="3949200" y="6223680"/>
+            <a:ext cx="4717080" cy="364320"/>
           </a:xfrm>
           <a:prstGeom prst="rect">
             <a:avLst/>
@@ -3862,48 +2942,68 @@
           </a:ln>
         </p:spPr>
         <p:txBody>
-          <a:bodyPr lIns="91440" rIns="91440" tIns="45720" bIns="45720" anchor="ctr" vert="eaVert">
+          <a:bodyPr lIns="91440" rIns="91440" tIns="45720" bIns="45720" anchor="ctr">
             <a:noAutofit/>
           </a:bodyPr>
-          <a:p>
-            <a:pPr indent="0" defTabSz="914400">
+          <a:lstStyle>
+            <a:lvl1pPr indent="0" algn="ctr">
               <a:lnSpc>
-                <a:spcPct val="90000"/>
+                <a:spcPct val="100000"/>
               </a:lnSpc>
               <a:buNone/>
-            </a:pPr>
-            <a:r>
-              <a:rPr b="0" lang="en-US" sz="4400" spc="-1" strike="noStrike">
-                <a:solidFill>
-                  <a:schemeClr val="accent1"/>
-                </a:solidFill>
-                <a:latin typeface="Corbel"/>
-              </a:rPr>
-              <a:t>Click to edit Master title style</a:t>
-            </a:r>
-            <a:endParaRPr b="0" lang="en-US" sz="4400" spc="-1" strike="noStrike">
-              <a:solidFill>
-                <a:schemeClr val="dk1"/>
-              </a:solidFill>
-              <a:latin typeface="Corbel"/>
-            </a:endParaRPr>
-          </a:p>
-        </p:txBody>
-      </p:sp>
-      <p:sp>
-        <p:nvSpPr>
-          <p:cNvPr id="18" name="PlaceHolder 2"/>
+              <a:tabLst>
+                <a:tab algn="l" pos="0"/>
+              </a:tabLst>
+              <a:defRPr b="0" lang="en-US" sz="1400" spc="-1" strike="noStrike">
+                <a:solidFill>
+                  <a:srgbClr val="000000"/>
+                </a:solidFill>
+                <a:latin typeface="Noto Serif JP"/>
+              </a:defRPr>
+            </a:lvl1pPr>
+          </a:lstStyle>
+          <a:p>
+            <a:pPr indent="0" algn="ctr">
+              <a:lnSpc>
+                <a:spcPct val="100000"/>
+              </a:lnSpc>
+              <a:buNone/>
+              <a:tabLst>
+                <a:tab algn="l" pos="0"/>
+              </a:tabLst>
+            </a:pPr>
+            <a:r>
+              <a:rPr b="0" lang="en-US" sz="1400" spc="-1" strike="noStrike">
+                <a:solidFill>
+                  <a:srgbClr val="000000"/>
+                </a:solidFill>
+                <a:latin typeface="Noto Serif JP"/>
+              </a:rPr>
+              <a:t>&lt;フッター&gt;</a:t>
+            </a:r>
+            <a:endParaRPr b="0" lang="en-US" sz="1400" spc="-1" strike="noStrike">
+              <a:solidFill>
+                <a:srgbClr val="000000"/>
+              </a:solidFill>
+              <a:latin typeface="Noto Serif JP"/>
+            </a:endParaRPr>
+          </a:p>
+        </p:txBody>
+      </p:sp>
+      <p:sp>
+        <p:nvSpPr>
+          <p:cNvPr id="16" name="PlaceHolder 2"/>
           <p:cNvSpPr>
             <a:spLocks noGrp="1"/>
           </p:cNvSpPr>
           <p:nvPr>
-            <p:ph type="body"/>
+            <p:ph type="sldNum" idx="8"/>
           </p:nvPr>
         </p:nvSpPr>
         <p:spPr>
           <a:xfrm>
-            <a:off x="1143000" y="762120"/>
-            <a:ext cx="7429320" cy="5409720"/>
+            <a:off x="9329400" y="6223680"/>
+            <a:ext cx="1705320" cy="364320"/>
           </a:xfrm>
           <a:prstGeom prst="rect">
             <a:avLst/>
@@ -3914,192 +3014,68 @@
           </a:ln>
         </p:spPr>
         <p:txBody>
-          <a:bodyPr lIns="91440" rIns="91440" tIns="45720" bIns="45720" anchor="t" vert="eaVert">
+          <a:bodyPr lIns="91440" rIns="91440" tIns="45720" bIns="45720" anchor="ctr">
             <a:noAutofit/>
           </a:bodyPr>
-          <a:p>
-            <a:pPr marL="228600" indent="-182880" defTabSz="914400">
+          <a:lstStyle>
+            <a:lvl1pPr indent="0" algn="r" defTabSz="914400">
               <a:lnSpc>
-                <a:spcPct val="90000"/>
+                <a:spcPct val="100000"/>
               </a:lnSpc>
-              <a:spcBef>
-                <a:spcPts val="1400"/>
-              </a:spcBef>
-              <a:buClr>
-                <a:srgbClr val="a6b727"/>
-              </a:buClr>
-              <a:buSzPct val="80000"/>
-              <a:buFont typeface="Corbel"/>
-              <a:buChar char="•"/>
-            </a:pPr>
-            <a:r>
-              <a:rPr b="0" lang="en-US" sz="2200" spc="-1" strike="noStrike">
+              <a:buNone/>
+              <a:tabLst>
+                <a:tab algn="l" pos="0"/>
+              </a:tabLst>
+              <a:defRPr b="0" lang="en-US" sz="1200" spc="-1" strike="noStrike">
                 <a:solidFill>
                   <a:schemeClr val="accent1"/>
                 </a:solidFill>
                 <a:latin typeface="Corbel"/>
-              </a:rPr>
-              <a:t>Click to edit Master text styles</a:t>
-            </a:r>
-            <a:endParaRPr b="0" lang="en-US" sz="2200" spc="-1" strike="noStrike">
-              <a:solidFill>
-                <a:schemeClr val="accent1"/>
-              </a:solidFill>
-              <a:latin typeface="Corbel"/>
-            </a:endParaRPr>
-          </a:p>
-          <a:p>
-            <a:pPr lvl="1" marL="457200" indent="-182880" defTabSz="914400">
+              </a:defRPr>
+            </a:lvl1pPr>
+          </a:lstStyle>
+          <a:p>
+            <a:pPr indent="0" algn="r" defTabSz="914400">
               <a:lnSpc>
-                <a:spcPct val="90000"/>
+                <a:spcPct val="100000"/>
               </a:lnSpc>
-              <a:spcBef>
-                <a:spcPts val="201"/>
-              </a:spcBef>
-              <a:spcAft>
-                <a:spcPts val="400"/>
-              </a:spcAft>
-              <a:buClr>
-                <a:srgbClr val="a6b727"/>
-              </a:buClr>
-              <a:buSzPct val="80000"/>
-              <a:buFont typeface="Corbel"/>
-              <a:buChar char="•"/>
-            </a:pPr>
-            <a:r>
-              <a:rPr b="0" lang="en-US" sz="2000" spc="-1" strike="noStrike">
+              <a:buNone/>
+              <a:tabLst>
+                <a:tab algn="l" pos="0"/>
+              </a:tabLst>
+            </a:pPr>
+            <a:fld id="{8F0B257E-39FD-4E4A-A190-D5655867D095}" type="slidenum">
+              <a:rPr b="0" lang="en-US" sz="1200" spc="-1" strike="noStrike">
                 <a:solidFill>
                   <a:schemeClr val="accent1"/>
                 </a:solidFill>
                 <a:latin typeface="Corbel"/>
               </a:rPr>
-              <a:t>Second level</a:t>
-            </a:r>
-            <a:endParaRPr b="0" lang="en-US" sz="2000" spc="-1" strike="noStrike">
-              <a:solidFill>
-                <a:schemeClr val="accent1"/>
-              </a:solidFill>
-              <a:latin typeface="Corbel"/>
-            </a:endParaRPr>
-          </a:p>
-          <a:p>
-            <a:pPr lvl="2" marL="731520" indent="-182880" defTabSz="914400">
-              <a:lnSpc>
-                <a:spcPct val="90000"/>
-              </a:lnSpc>
-              <a:spcBef>
-                <a:spcPts val="201"/>
-              </a:spcBef>
-              <a:spcAft>
-                <a:spcPts val="400"/>
-              </a:spcAft>
-              <a:buClr>
-                <a:srgbClr val="a6b727"/>
-              </a:buClr>
-              <a:buSzPct val="80000"/>
-              <a:buFont typeface="Corbel"/>
-              <a:buChar char="•"/>
-            </a:pPr>
-            <a:r>
-              <a:rPr b="0" lang="en-US" sz="1800" spc="-1" strike="noStrike">
-                <a:solidFill>
-                  <a:schemeClr val="accent1"/>
-                </a:solidFill>
-                <a:latin typeface="Corbel"/>
-              </a:rPr>
-              <a:t>Third level</a:t>
-            </a:r>
-            <a:endParaRPr b="0" lang="en-US" sz="1800" spc="-1" strike="noStrike">
-              <a:solidFill>
-                <a:schemeClr val="accent1"/>
-              </a:solidFill>
-              <a:latin typeface="Corbel"/>
-            </a:endParaRPr>
-          </a:p>
-          <a:p>
-            <a:pPr lvl="3" marL="1005840" indent="-182880" defTabSz="914400">
-              <a:lnSpc>
-                <a:spcPct val="90000"/>
-              </a:lnSpc>
-              <a:spcBef>
-                <a:spcPts val="201"/>
-              </a:spcBef>
-              <a:spcAft>
-                <a:spcPts val="400"/>
-              </a:spcAft>
-              <a:buClr>
-                <a:srgbClr val="a6b727"/>
-              </a:buClr>
-              <a:buSzPct val="80000"/>
-              <a:buFont typeface="Corbel"/>
-              <a:buChar char="•"/>
-            </a:pPr>
-            <a:r>
-              <a:rPr b="0" lang="en-US" sz="1600" spc="-1" strike="noStrike">
-                <a:solidFill>
-                  <a:schemeClr val="accent1"/>
-                </a:solidFill>
-                <a:latin typeface="Corbel"/>
-              </a:rPr>
-              <a:t>Fourth level</a:t>
-            </a:r>
-            <a:endParaRPr b="0" lang="en-US" sz="1600" spc="-1" strike="noStrike">
-              <a:solidFill>
-                <a:schemeClr val="accent1"/>
-              </a:solidFill>
-              <a:latin typeface="Corbel"/>
-            </a:endParaRPr>
-          </a:p>
-          <a:p>
-            <a:pPr lvl="4" marL="1280160" indent="-182880" defTabSz="914400">
-              <a:lnSpc>
-                <a:spcPct val="90000"/>
-              </a:lnSpc>
-              <a:spcBef>
-                <a:spcPts val="201"/>
-              </a:spcBef>
-              <a:spcAft>
-                <a:spcPts val="400"/>
-              </a:spcAft>
-              <a:buClr>
-                <a:srgbClr val="a6b727"/>
-              </a:buClr>
-              <a:buSzPct val="80000"/>
-              <a:buFont typeface="Corbel"/>
-              <a:buChar char="•"/>
-            </a:pPr>
-            <a:r>
-              <a:rPr b="0" lang="en-US" sz="1600" spc="-1" strike="noStrike">
-                <a:solidFill>
-                  <a:schemeClr val="accent1"/>
-                </a:solidFill>
-                <a:latin typeface="Corbel"/>
-              </a:rPr>
-              <a:t>Fifth level</a:t>
-            </a:r>
-            <a:endParaRPr b="0" lang="en-US" sz="1600" spc="-1" strike="noStrike">
-              <a:solidFill>
-                <a:schemeClr val="accent1"/>
-              </a:solidFill>
-              <a:latin typeface="Corbel"/>
-            </a:endParaRPr>
-          </a:p>
-        </p:txBody>
-      </p:sp>
-      <p:sp>
-        <p:nvSpPr>
-          <p:cNvPr id="19" name="PlaceHolder 3"/>
+              <a:t>&lt;番号&gt;</a:t>
+            </a:fld>
+            <a:endParaRPr b="0" lang="en-US" sz="1200" spc="-1" strike="noStrike">
+              <a:solidFill>
+                <a:srgbClr val="000000"/>
+              </a:solidFill>
+              <a:latin typeface="Noto Serif JP"/>
+            </a:endParaRPr>
+          </a:p>
+        </p:txBody>
+      </p:sp>
+      <p:sp>
+        <p:nvSpPr>
+          <p:cNvPr id="17" name="PlaceHolder 3"/>
           <p:cNvSpPr>
             <a:spLocks noGrp="1"/>
           </p:cNvSpPr>
           <p:nvPr>
-            <p:ph type="dt" idx="7"/>
+            <p:ph type="dt" idx="9"/>
           </p:nvPr>
         </p:nvSpPr>
         <p:spPr>
           <a:xfrm>
             <a:off x="1143000" y="6223680"/>
-            <a:ext cx="2328840" cy="364680"/>
+            <a:ext cx="2328480" cy="364320"/>
           </a:xfrm>
           <a:prstGeom prst="rect">
             <a:avLst/>
@@ -4114,73 +3090,7 @@
             <a:noAutofit/>
           </a:bodyPr>
           <a:lstStyle>
-            <a:lvl1pPr indent="0" defTabSz="914400">
-              <a:lnSpc>
-                <a:spcPct val="100000"/>
-              </a:lnSpc>
-              <a:buNone/>
-              <a:defRPr b="0" lang="en-US" sz="1200" spc="-1" strike="noStrike">
-                <a:solidFill>
-                  <a:schemeClr val="accent1"/>
-                </a:solidFill>
-                <a:latin typeface="Corbel"/>
-              </a:defRPr>
-            </a:lvl1pPr>
-          </a:lstStyle>
-          <a:p>
-            <a:pPr indent="0" defTabSz="914400">
-              <a:lnSpc>
-                <a:spcPct val="100000"/>
-              </a:lnSpc>
-              <a:buNone/>
-            </a:pPr>
-            <a:r>
-              <a:rPr b="0" lang="en-US" sz="1200" spc="-1" strike="noStrike">
-                <a:solidFill>
-                  <a:schemeClr val="accent1"/>
-                </a:solidFill>
-                <a:latin typeface="Corbel"/>
-              </a:rPr>
-              <a:t>&lt;日付/時刻&gt;</a:t>
-            </a:r>
-            <a:endParaRPr b="0" lang="en-US" sz="1200" spc="-1" strike="noStrike">
-              <a:solidFill>
-                <a:srgbClr val="000000"/>
-              </a:solidFill>
-              <a:latin typeface="Noto Serif JP"/>
-            </a:endParaRPr>
-          </a:p>
-        </p:txBody>
-      </p:sp>
-      <p:sp>
-        <p:nvSpPr>
-          <p:cNvPr id="20" name="PlaceHolder 4"/>
-          <p:cNvSpPr>
-            <a:spLocks noGrp="1"/>
-          </p:cNvSpPr>
-          <p:nvPr>
-            <p:ph type="ftr" idx="8"/>
-          </p:nvPr>
-        </p:nvSpPr>
-        <p:spPr>
-          <a:xfrm>
-            <a:off x="3949200" y="6223680"/>
-            <a:ext cx="4717440" cy="364680"/>
-          </a:xfrm>
-          <a:prstGeom prst="rect">
-            <a:avLst/>
-          </a:prstGeom>
-          <a:noFill/>
-          <a:ln w="0">
-            <a:noFill/>
-          </a:ln>
-        </p:spPr>
-        <p:txBody>
-          <a:bodyPr lIns="91440" rIns="91440" tIns="45720" bIns="45720" anchor="ctr">
-            <a:noAutofit/>
-          </a:bodyPr>
-          <a:lstStyle>
-            <a:lvl1pPr indent="0" algn="ctr">
+            <a:lvl1pPr indent="0">
               <a:buNone/>
               <a:defRPr b="0" lang="en-US" sz="1400" spc="-1" strike="noStrike">
                 <a:solidFill>
@@ -4191,7 +3101,7 @@
             </a:lvl1pPr>
           </a:lstStyle>
           <a:p>
-            <a:pPr indent="0" algn="ctr">
+            <a:pPr indent="0">
               <a:buNone/>
             </a:pPr>
             <a:r>
@@ -4201,75 +3111,9 @@
                 </a:solidFill>
                 <a:latin typeface="Noto Serif JP"/>
               </a:rPr>
-              <a:t>&lt;フッター&gt;</a:t>
+              <a:t>&lt;日付/時刻&gt;</a:t>
             </a:r>
             <a:endParaRPr b="0" lang="en-US" sz="1400" spc="-1" strike="noStrike">
-              <a:solidFill>
-                <a:srgbClr val="000000"/>
-              </a:solidFill>
-              <a:latin typeface="Noto Serif JP"/>
-            </a:endParaRPr>
-          </a:p>
-        </p:txBody>
-      </p:sp>
-      <p:sp>
-        <p:nvSpPr>
-          <p:cNvPr id="21" name="PlaceHolder 5"/>
-          <p:cNvSpPr>
-            <a:spLocks noGrp="1"/>
-          </p:cNvSpPr>
-          <p:nvPr>
-            <p:ph type="sldNum" idx="9"/>
-          </p:nvPr>
-        </p:nvSpPr>
-        <p:spPr>
-          <a:xfrm>
-            <a:off x="9329400" y="6223680"/>
-            <a:ext cx="1705680" cy="364680"/>
-          </a:xfrm>
-          <a:prstGeom prst="rect">
-            <a:avLst/>
-          </a:prstGeom>
-          <a:noFill/>
-          <a:ln w="0">
-            <a:noFill/>
-          </a:ln>
-        </p:spPr>
-        <p:txBody>
-          <a:bodyPr lIns="91440" rIns="91440" tIns="45720" bIns="45720" anchor="ctr">
-            <a:noAutofit/>
-          </a:bodyPr>
-          <a:lstStyle>
-            <a:lvl1pPr indent="0" algn="r" defTabSz="914400">
-              <a:lnSpc>
-                <a:spcPct val="100000"/>
-              </a:lnSpc>
-              <a:buNone/>
-              <a:defRPr b="0" lang="en-US" sz="1200" spc="-1" strike="noStrike">
-                <a:solidFill>
-                  <a:schemeClr val="accent1"/>
-                </a:solidFill>
-                <a:latin typeface="Corbel"/>
-              </a:defRPr>
-            </a:lvl1pPr>
-          </a:lstStyle>
-          <a:p>
-            <a:pPr indent="0" algn="r" defTabSz="914400">
-              <a:lnSpc>
-                <a:spcPct val="100000"/>
-              </a:lnSpc>
-              <a:buNone/>
-            </a:pPr>
-            <a:fld id="{474F1594-0A08-490E-A793-0DAAB59BEB14}" type="slidenum">
-              <a:rPr b="0" lang="en-US" sz="1200" spc="-1" strike="noStrike">
-                <a:solidFill>
-                  <a:schemeClr val="accent1"/>
-                </a:solidFill>
-                <a:latin typeface="Corbel"/>
-              </a:rPr>
-              <a:t>&lt;番号&gt;</a:t>
-            </a:fld>
-            <a:endParaRPr b="0" lang="en-US" sz="1200" spc="-1" strike="noStrike">
               <a:solidFill>
                 <a:srgbClr val="000000"/>
               </a:solidFill>
@@ -4313,14 +3157,14 @@
       </p:grpSpPr>
       <p:sp>
         <p:nvSpPr>
-          <p:cNvPr id="22" name="Rectangle 6"/>
+          <p:cNvPr id="18" name="Rectangle 6"/>
           <p:cNvSpPr/>
           <p:nvPr/>
         </p:nvSpPr>
         <p:spPr>
           <a:xfrm>
             <a:off x="231120" y="243720"/>
-            <a:ext cx="11724120" cy="6377400"/>
+            <a:ext cx="11723760" cy="6377040"/>
           </a:xfrm>
           <a:prstGeom prst="rect">
             <a:avLst/>
@@ -4351,6 +3195,11 @@
             <a:noAutofit/>
           </a:bodyPr>
           <a:p>
+            <a:pPr>
+              <a:lnSpc>
+                <a:spcPct val="100000"/>
+              </a:lnSpc>
+            </a:pPr>
             <a:endParaRPr b="0" lang="en-US" sz="1800" spc="-1" strike="noStrike">
               <a:solidFill>
                 <a:srgbClr val="000000"/>
@@ -4362,7 +3211,7 @@
       </p:sp>
       <p:sp>
         <p:nvSpPr>
-          <p:cNvPr id="23" name="PlaceHolder 1"/>
+          <p:cNvPr id="19" name="PlaceHolder 1"/>
           <p:cNvSpPr>
             <a:spLocks noGrp="1"/>
           </p:cNvSpPr>
@@ -4373,7 +3222,7 @@
         <p:spPr>
           <a:xfrm>
             <a:off x="1143000" y="609480"/>
-            <a:ext cx="9875160" cy="1356120"/>
+            <a:ext cx="9874800" cy="1355760"/>
           </a:xfrm>
           <a:prstGeom prst="rect">
             <a:avLst/>
@@ -4384,37 +3233,34 @@
           </a:ln>
         </p:spPr>
         <p:txBody>
-          <a:bodyPr lIns="91440" rIns="91440" tIns="45720" bIns="45720" anchor="ctr">
+          <a:bodyPr lIns="0" rIns="0" tIns="0" bIns="0" anchor="ctr">
             <a:noAutofit/>
           </a:bodyPr>
           <a:p>
-            <a:pPr indent="0" defTabSz="914400">
-              <a:lnSpc>
-                <a:spcPct val="90000"/>
-              </a:lnSpc>
-              <a:buNone/>
-            </a:pPr>
-            <a:r>
-              <a:rPr b="0" lang="en-US" sz="4400" spc="-1" strike="noStrike">
-                <a:solidFill>
-                  <a:schemeClr val="accent1"/>
-                </a:solidFill>
-                <a:latin typeface="Corbel"/>
-              </a:rPr>
-              <a:t>Click to edit Master title style</a:t>
-            </a:r>
-            <a:endParaRPr b="0" lang="en-US" sz="4400" spc="-1" strike="noStrike">
-              <a:solidFill>
-                <a:schemeClr val="dk1"/>
-              </a:solidFill>
-              <a:latin typeface="Corbel"/>
-            </a:endParaRPr>
-          </a:p>
-        </p:txBody>
-      </p:sp>
-      <p:sp>
-        <p:nvSpPr>
-          <p:cNvPr id="24" name="PlaceHolder 2"/>
+            <a:pPr indent="0">
+              <a:buNone/>
+            </a:pPr>
+            <a:r>
+              <a:rPr b="0" lang="ja-JP" sz="1800" spc="-1" strike="noStrike">
+                <a:solidFill>
+                  <a:srgbClr val="000000"/>
+                </a:solidFill>
+                <a:latin typeface="Arial"/>
+              </a:rPr>
+              <a:t>クリックしてタイトルテキストを編集</a:t>
+            </a:r>
+            <a:endParaRPr b="0" lang="en-US" sz="1800" spc="-1" strike="noStrike">
+              <a:solidFill>
+                <a:srgbClr val="000000"/>
+              </a:solidFill>
+              <a:latin typeface="Arial"/>
+            </a:endParaRPr>
+          </a:p>
+        </p:txBody>
+      </p:sp>
+      <p:sp>
+        <p:nvSpPr>
+          <p:cNvPr id="20" name="PlaceHolder 2"/>
           <p:cNvSpPr>
             <a:spLocks noGrp="1"/>
           </p:cNvSpPr>
@@ -4425,7 +3271,7 @@
         <p:spPr>
           <a:xfrm>
             <a:off x="1143000" y="2057400"/>
-            <a:ext cx="9872640" cy="4038120"/>
+            <a:ext cx="9872280" cy="4037760"/>
           </a:xfrm>
           <a:prstGeom prst="rect">
             <a:avLst/>
@@ -4436,192 +3282,275 @@
           </a:ln>
         </p:spPr>
         <p:txBody>
-          <a:bodyPr lIns="91440" rIns="91440" tIns="45720" bIns="45720" anchor="t">
-            <a:noAutofit/>
+          <a:bodyPr lIns="0" rIns="0" tIns="0" bIns="0" anchor="t">
+            <a:normAutofit/>
           </a:bodyPr>
           <a:p>
-            <a:pPr marL="228600" indent="-182880" defTabSz="914400">
-              <a:lnSpc>
-                <a:spcPct val="90000"/>
-              </a:lnSpc>
+            <a:pPr marL="432000" indent="-324000">
               <a:spcBef>
-                <a:spcPts val="1400"/>
+                <a:spcPts val="1417"/>
               </a:spcBef>
               <a:buClr>
-                <a:srgbClr val="a6b727"/>
+                <a:srgbClr val="000000"/>
               </a:buClr>
-              <a:buSzPct val="80000"/>
-              <a:buFont typeface="Corbel"/>
-              <a:buChar char="•"/>
-            </a:pPr>
-            <a:r>
-              <a:rPr b="0" lang="en-US" sz="2200" spc="-1" strike="noStrike">
-                <a:solidFill>
-                  <a:schemeClr val="accent1"/>
-                </a:solidFill>
-                <a:latin typeface="Corbel"/>
-              </a:rPr>
-              <a:t>Click to edit Master text styles</a:t>
-            </a:r>
-            <a:endParaRPr b="0" lang="en-US" sz="2200" spc="-1" strike="noStrike">
-              <a:solidFill>
-                <a:schemeClr val="accent1"/>
-              </a:solidFill>
-              <a:latin typeface="Corbel"/>
-            </a:endParaRPr>
-          </a:p>
-          <a:p>
-            <a:pPr lvl="1" marL="457200" indent="-182880" defTabSz="914400">
-              <a:lnSpc>
-                <a:spcPct val="90000"/>
-              </a:lnSpc>
+              <a:buSzPct val="45000"/>
+              <a:buFont typeface="Wingdings" charset="2"/>
+              <a:buChar char=""/>
+            </a:pPr>
+            <a:r>
+              <a:rPr b="0" lang="ja-JP" sz="1800" spc="-1" strike="noStrike">
+                <a:solidFill>
+                  <a:srgbClr val="000000"/>
+                </a:solidFill>
+                <a:latin typeface="Arial"/>
+              </a:rPr>
+              <a:t>クリックしてアウトラインのテキストを編集</a:t>
+            </a:r>
+            <a:endParaRPr b="0" lang="en-US" sz="1800" spc="-1" strike="noStrike">
+              <a:solidFill>
+                <a:srgbClr val="000000"/>
+              </a:solidFill>
+              <a:latin typeface="Arial"/>
+            </a:endParaRPr>
+          </a:p>
+          <a:p>
+            <a:pPr lvl="1" marL="864000" indent="-324000">
               <a:spcBef>
-                <a:spcPts val="201"/>
+                <a:spcPts val="1134"/>
               </a:spcBef>
-              <a:spcAft>
-                <a:spcPts val="400"/>
-              </a:spcAft>
               <a:buClr>
-                <a:srgbClr val="a6b727"/>
+                <a:srgbClr val="000000"/>
               </a:buClr>
-              <a:buSzPct val="80000"/>
-              <a:buFont typeface="Corbel"/>
-              <a:buChar char="•"/>
-            </a:pPr>
-            <a:r>
-              <a:rPr b="0" lang="en-US" sz="2000" spc="-1" strike="noStrike">
-                <a:solidFill>
-                  <a:schemeClr val="accent1"/>
-                </a:solidFill>
-                <a:latin typeface="Corbel"/>
-              </a:rPr>
-              <a:t>Second level</a:t>
-            </a:r>
-            <a:endParaRPr b="0" lang="en-US" sz="2000" spc="-1" strike="noStrike">
-              <a:solidFill>
-                <a:schemeClr val="accent1"/>
-              </a:solidFill>
-              <a:latin typeface="Corbel"/>
-            </a:endParaRPr>
-          </a:p>
-          <a:p>
-            <a:pPr lvl="2" marL="731520" indent="-182880" defTabSz="914400">
-              <a:lnSpc>
-                <a:spcPct val="90000"/>
-              </a:lnSpc>
+              <a:buSzPct val="75000"/>
+              <a:buFont typeface="Symbol" charset="2"/>
+              <a:buChar char=""/>
+            </a:pPr>
+            <a:r>
+              <a:rPr b="0" lang="en-US" sz="1800" spc="-1" strike="noStrike">
+                <a:solidFill>
+                  <a:srgbClr val="000000"/>
+                </a:solidFill>
+                <a:latin typeface="Arial"/>
+              </a:rPr>
+              <a:t>2</a:t>
+            </a:r>
+            <a:r>
+              <a:rPr b="0" lang="ja-JP" sz="1800" spc="-1" strike="noStrike">
+                <a:solidFill>
+                  <a:srgbClr val="000000"/>
+                </a:solidFill>
+                <a:latin typeface="Arial"/>
+              </a:rPr>
+              <a:t>レベル目のアウトライン</a:t>
+            </a:r>
+            <a:endParaRPr b="0" lang="en-US" sz="1800" spc="-1" strike="noStrike">
+              <a:solidFill>
+                <a:srgbClr val="000000"/>
+              </a:solidFill>
+              <a:latin typeface="Arial"/>
+            </a:endParaRPr>
+          </a:p>
+          <a:p>
+            <a:pPr lvl="2" marL="1296000" indent="-288000">
               <a:spcBef>
-                <a:spcPts val="201"/>
+                <a:spcPts val="850"/>
               </a:spcBef>
-              <a:spcAft>
-                <a:spcPts val="400"/>
-              </a:spcAft>
               <a:buClr>
-                <a:srgbClr val="a6b727"/>
+                <a:srgbClr val="000000"/>
               </a:buClr>
-              <a:buSzPct val="80000"/>
-              <a:buFont typeface="Corbel"/>
-              <a:buChar char="•"/>
+              <a:buSzPct val="45000"/>
+              <a:buFont typeface="Wingdings" charset="2"/>
+              <a:buChar char=""/>
             </a:pPr>
             <a:r>
               <a:rPr b="0" lang="en-US" sz="1800" spc="-1" strike="noStrike">
                 <a:solidFill>
-                  <a:schemeClr val="accent1"/>
-                </a:solidFill>
-                <a:latin typeface="Corbel"/>
-              </a:rPr>
-              <a:t>Third level</a:t>
+                  <a:srgbClr val="000000"/>
+                </a:solidFill>
+                <a:latin typeface="Arial"/>
+              </a:rPr>
+              <a:t>3</a:t>
+            </a:r>
+            <a:r>
+              <a:rPr b="0" lang="ja-JP" sz="1800" spc="-1" strike="noStrike">
+                <a:solidFill>
+                  <a:srgbClr val="000000"/>
+                </a:solidFill>
+                <a:latin typeface="Arial"/>
+              </a:rPr>
+              <a:t>レベル目のアウトライン</a:t>
             </a:r>
             <a:endParaRPr b="0" lang="en-US" sz="1800" spc="-1" strike="noStrike">
               <a:solidFill>
-                <a:schemeClr val="accent1"/>
-              </a:solidFill>
-              <a:latin typeface="Corbel"/>
-            </a:endParaRPr>
-          </a:p>
-          <a:p>
-            <a:pPr lvl="3" marL="1005840" indent="-182880" defTabSz="914400">
-              <a:lnSpc>
-                <a:spcPct val="90000"/>
-              </a:lnSpc>
+                <a:srgbClr val="000000"/>
+              </a:solidFill>
+              <a:latin typeface="Arial"/>
+            </a:endParaRPr>
+          </a:p>
+          <a:p>
+            <a:pPr lvl="3" marL="1728000" indent="-216000">
               <a:spcBef>
-                <a:spcPts val="201"/>
+                <a:spcPts val="567"/>
               </a:spcBef>
-              <a:spcAft>
-                <a:spcPts val="400"/>
-              </a:spcAft>
               <a:buClr>
-                <a:srgbClr val="a6b727"/>
+                <a:srgbClr val="000000"/>
               </a:buClr>
-              <a:buSzPct val="80000"/>
-              <a:buFont typeface="Corbel"/>
-              <a:buChar char="•"/>
-            </a:pPr>
-            <a:r>
-              <a:rPr b="0" lang="en-US" sz="1600" spc="-1" strike="noStrike">
-                <a:solidFill>
-                  <a:schemeClr val="accent1"/>
-                </a:solidFill>
-                <a:latin typeface="Corbel"/>
-              </a:rPr>
-              <a:t>Fourth level</a:t>
-            </a:r>
-            <a:endParaRPr b="0" lang="en-US" sz="1600" spc="-1" strike="noStrike">
-              <a:solidFill>
-                <a:schemeClr val="accent1"/>
-              </a:solidFill>
-              <a:latin typeface="Corbel"/>
-            </a:endParaRPr>
-          </a:p>
-          <a:p>
-            <a:pPr lvl="4" marL="1280160" indent="-182880" defTabSz="914400">
-              <a:lnSpc>
-                <a:spcPct val="90000"/>
-              </a:lnSpc>
+              <a:buSzPct val="75000"/>
+              <a:buFont typeface="Symbol" charset="2"/>
+              <a:buChar char=""/>
+            </a:pPr>
+            <a:r>
+              <a:rPr b="0" lang="en-US" sz="1800" spc="-1" strike="noStrike">
+                <a:solidFill>
+                  <a:srgbClr val="000000"/>
+                </a:solidFill>
+                <a:latin typeface="Arial"/>
+              </a:rPr>
+              <a:t>4</a:t>
+            </a:r>
+            <a:r>
+              <a:rPr b="0" lang="ja-JP" sz="1800" spc="-1" strike="noStrike">
+                <a:solidFill>
+                  <a:srgbClr val="000000"/>
+                </a:solidFill>
+                <a:latin typeface="Arial"/>
+              </a:rPr>
+              <a:t>レベル目のアウトライン</a:t>
+            </a:r>
+            <a:endParaRPr b="0" lang="en-US" sz="1800" spc="-1" strike="noStrike">
+              <a:solidFill>
+                <a:srgbClr val="000000"/>
+              </a:solidFill>
+              <a:latin typeface="Arial"/>
+            </a:endParaRPr>
+          </a:p>
+          <a:p>
+            <a:pPr lvl="4" marL="2160000" indent="-216000">
               <a:spcBef>
-                <a:spcPts val="201"/>
+                <a:spcPts val="283"/>
               </a:spcBef>
-              <a:spcAft>
-                <a:spcPts val="400"/>
-              </a:spcAft>
               <a:buClr>
-                <a:srgbClr val="a6b727"/>
+                <a:srgbClr val="000000"/>
               </a:buClr>
-              <a:buSzPct val="80000"/>
-              <a:buFont typeface="Corbel"/>
-              <a:buChar char="•"/>
-            </a:pPr>
-            <a:r>
-              <a:rPr b="0" lang="en-US" sz="1600" spc="-1" strike="noStrike">
-                <a:solidFill>
-                  <a:schemeClr val="accent1"/>
-                </a:solidFill>
-                <a:latin typeface="Corbel"/>
-              </a:rPr>
-              <a:t>Fifth level</a:t>
-            </a:r>
-            <a:endParaRPr b="0" lang="en-US" sz="1600" spc="-1" strike="noStrike">
-              <a:solidFill>
-                <a:schemeClr val="accent1"/>
-              </a:solidFill>
-              <a:latin typeface="Corbel"/>
-            </a:endParaRPr>
-          </a:p>
-        </p:txBody>
-      </p:sp>
-      <p:sp>
-        <p:nvSpPr>
-          <p:cNvPr id="25" name="PlaceHolder 3"/>
+              <a:buSzPct val="45000"/>
+              <a:buFont typeface="Wingdings" charset="2"/>
+              <a:buChar char=""/>
+            </a:pPr>
+            <a:r>
+              <a:rPr b="0" lang="en-US" sz="1800" spc="-1" strike="noStrike">
+                <a:solidFill>
+                  <a:srgbClr val="000000"/>
+                </a:solidFill>
+                <a:latin typeface="Arial"/>
+              </a:rPr>
+              <a:t>5</a:t>
+            </a:r>
+            <a:r>
+              <a:rPr b="0" lang="ja-JP" sz="1800" spc="-1" strike="noStrike">
+                <a:solidFill>
+                  <a:srgbClr val="000000"/>
+                </a:solidFill>
+                <a:latin typeface="Arial"/>
+              </a:rPr>
+              <a:t>レベル目のアウトライン</a:t>
+            </a:r>
+            <a:endParaRPr b="0" lang="en-US" sz="1800" spc="-1" strike="noStrike">
+              <a:solidFill>
+                <a:srgbClr val="000000"/>
+              </a:solidFill>
+              <a:latin typeface="Arial"/>
+            </a:endParaRPr>
+          </a:p>
+          <a:p>
+            <a:pPr lvl="5" marL="2592000" indent="-216000">
+              <a:spcBef>
+                <a:spcPts val="283"/>
+              </a:spcBef>
+              <a:buClr>
+                <a:srgbClr val="000000"/>
+              </a:buClr>
+              <a:buSzPct val="45000"/>
+              <a:buFont typeface="Wingdings" charset="2"/>
+              <a:buChar char=""/>
+            </a:pPr>
+            <a:r>
+              <a:rPr b="0" lang="en-US" sz="1800" spc="-1" strike="noStrike">
+                <a:solidFill>
+                  <a:srgbClr val="000000"/>
+                </a:solidFill>
+                <a:latin typeface="Arial"/>
+              </a:rPr>
+              <a:t>6</a:t>
+            </a:r>
+            <a:r>
+              <a:rPr b="0" lang="ja-JP" sz="1800" spc="-1" strike="noStrike">
+                <a:solidFill>
+                  <a:srgbClr val="000000"/>
+                </a:solidFill>
+                <a:latin typeface="Arial"/>
+              </a:rPr>
+              <a:t>レベル目のアウトライン</a:t>
+            </a:r>
+            <a:endParaRPr b="0" lang="en-US" sz="1800" spc="-1" strike="noStrike">
+              <a:solidFill>
+                <a:srgbClr val="000000"/>
+              </a:solidFill>
+              <a:latin typeface="Arial"/>
+            </a:endParaRPr>
+          </a:p>
+          <a:p>
+            <a:pPr lvl="6" marL="3024000" indent="-216000">
+              <a:spcBef>
+                <a:spcPts val="283"/>
+              </a:spcBef>
+              <a:buClr>
+                <a:srgbClr val="000000"/>
+              </a:buClr>
+              <a:buSzPct val="45000"/>
+              <a:buFont typeface="Wingdings" charset="2"/>
+              <a:buChar char=""/>
+            </a:pPr>
+            <a:r>
+              <a:rPr b="0" lang="en-US" sz="1800" spc="-1" strike="noStrike">
+                <a:solidFill>
+                  <a:srgbClr val="000000"/>
+                </a:solidFill>
+                <a:latin typeface="Arial"/>
+              </a:rPr>
+              <a:t>7</a:t>
+            </a:r>
+            <a:r>
+              <a:rPr b="0" lang="ja-JP" sz="1800" spc="-1" strike="noStrike">
+                <a:solidFill>
+                  <a:srgbClr val="000000"/>
+                </a:solidFill>
+                <a:latin typeface="Arial"/>
+              </a:rPr>
+              <a:t>レベル目のアウトライン</a:t>
+            </a:r>
+            <a:endParaRPr b="0" lang="en-US" sz="1800" spc="-1" strike="noStrike">
+              <a:solidFill>
+                <a:srgbClr val="000000"/>
+              </a:solidFill>
+              <a:latin typeface="Arial"/>
+            </a:endParaRPr>
+          </a:p>
+        </p:txBody>
+      </p:sp>
+      <p:sp>
+        <p:nvSpPr>
+          <p:cNvPr id="21" name="PlaceHolder 3"/>
           <p:cNvSpPr>
             <a:spLocks noGrp="1"/>
           </p:cNvSpPr>
           <p:nvPr>
-            <p:ph type="dt" idx="10"/>
+            <p:ph type="ftr" idx="10"/>
           </p:nvPr>
         </p:nvSpPr>
         <p:spPr>
           <a:xfrm>
-            <a:off x="1143000" y="6223680"/>
-            <a:ext cx="2328840" cy="364680"/>
+            <a:off x="3949200" y="6223680"/>
+            <a:ext cx="4717080" cy="364320"/>
           </a:xfrm>
           <a:prstGeom prst="rect">
             <a:avLst/>
@@ -4636,36 +3565,42 @@
             <a:noAutofit/>
           </a:bodyPr>
           <a:lstStyle>
-            <a:lvl1pPr indent="0" defTabSz="914400">
+            <a:lvl1pPr indent="0" algn="ctr">
               <a:lnSpc>
                 <a:spcPct val="100000"/>
               </a:lnSpc>
               <a:buNone/>
-              <a:defRPr b="0" lang="en-US" sz="1200" spc="-1" strike="noStrike">
-                <a:solidFill>
-                  <a:schemeClr val="accent1"/>
-                </a:solidFill>
-                <a:latin typeface="Corbel"/>
+              <a:tabLst>
+                <a:tab algn="l" pos="0"/>
+              </a:tabLst>
+              <a:defRPr b="0" lang="en-US" sz="1400" spc="-1" strike="noStrike">
+                <a:solidFill>
+                  <a:srgbClr val="000000"/>
+                </a:solidFill>
+                <a:latin typeface="Noto Serif JP"/>
               </a:defRPr>
             </a:lvl1pPr>
           </a:lstStyle>
           <a:p>
-            <a:pPr indent="0" defTabSz="914400">
+            <a:pPr indent="0" algn="ctr">
               <a:lnSpc>
                 <a:spcPct val="100000"/>
               </a:lnSpc>
               <a:buNone/>
-            </a:pPr>
-            <a:r>
-              <a:rPr b="0" lang="en-US" sz="1200" spc="-1" strike="noStrike">
-                <a:solidFill>
-                  <a:schemeClr val="accent1"/>
-                </a:solidFill>
-                <a:latin typeface="Corbel"/>
-              </a:rPr>
-              <a:t>&lt;日付/時刻&gt;</a:t>
-            </a:r>
-            <a:endParaRPr b="0" lang="en-US" sz="1200" spc="-1" strike="noStrike">
+              <a:tabLst>
+                <a:tab algn="l" pos="0"/>
+              </a:tabLst>
+            </a:pPr>
+            <a:r>
+              <a:rPr b="0" lang="en-US" sz="1400" spc="-1" strike="noStrike">
+                <a:solidFill>
+                  <a:srgbClr val="000000"/>
+                </a:solidFill>
+                <a:latin typeface="Noto Serif JP"/>
+              </a:rPr>
+              <a:t>&lt;フッター&gt;</a:t>
+            </a:r>
+            <a:endParaRPr b="0" lang="en-US" sz="1400" spc="-1" strike="noStrike">
               <a:solidFill>
                 <a:srgbClr val="000000"/>
               </a:solidFill>
@@ -4676,18 +3611,18 @@
       </p:sp>
       <p:sp>
         <p:nvSpPr>
-          <p:cNvPr id="26" name="PlaceHolder 4"/>
+          <p:cNvPr id="22" name="PlaceHolder 4"/>
           <p:cNvSpPr>
             <a:spLocks noGrp="1"/>
           </p:cNvSpPr>
           <p:nvPr>
-            <p:ph type="ftr" idx="11"/>
+            <p:ph type="sldNum" idx="11"/>
           </p:nvPr>
         </p:nvSpPr>
         <p:spPr>
           <a:xfrm>
-            <a:off x="3949200" y="6223680"/>
-            <a:ext cx="4717440" cy="364680"/>
+            <a:off x="9329400" y="6223680"/>
+            <a:ext cx="1705320" cy="364320"/>
           </a:xfrm>
           <a:prstGeom prst="rect">
             <a:avLst/>
@@ -4702,30 +3637,42 @@
             <a:noAutofit/>
           </a:bodyPr>
           <a:lstStyle>
-            <a:lvl1pPr indent="0" algn="ctr">
-              <a:buNone/>
-              <a:defRPr b="0" lang="en-US" sz="1400" spc="-1" strike="noStrike">
-                <a:solidFill>
-                  <a:srgbClr val="000000"/>
-                </a:solidFill>
-                <a:latin typeface="Noto Serif JP"/>
+            <a:lvl1pPr indent="0" algn="r" defTabSz="914400">
+              <a:lnSpc>
+                <a:spcPct val="100000"/>
+              </a:lnSpc>
+              <a:buNone/>
+              <a:tabLst>
+                <a:tab algn="l" pos="0"/>
+              </a:tabLst>
+              <a:defRPr b="0" lang="en-US" sz="1200" spc="-1" strike="noStrike">
+                <a:solidFill>
+                  <a:schemeClr val="accent1"/>
+                </a:solidFill>
+                <a:latin typeface="Corbel"/>
               </a:defRPr>
             </a:lvl1pPr>
           </a:lstStyle>
           <a:p>
-            <a:pPr indent="0" algn="ctr">
-              <a:buNone/>
-            </a:pPr>
-            <a:r>
-              <a:rPr b="0" lang="en-US" sz="1400" spc="-1" strike="noStrike">
-                <a:solidFill>
-                  <a:srgbClr val="000000"/>
-                </a:solidFill>
-                <a:latin typeface="Noto Serif JP"/>
-              </a:rPr>
-              <a:t>&lt;フッター&gt;</a:t>
-            </a:r>
-            <a:endParaRPr b="0" lang="en-US" sz="1400" spc="-1" strike="noStrike">
+            <a:pPr indent="0" algn="r" defTabSz="914400">
+              <a:lnSpc>
+                <a:spcPct val="100000"/>
+              </a:lnSpc>
+              <a:buNone/>
+              <a:tabLst>
+                <a:tab algn="l" pos="0"/>
+              </a:tabLst>
+            </a:pPr>
+            <a:fld id="{8BEB1CDF-BA47-4E9B-A47A-79F052A76446}" type="slidenum">
+              <a:rPr b="0" lang="en-US" sz="1200" spc="-1" strike="noStrike">
+                <a:solidFill>
+                  <a:schemeClr val="accent1"/>
+                </a:solidFill>
+                <a:latin typeface="Corbel"/>
+              </a:rPr>
+              <a:t>&lt;番号&gt;</a:t>
+            </a:fld>
+            <a:endParaRPr b="0" lang="en-US" sz="1200" spc="-1" strike="noStrike">
               <a:solidFill>
                 <a:srgbClr val="000000"/>
               </a:solidFill>
@@ -4736,18 +3683,18 @@
       </p:sp>
       <p:sp>
         <p:nvSpPr>
-          <p:cNvPr id="27" name="PlaceHolder 5"/>
+          <p:cNvPr id="23" name="PlaceHolder 5"/>
           <p:cNvSpPr>
             <a:spLocks noGrp="1"/>
           </p:cNvSpPr>
           <p:nvPr>
-            <p:ph type="sldNum" idx="12"/>
+            <p:ph type="dt" idx="12"/>
           </p:nvPr>
         </p:nvSpPr>
         <p:spPr>
           <a:xfrm>
-            <a:off x="9329400" y="6223680"/>
-            <a:ext cx="1705680" cy="364680"/>
+            <a:off x="1143000" y="6223680"/>
+            <a:ext cx="2328480" cy="364320"/>
           </a:xfrm>
           <a:prstGeom prst="rect">
             <a:avLst/>
@@ -4762,36 +3709,30 @@
             <a:noAutofit/>
           </a:bodyPr>
           <a:lstStyle>
-            <a:lvl1pPr indent="0" algn="r" defTabSz="914400">
-              <a:lnSpc>
-                <a:spcPct val="100000"/>
-              </a:lnSpc>
-              <a:buNone/>
-              <a:defRPr b="0" lang="en-US" sz="1200" spc="-1" strike="noStrike">
-                <a:solidFill>
-                  <a:schemeClr val="accent1"/>
-                </a:solidFill>
-                <a:latin typeface="Corbel"/>
+            <a:lvl1pPr indent="0">
+              <a:buNone/>
+              <a:defRPr b="0" lang="en-US" sz="1400" spc="-1" strike="noStrike">
+                <a:solidFill>
+                  <a:srgbClr val="000000"/>
+                </a:solidFill>
+                <a:latin typeface="Noto Serif JP"/>
               </a:defRPr>
             </a:lvl1pPr>
           </a:lstStyle>
           <a:p>
-            <a:pPr indent="0" algn="r" defTabSz="914400">
-              <a:lnSpc>
-                <a:spcPct val="100000"/>
-              </a:lnSpc>
-              <a:buNone/>
-            </a:pPr>
-            <a:fld id="{5CBB9B5F-1B4B-451B-A6FF-8DD444B10659}" type="slidenum">
-              <a:rPr b="0" lang="en-US" sz="1200" spc="-1" strike="noStrike">
-                <a:solidFill>
-                  <a:schemeClr val="accent1"/>
-                </a:solidFill>
-                <a:latin typeface="Corbel"/>
-              </a:rPr>
-              <a:t>&lt;番号&gt;</a:t>
-            </a:fld>
-            <a:endParaRPr b="0" lang="en-US" sz="1200" spc="-1" strike="noStrike">
+            <a:pPr indent="0">
+              <a:buNone/>
+            </a:pPr>
+            <a:r>
+              <a:rPr b="0" lang="en-US" sz="1400" spc="-1" strike="noStrike">
+                <a:solidFill>
+                  <a:srgbClr val="000000"/>
+                </a:solidFill>
+                <a:latin typeface="Noto Serif JP"/>
+              </a:rPr>
+              <a:t>&lt;日付/時刻&gt;</a:t>
+            </a:r>
+            <a:endParaRPr b="0" lang="en-US" sz="1400" spc="-1" strike="noStrike">
               <a:solidFill>
                 <a:srgbClr val="000000"/>
               </a:solidFill>
@@ -4835,14 +3776,14 @@
       </p:grpSpPr>
       <p:sp>
         <p:nvSpPr>
-          <p:cNvPr id="30" name="Rectangle 6"/>
+          <p:cNvPr id="26" name="Rectangle 6"/>
           <p:cNvSpPr/>
           <p:nvPr/>
         </p:nvSpPr>
         <p:spPr>
           <a:xfrm>
             <a:off x="231120" y="243720"/>
-            <a:ext cx="11724120" cy="6377400"/>
+            <a:ext cx="11723760" cy="6377040"/>
           </a:xfrm>
           <a:prstGeom prst="rect">
             <a:avLst/>
@@ -4873,6 +3814,11 @@
             <a:noAutofit/>
           </a:bodyPr>
           <a:p>
+            <a:pPr>
+              <a:lnSpc>
+                <a:spcPct val="100000"/>
+              </a:lnSpc>
+            </a:pPr>
             <a:endParaRPr b="0" lang="en-US" sz="1800" spc="-1" strike="noStrike">
               <a:solidFill>
                 <a:srgbClr val="000000"/>
@@ -4882,20 +3828,41 @@
           </a:p>
         </p:txBody>
       </p:sp>
-      <p:sp>
-        <p:nvSpPr>
-          <p:cNvPr id="31" name="PlaceHolder 1"/>
+      <p:cxnSp>
+        <p:nvCxnSpPr>
+          <p:cNvPr id="27" name="Straight Connector 6"/>
+          <p:cNvCxnSpPr/>
+          <p:nvPr/>
+        </p:nvCxnSpPr>
+        <p:spPr>
+          <a:xfrm>
+            <a:off x="1981080" y="4020120"/>
+            <a:ext cx="8230320" cy="720"/>
+          </a:xfrm>
+          <a:prstGeom prst="straightConnector1">
+            <a:avLst/>
+          </a:prstGeom>
+          <a:ln w="0">
+            <a:solidFill>
+              <a:srgbClr val="a6b727"/>
+            </a:solidFill>
+          </a:ln>
+        </p:spPr>
+      </p:cxnSp>
+      <p:sp>
+        <p:nvSpPr>
+          <p:cNvPr id="28" name="PlaceHolder 1"/>
           <p:cNvSpPr>
             <a:spLocks noGrp="1"/>
           </p:cNvSpPr>
           <p:nvPr>
-            <p:ph type="title"/>
+            <p:ph type="ftr" idx="13"/>
           </p:nvPr>
         </p:nvSpPr>
         <p:spPr>
           <a:xfrm>
-            <a:off x="1106280" y="1173600"/>
-            <a:ext cx="9966600" cy="2925720"/>
+            <a:off x="3949200" y="6223680"/>
+            <a:ext cx="4717080" cy="364320"/>
           </a:xfrm>
           <a:prstGeom prst="rect">
             <a:avLst/>
@@ -4906,48 +3873,68 @@
           </a:ln>
         </p:spPr>
         <p:txBody>
-          <a:bodyPr lIns="91440" rIns="91440" tIns="45720" bIns="45720" anchor="b">
+          <a:bodyPr lIns="91440" rIns="91440" tIns="45720" bIns="45720" anchor="ctr">
             <a:noAutofit/>
           </a:bodyPr>
-          <a:p>
-            <a:pPr indent="0" algn="ctr" defTabSz="914400">
+          <a:lstStyle>
+            <a:lvl1pPr indent="0" algn="ctr">
               <a:lnSpc>
-                <a:spcPct val="85000"/>
+                <a:spcPct val="100000"/>
               </a:lnSpc>
               <a:buNone/>
-            </a:pPr>
-            <a:r>
-              <a:rPr b="0" lang="en-US" sz="7200" spc="-1" strike="noStrike" cap="all">
-                <a:solidFill>
-                  <a:schemeClr val="accent1"/>
-                </a:solidFill>
-                <a:latin typeface="Corbel"/>
-              </a:rPr>
-              <a:t>Click to edit Master title style</a:t>
-            </a:r>
-            <a:endParaRPr b="0" lang="en-US" sz="7200" spc="-1" strike="noStrike">
-              <a:solidFill>
-                <a:schemeClr val="dk1"/>
-              </a:solidFill>
-              <a:latin typeface="Corbel"/>
-            </a:endParaRPr>
-          </a:p>
-        </p:txBody>
-      </p:sp>
-      <p:sp>
-        <p:nvSpPr>
-          <p:cNvPr id="32" name="PlaceHolder 2"/>
+              <a:tabLst>
+                <a:tab algn="l" pos="0"/>
+              </a:tabLst>
+              <a:defRPr b="0" lang="en-US" sz="1400" spc="-1" strike="noStrike">
+                <a:solidFill>
+                  <a:srgbClr val="000000"/>
+                </a:solidFill>
+                <a:latin typeface="Noto Serif JP"/>
+              </a:defRPr>
+            </a:lvl1pPr>
+          </a:lstStyle>
+          <a:p>
+            <a:pPr indent="0" algn="ctr">
+              <a:lnSpc>
+                <a:spcPct val="100000"/>
+              </a:lnSpc>
+              <a:buNone/>
+              <a:tabLst>
+                <a:tab algn="l" pos="0"/>
+              </a:tabLst>
+            </a:pPr>
+            <a:r>
+              <a:rPr b="0" lang="en-US" sz="1400" spc="-1" strike="noStrike">
+                <a:solidFill>
+                  <a:srgbClr val="000000"/>
+                </a:solidFill>
+                <a:latin typeface="Noto Serif JP"/>
+              </a:rPr>
+              <a:t>&lt;フッター&gt;</a:t>
+            </a:r>
+            <a:endParaRPr b="0" lang="en-US" sz="1400" spc="-1" strike="noStrike">
+              <a:solidFill>
+                <a:srgbClr val="000000"/>
+              </a:solidFill>
+              <a:latin typeface="Noto Serif JP"/>
+            </a:endParaRPr>
+          </a:p>
+        </p:txBody>
+      </p:sp>
+      <p:sp>
+        <p:nvSpPr>
+          <p:cNvPr id="29" name="PlaceHolder 2"/>
           <p:cNvSpPr>
             <a:spLocks noGrp="1"/>
           </p:cNvSpPr>
           <p:nvPr>
-            <p:ph type="body"/>
+            <p:ph type="sldNum" idx="14"/>
           </p:nvPr>
         </p:nvSpPr>
         <p:spPr>
           <a:xfrm>
-            <a:off x="1710000" y="4154400"/>
-            <a:ext cx="8768880" cy="1363320"/>
+            <a:off x="9329400" y="6223680"/>
+            <a:ext cx="1705320" cy="364320"/>
           </a:xfrm>
           <a:prstGeom prst="rect">
             <a:avLst/>
@@ -4958,54 +3945,68 @@
           </a:ln>
         </p:spPr>
         <p:txBody>
-          <a:bodyPr lIns="91440" rIns="91440" tIns="45720" bIns="45720" anchor="t">
-            <a:normAutofit/>
+          <a:bodyPr lIns="91440" rIns="91440" tIns="45720" bIns="45720" anchor="ctr">
+            <a:noAutofit/>
           </a:bodyPr>
-          <a:p>
-            <a:pPr indent="0" algn="ctr" defTabSz="914400">
+          <a:lstStyle>
+            <a:lvl1pPr indent="0" algn="r" defTabSz="914400">
               <a:lnSpc>
-                <a:spcPct val="90000"/>
+                <a:spcPct val="100000"/>
               </a:lnSpc>
-              <a:spcBef>
-                <a:spcPts val="1400"/>
-              </a:spcBef>
               <a:buNone/>
               <a:tabLst>
                 <a:tab algn="l" pos="0"/>
               </a:tabLst>
-            </a:pPr>
-            <a:r>
-              <a:rPr b="0" lang="en-US" sz="2200" spc="-1" strike="noStrike">
+              <a:defRPr b="0" lang="en-US" sz="1200" spc="-1" strike="noStrike">
                 <a:solidFill>
                   <a:schemeClr val="accent1"/>
                 </a:solidFill>
                 <a:latin typeface="Corbel"/>
-              </a:rPr>
-              <a:t>Click to edit Master text styles</a:t>
-            </a:r>
-            <a:endParaRPr b="0" lang="en-US" sz="2200" spc="-1" strike="noStrike">
-              <a:solidFill>
-                <a:schemeClr val="accent1"/>
-              </a:solidFill>
-              <a:latin typeface="Corbel"/>
-            </a:endParaRPr>
-          </a:p>
-        </p:txBody>
-      </p:sp>
-      <p:sp>
-        <p:nvSpPr>
-          <p:cNvPr id="33" name="PlaceHolder 3"/>
+              </a:defRPr>
+            </a:lvl1pPr>
+          </a:lstStyle>
+          <a:p>
+            <a:pPr indent="0" algn="r" defTabSz="914400">
+              <a:lnSpc>
+                <a:spcPct val="100000"/>
+              </a:lnSpc>
+              <a:buNone/>
+              <a:tabLst>
+                <a:tab algn="l" pos="0"/>
+              </a:tabLst>
+            </a:pPr>
+            <a:fld id="{1A67AB61-F69A-4D08-90D1-7B306CCC9CD2}" type="slidenum">
+              <a:rPr b="0" lang="en-US" sz="1200" spc="-1" strike="noStrike">
+                <a:solidFill>
+                  <a:schemeClr val="accent1"/>
+                </a:solidFill>
+                <a:latin typeface="Corbel"/>
+              </a:rPr>
+              <a:t>&lt;番号&gt;</a:t>
+            </a:fld>
+            <a:endParaRPr b="0" lang="en-US" sz="1200" spc="-1" strike="noStrike">
+              <a:solidFill>
+                <a:srgbClr val="000000"/>
+              </a:solidFill>
+              <a:latin typeface="Noto Serif JP"/>
+            </a:endParaRPr>
+          </a:p>
+        </p:txBody>
+      </p:sp>
+      <p:sp>
+        <p:nvSpPr>
+          <p:cNvPr id="30" name="PlaceHolder 3"/>
           <p:cNvSpPr>
             <a:spLocks noGrp="1"/>
           </p:cNvSpPr>
           <p:nvPr>
-            <p:ph type="dt" idx="13"/>
+            <p:ph type="dt" idx="15"/>
           </p:nvPr>
         </p:nvSpPr>
         <p:spPr>
           <a:xfrm>
             <a:off x="1143000" y="6223680"/>
-            <a:ext cx="2328840" cy="364680"/>
+            <a:ext cx="2328480" cy="364320"/>
           </a:xfrm>
           <a:prstGeom prst="rect">
             <a:avLst/>
@@ -5020,73 +4021,7 @@
             <a:noAutofit/>
           </a:bodyPr>
           <a:lstStyle>
-            <a:lvl1pPr indent="0" defTabSz="914400">
-              <a:lnSpc>
-                <a:spcPct val="100000"/>
-              </a:lnSpc>
-              <a:buNone/>
-              <a:defRPr b="0" lang="en-US" sz="1200" spc="-1" strike="noStrike">
-                <a:solidFill>
-                  <a:schemeClr val="accent1"/>
-                </a:solidFill>
-                <a:latin typeface="Corbel"/>
-              </a:defRPr>
-            </a:lvl1pPr>
-          </a:lstStyle>
-          <a:p>
-            <a:pPr indent="0" defTabSz="914400">
-              <a:lnSpc>
-                <a:spcPct val="100000"/>
-              </a:lnSpc>
-              <a:buNone/>
-            </a:pPr>
-            <a:r>
-              <a:rPr b="0" lang="en-US" sz="1200" spc="-1" strike="noStrike">
-                <a:solidFill>
-                  <a:schemeClr val="accent1"/>
-                </a:solidFill>
-                <a:latin typeface="Corbel"/>
-              </a:rPr>
-              <a:t>&lt;日付/時刻&gt;</a:t>
-            </a:r>
-            <a:endParaRPr b="0" lang="en-US" sz="1200" spc="-1" strike="noStrike">
-              <a:solidFill>
-                <a:srgbClr val="000000"/>
-              </a:solidFill>
-              <a:latin typeface="Noto Serif JP"/>
-            </a:endParaRPr>
-          </a:p>
-        </p:txBody>
-      </p:sp>
-      <p:sp>
-        <p:nvSpPr>
-          <p:cNvPr id="34" name="PlaceHolder 4"/>
-          <p:cNvSpPr>
-            <a:spLocks noGrp="1"/>
-          </p:cNvSpPr>
-          <p:nvPr>
-            <p:ph type="ftr" idx="14"/>
-          </p:nvPr>
-        </p:nvSpPr>
-        <p:spPr>
-          <a:xfrm>
-            <a:off x="3949200" y="6223680"/>
-            <a:ext cx="4717440" cy="364680"/>
-          </a:xfrm>
-          <a:prstGeom prst="rect">
-            <a:avLst/>
-          </a:prstGeom>
-          <a:noFill/>
-          <a:ln w="0">
-            <a:noFill/>
-          </a:ln>
-        </p:spPr>
-        <p:txBody>
-          <a:bodyPr lIns="91440" rIns="91440" tIns="45720" bIns="45720" anchor="ctr">
-            <a:noAutofit/>
-          </a:bodyPr>
-          <a:lstStyle>
-            <a:lvl1pPr indent="0" algn="ctr">
+            <a:lvl1pPr indent="0">
               <a:buNone/>
               <a:defRPr b="0" lang="en-US" sz="1400" spc="-1" strike="noStrike">
                 <a:solidFill>
@@ -5097,7 +4032,7 @@
             </a:lvl1pPr>
           </a:lstStyle>
           <a:p>
-            <a:pPr indent="0" algn="ctr">
+            <a:pPr indent="0">
               <a:buNone/>
             </a:pPr>
             <a:r>
@@ -5107,7 +4042,7 @@
                 </a:solidFill>
                 <a:latin typeface="Noto Serif JP"/>
               </a:rPr>
-              <a:t>&lt;フッター&gt;</a:t>
+              <a:t>&lt;日付/時刻&gt;</a:t>
             </a:r>
             <a:endParaRPr b="0" lang="en-US" sz="1400" spc="-1" strike="noStrike">
               <a:solidFill>
@@ -5118,94 +4053,6 @@
           </a:p>
         </p:txBody>
       </p:sp>
-      <p:sp>
-        <p:nvSpPr>
-          <p:cNvPr id="35" name="PlaceHolder 5"/>
-          <p:cNvSpPr>
-            <a:spLocks noGrp="1"/>
-          </p:cNvSpPr>
-          <p:nvPr>
-            <p:ph type="sldNum" idx="15"/>
-          </p:nvPr>
-        </p:nvSpPr>
-        <p:spPr>
-          <a:xfrm>
-            <a:off x="9329400" y="6223680"/>
-            <a:ext cx="1705680" cy="364680"/>
-          </a:xfrm>
-          <a:prstGeom prst="rect">
-            <a:avLst/>
-          </a:prstGeom>
-          <a:noFill/>
-          <a:ln w="0">
-            <a:noFill/>
-          </a:ln>
-        </p:spPr>
-        <p:txBody>
-          <a:bodyPr lIns="91440" rIns="91440" tIns="45720" bIns="45720" anchor="ctr">
-            <a:noAutofit/>
-          </a:bodyPr>
-          <a:lstStyle>
-            <a:lvl1pPr indent="0" algn="r" defTabSz="914400">
-              <a:lnSpc>
-                <a:spcPct val="100000"/>
-              </a:lnSpc>
-              <a:buNone/>
-              <a:defRPr b="0" lang="en-US" sz="1200" spc="-1" strike="noStrike">
-                <a:solidFill>
-                  <a:schemeClr val="accent1"/>
-                </a:solidFill>
-                <a:latin typeface="Corbel"/>
-              </a:defRPr>
-            </a:lvl1pPr>
-          </a:lstStyle>
-          <a:p>
-            <a:pPr indent="0" algn="r" defTabSz="914400">
-              <a:lnSpc>
-                <a:spcPct val="100000"/>
-              </a:lnSpc>
-              <a:buNone/>
-            </a:pPr>
-            <a:fld id="{C1D7D800-44CC-4C2A-923A-2CFE07B51AAD}" type="slidenum">
-              <a:rPr b="0" lang="en-US" sz="1200" spc="-1" strike="noStrike">
-                <a:solidFill>
-                  <a:schemeClr val="accent1"/>
-                </a:solidFill>
-                <a:latin typeface="Corbel"/>
-              </a:rPr>
-              <a:t>&lt;番号&gt;</a:t>
-            </a:fld>
-            <a:endParaRPr b="0" lang="en-US" sz="1200" spc="-1" strike="noStrike">
-              <a:solidFill>
-                <a:srgbClr val="000000"/>
-              </a:solidFill>
-              <a:latin typeface="Noto Serif JP"/>
-            </a:endParaRPr>
-          </a:p>
-        </p:txBody>
-      </p:sp>
-      <p:cxnSp>
-        <p:nvCxnSpPr>
-          <p:cNvPr id="36" name="Straight Connector 6"/>
-          <p:cNvCxnSpPr/>
-          <p:nvPr/>
-        </p:nvCxnSpPr>
-        <p:spPr>
-          <a:xfrm>
-            <a:off x="1981080" y="4020120"/>
-            <a:ext cx="8229960" cy="360"/>
-          </a:xfrm>
-          <a:prstGeom prst="straightConnector1">
-            <a:avLst/>
-          </a:prstGeom>
-          <a:ln>
-            <a:solidFill>
-              <a:srgbClr val="a6b727"/>
-            </a:solidFill>
-            <a:round/>
-          </a:ln>
-        </p:spPr>
-      </p:cxnSp>
     </p:spTree>
   </p:cSld>
   <p:clrMap bg1="lt1" bg2="lt2" tx1="dk1" tx2="dk2" accent1="accent1" accent2="accent2" accent3="accent3" accent4="accent4" accent5="accent5" accent6="accent6" hlink="hlink" folHlink="folHlink"/>
@@ -5241,14 +4088,14 @@
       </p:grpSpPr>
       <p:sp>
         <p:nvSpPr>
-          <p:cNvPr id="37" name="Rectangle 6"/>
+          <p:cNvPr id="31" name="Rectangle 6"/>
           <p:cNvSpPr/>
           <p:nvPr/>
         </p:nvSpPr>
         <p:spPr>
           <a:xfrm>
             <a:off x="231120" y="243720"/>
-            <a:ext cx="11724120" cy="6377400"/>
+            <a:ext cx="11723760" cy="6377040"/>
           </a:xfrm>
           <a:prstGeom prst="rect">
             <a:avLst/>
@@ -5279,6 +4126,11 @@
             <a:noAutofit/>
           </a:bodyPr>
           <a:p>
+            <a:pPr>
+              <a:lnSpc>
+                <a:spcPct val="100000"/>
+              </a:lnSpc>
+            </a:pPr>
             <a:endParaRPr b="0" lang="en-US" sz="1800" spc="-1" strike="noStrike">
               <a:solidFill>
                 <a:srgbClr val="000000"/>
@@ -5290,7 +4142,7 @@
       </p:sp>
       <p:sp>
         <p:nvSpPr>
-          <p:cNvPr id="38" name="PlaceHolder 1"/>
+          <p:cNvPr id="32" name="PlaceHolder 1"/>
           <p:cNvSpPr>
             <a:spLocks noGrp="1"/>
           </p:cNvSpPr>
@@ -5301,7 +4153,7 @@
         <p:spPr>
           <a:xfrm>
             <a:off x="1143000" y="609480"/>
-            <a:ext cx="9875160" cy="1356120"/>
+            <a:ext cx="9874800" cy="1355760"/>
           </a:xfrm>
           <a:prstGeom prst="rect">
             <a:avLst/>
@@ -5312,37 +4164,34 @@
           </a:ln>
         </p:spPr>
         <p:txBody>
-          <a:bodyPr lIns="91440" rIns="91440" tIns="45720" bIns="45720" anchor="ctr">
+          <a:bodyPr lIns="0" rIns="0" tIns="0" bIns="0" anchor="ctr">
             <a:noAutofit/>
           </a:bodyPr>
           <a:p>
-            <a:pPr indent="0" defTabSz="914400">
-              <a:lnSpc>
-                <a:spcPct val="90000"/>
-              </a:lnSpc>
-              <a:buNone/>
-            </a:pPr>
-            <a:r>
-              <a:rPr b="0" lang="en-US" sz="4400" spc="-1" strike="noStrike">
-                <a:solidFill>
-                  <a:schemeClr val="accent1"/>
-                </a:solidFill>
-                <a:latin typeface="Corbel"/>
-              </a:rPr>
-              <a:t>Click to edit Master title style</a:t>
-            </a:r>
-            <a:endParaRPr b="0" lang="en-US" sz="4400" spc="-1" strike="noStrike">
-              <a:solidFill>
-                <a:schemeClr val="dk1"/>
-              </a:solidFill>
-              <a:latin typeface="Corbel"/>
-            </a:endParaRPr>
-          </a:p>
-        </p:txBody>
-      </p:sp>
-      <p:sp>
-        <p:nvSpPr>
-          <p:cNvPr id="39" name="PlaceHolder 2"/>
+            <a:pPr indent="0">
+              <a:buNone/>
+            </a:pPr>
+            <a:r>
+              <a:rPr b="0" lang="ja-JP" sz="1800" spc="-1" strike="noStrike">
+                <a:solidFill>
+                  <a:srgbClr val="000000"/>
+                </a:solidFill>
+                <a:latin typeface="Arial"/>
+              </a:rPr>
+              <a:t>クリックしてタイトルテキストを編集</a:t>
+            </a:r>
+            <a:endParaRPr b="0" lang="en-US" sz="1800" spc="-1" strike="noStrike">
+              <a:solidFill>
+                <a:srgbClr val="000000"/>
+              </a:solidFill>
+              <a:latin typeface="Arial"/>
+            </a:endParaRPr>
+          </a:p>
+        </p:txBody>
+      </p:sp>
+      <p:sp>
+        <p:nvSpPr>
+          <p:cNvPr id="33" name="PlaceHolder 2"/>
           <p:cNvSpPr>
             <a:spLocks noGrp="1"/>
           </p:cNvSpPr>
@@ -5353,7 +4202,7 @@
         <p:spPr>
           <a:xfrm>
             <a:off x="1143000" y="2057400"/>
-            <a:ext cx="4754520" cy="4023000"/>
+            <a:ext cx="4817160" cy="4037760"/>
           </a:xfrm>
           <a:prstGeom prst="rect">
             <a:avLst/>
@@ -5364,181 +4213,264 @@
           </a:ln>
         </p:spPr>
         <p:txBody>
-          <a:bodyPr lIns="91440" rIns="91440" tIns="45720" bIns="45720" anchor="t">
-            <a:noAutofit/>
+          <a:bodyPr lIns="0" rIns="0" tIns="0" bIns="0" anchor="t">
+            <a:normAutofit fontScale="92222"/>
           </a:bodyPr>
           <a:p>
-            <a:pPr marL="228600" indent="-182880" defTabSz="914400">
-              <a:lnSpc>
-                <a:spcPct val="90000"/>
-              </a:lnSpc>
+            <a:pPr marL="432000" indent="-324000">
               <a:spcBef>
-                <a:spcPts val="1400"/>
+                <a:spcPts val="1417"/>
               </a:spcBef>
               <a:buClr>
-                <a:srgbClr val="a6b727"/>
+                <a:srgbClr val="000000"/>
               </a:buClr>
-              <a:buSzPct val="80000"/>
-              <a:buFont typeface="Corbel"/>
-              <a:buChar char="•"/>
-            </a:pPr>
-            <a:r>
-              <a:rPr b="0" lang="en-US" sz="2200" spc="-1" strike="noStrike">
-                <a:solidFill>
-                  <a:schemeClr val="accent1"/>
-                </a:solidFill>
-                <a:latin typeface="Corbel"/>
-              </a:rPr>
-              <a:t>Click to edit Master text styles</a:t>
-            </a:r>
-            <a:endParaRPr b="0" lang="en-US" sz="2200" spc="-1" strike="noStrike">
-              <a:solidFill>
-                <a:schemeClr val="accent1"/>
-              </a:solidFill>
-              <a:latin typeface="Corbel"/>
-            </a:endParaRPr>
-          </a:p>
-          <a:p>
-            <a:pPr lvl="1" marL="457200" indent="-182880" defTabSz="914400">
-              <a:lnSpc>
-                <a:spcPct val="90000"/>
-              </a:lnSpc>
+              <a:buSzPct val="45000"/>
+              <a:buFont typeface="Wingdings" charset="2"/>
+              <a:buChar char=""/>
+            </a:pPr>
+            <a:r>
+              <a:rPr b="0" lang="ja-JP" sz="1800" spc="-1" strike="noStrike">
+                <a:solidFill>
+                  <a:srgbClr val="000000"/>
+                </a:solidFill>
+                <a:latin typeface="Arial"/>
+              </a:rPr>
+              <a:t>クリックしてアウトラインのテキストを編集</a:t>
+            </a:r>
+            <a:endParaRPr b="0" lang="en-US" sz="1800" spc="-1" strike="noStrike">
+              <a:solidFill>
+                <a:srgbClr val="000000"/>
+              </a:solidFill>
+              <a:latin typeface="Arial"/>
+            </a:endParaRPr>
+          </a:p>
+          <a:p>
+            <a:pPr lvl="1" marL="864000" indent="-324000">
               <a:spcBef>
-                <a:spcPts val="201"/>
+                <a:spcPts val="1134"/>
               </a:spcBef>
-              <a:spcAft>
-                <a:spcPts val="400"/>
-              </a:spcAft>
               <a:buClr>
-                <a:srgbClr val="a6b727"/>
+                <a:srgbClr val="000000"/>
               </a:buClr>
-              <a:buSzPct val="80000"/>
-              <a:buFont typeface="Corbel"/>
-              <a:buChar char="•"/>
-            </a:pPr>
-            <a:r>
-              <a:rPr b="0" lang="en-US" sz="2000" spc="-1" strike="noStrike">
-                <a:solidFill>
-                  <a:schemeClr val="accent1"/>
-                </a:solidFill>
-                <a:latin typeface="Corbel"/>
-              </a:rPr>
-              <a:t>Second level</a:t>
-            </a:r>
-            <a:endParaRPr b="0" lang="en-US" sz="2000" spc="-1" strike="noStrike">
-              <a:solidFill>
-                <a:schemeClr val="accent1"/>
-              </a:solidFill>
-              <a:latin typeface="Corbel"/>
-            </a:endParaRPr>
-          </a:p>
-          <a:p>
-            <a:pPr lvl="2" marL="731520" indent="-182880" defTabSz="914400">
-              <a:lnSpc>
-                <a:spcPct val="90000"/>
-              </a:lnSpc>
+              <a:buSzPct val="75000"/>
+              <a:buFont typeface="Symbol" charset="2"/>
+              <a:buChar char=""/>
+            </a:pPr>
+            <a:r>
+              <a:rPr b="0" lang="en-US" sz="1800" spc="-1" strike="noStrike">
+                <a:solidFill>
+                  <a:srgbClr val="000000"/>
+                </a:solidFill>
+                <a:latin typeface="Arial"/>
+              </a:rPr>
+              <a:t>2</a:t>
+            </a:r>
+            <a:r>
+              <a:rPr b="0" lang="ja-JP" sz="1800" spc="-1" strike="noStrike">
+                <a:solidFill>
+                  <a:srgbClr val="000000"/>
+                </a:solidFill>
+                <a:latin typeface="Arial"/>
+              </a:rPr>
+              <a:t>レベル目のアウトライン</a:t>
+            </a:r>
+            <a:endParaRPr b="0" lang="en-US" sz="1800" spc="-1" strike="noStrike">
+              <a:solidFill>
+                <a:srgbClr val="000000"/>
+              </a:solidFill>
+              <a:latin typeface="Arial"/>
+            </a:endParaRPr>
+          </a:p>
+          <a:p>
+            <a:pPr lvl="2" marL="1296000" indent="-288000">
               <a:spcBef>
-                <a:spcPts val="201"/>
+                <a:spcPts val="850"/>
               </a:spcBef>
-              <a:spcAft>
-                <a:spcPts val="400"/>
-              </a:spcAft>
               <a:buClr>
-                <a:srgbClr val="a6b727"/>
+                <a:srgbClr val="000000"/>
               </a:buClr>
-              <a:buSzPct val="80000"/>
-              <a:buFont typeface="Corbel"/>
-              <a:buChar char="•"/>
+              <a:buSzPct val="45000"/>
+              <a:buFont typeface="Wingdings" charset="2"/>
+              <a:buChar char=""/>
             </a:pPr>
             <a:r>
               <a:rPr b="0" lang="en-US" sz="1800" spc="-1" strike="noStrike">
                 <a:solidFill>
-                  <a:schemeClr val="accent1"/>
-                </a:solidFill>
-                <a:latin typeface="Corbel"/>
-              </a:rPr>
-              <a:t>Third level</a:t>
+                  <a:srgbClr val="000000"/>
+                </a:solidFill>
+                <a:latin typeface="Arial"/>
+              </a:rPr>
+              <a:t>3</a:t>
+            </a:r>
+            <a:r>
+              <a:rPr b="0" lang="ja-JP" sz="1800" spc="-1" strike="noStrike">
+                <a:solidFill>
+                  <a:srgbClr val="000000"/>
+                </a:solidFill>
+                <a:latin typeface="Arial"/>
+              </a:rPr>
+              <a:t>レベル目のアウトライン</a:t>
             </a:r>
             <a:endParaRPr b="0" lang="en-US" sz="1800" spc="-1" strike="noStrike">
               <a:solidFill>
-                <a:schemeClr val="accent1"/>
-              </a:solidFill>
-              <a:latin typeface="Corbel"/>
-            </a:endParaRPr>
-          </a:p>
-          <a:p>
-            <a:pPr lvl="3" marL="1005840" indent="-182880" defTabSz="914400">
-              <a:lnSpc>
-                <a:spcPct val="90000"/>
-              </a:lnSpc>
+                <a:srgbClr val="000000"/>
+              </a:solidFill>
+              <a:latin typeface="Arial"/>
+            </a:endParaRPr>
+          </a:p>
+          <a:p>
+            <a:pPr lvl="3" marL="1728000" indent="-216000">
               <a:spcBef>
-                <a:spcPts val="201"/>
+                <a:spcPts val="567"/>
               </a:spcBef>
-              <a:spcAft>
-                <a:spcPts val="400"/>
-              </a:spcAft>
               <a:buClr>
-                <a:srgbClr val="a6b727"/>
+                <a:srgbClr val="000000"/>
               </a:buClr>
-              <a:buSzPct val="80000"/>
-              <a:buFont typeface="Corbel"/>
-              <a:buChar char="•"/>
-            </a:pPr>
-            <a:r>
-              <a:rPr b="0" lang="en-US" sz="1600" spc="-1" strike="noStrike">
-                <a:solidFill>
-                  <a:schemeClr val="accent1"/>
-                </a:solidFill>
-                <a:latin typeface="Corbel"/>
-              </a:rPr>
-              <a:t>Fourth level</a:t>
-            </a:r>
-            <a:endParaRPr b="0" lang="en-US" sz="1600" spc="-1" strike="noStrike">
-              <a:solidFill>
-                <a:schemeClr val="accent1"/>
-              </a:solidFill>
-              <a:latin typeface="Corbel"/>
-            </a:endParaRPr>
-          </a:p>
-          <a:p>
-            <a:pPr lvl="4" marL="1280160" indent="-182880" defTabSz="914400">
-              <a:lnSpc>
-                <a:spcPct val="90000"/>
-              </a:lnSpc>
+              <a:buSzPct val="75000"/>
+              <a:buFont typeface="Symbol" charset="2"/>
+              <a:buChar char=""/>
+            </a:pPr>
+            <a:r>
+              <a:rPr b="0" lang="en-US" sz="1800" spc="-1" strike="noStrike">
+                <a:solidFill>
+                  <a:srgbClr val="000000"/>
+                </a:solidFill>
+                <a:latin typeface="Arial"/>
+              </a:rPr>
+              <a:t>4</a:t>
+            </a:r>
+            <a:r>
+              <a:rPr b="0" lang="ja-JP" sz="1800" spc="-1" strike="noStrike">
+                <a:solidFill>
+                  <a:srgbClr val="000000"/>
+                </a:solidFill>
+                <a:latin typeface="Arial"/>
+              </a:rPr>
+              <a:t>レベル目のアウトライン</a:t>
+            </a:r>
+            <a:endParaRPr b="0" lang="en-US" sz="1800" spc="-1" strike="noStrike">
+              <a:solidFill>
+                <a:srgbClr val="000000"/>
+              </a:solidFill>
+              <a:latin typeface="Arial"/>
+            </a:endParaRPr>
+          </a:p>
+          <a:p>
+            <a:pPr lvl="4" marL="2160000" indent="-216000">
               <a:spcBef>
-                <a:spcPts val="201"/>
+                <a:spcPts val="283"/>
               </a:spcBef>
-              <a:spcAft>
-                <a:spcPts val="400"/>
-              </a:spcAft>
               <a:buClr>
-                <a:srgbClr val="a6b727"/>
+                <a:srgbClr val="000000"/>
               </a:buClr>
-              <a:buSzPct val="80000"/>
-              <a:buFont typeface="Corbel"/>
-              <a:buChar char="•"/>
-            </a:pPr>
-            <a:r>
-              <a:rPr b="0" lang="en-US" sz="1600" spc="-1" strike="noStrike">
-                <a:solidFill>
-                  <a:schemeClr val="accent1"/>
-                </a:solidFill>
-                <a:latin typeface="Corbel"/>
-              </a:rPr>
-              <a:t>Fifth level</a:t>
-            </a:r>
-            <a:endParaRPr b="0" lang="en-US" sz="1600" spc="-1" strike="noStrike">
-              <a:solidFill>
-                <a:schemeClr val="accent1"/>
-              </a:solidFill>
-              <a:latin typeface="Corbel"/>
-            </a:endParaRPr>
-          </a:p>
-        </p:txBody>
-      </p:sp>
-      <p:sp>
-        <p:nvSpPr>
-          <p:cNvPr id="40" name="PlaceHolder 3"/>
+              <a:buSzPct val="45000"/>
+              <a:buFont typeface="Wingdings" charset="2"/>
+              <a:buChar char=""/>
+            </a:pPr>
+            <a:r>
+              <a:rPr b="0" lang="en-US" sz="1800" spc="-1" strike="noStrike">
+                <a:solidFill>
+                  <a:srgbClr val="000000"/>
+                </a:solidFill>
+                <a:latin typeface="Arial"/>
+              </a:rPr>
+              <a:t>5</a:t>
+            </a:r>
+            <a:r>
+              <a:rPr b="0" lang="ja-JP" sz="1800" spc="-1" strike="noStrike">
+                <a:solidFill>
+                  <a:srgbClr val="000000"/>
+                </a:solidFill>
+                <a:latin typeface="Arial"/>
+              </a:rPr>
+              <a:t>レベル目のアウトライン</a:t>
+            </a:r>
+            <a:endParaRPr b="0" lang="en-US" sz="1800" spc="-1" strike="noStrike">
+              <a:solidFill>
+                <a:srgbClr val="000000"/>
+              </a:solidFill>
+              <a:latin typeface="Arial"/>
+            </a:endParaRPr>
+          </a:p>
+          <a:p>
+            <a:pPr lvl="5" marL="2592000" indent="-216000">
+              <a:spcBef>
+                <a:spcPts val="283"/>
+              </a:spcBef>
+              <a:buClr>
+                <a:srgbClr val="000000"/>
+              </a:buClr>
+              <a:buSzPct val="45000"/>
+              <a:buFont typeface="Wingdings" charset="2"/>
+              <a:buChar char=""/>
+            </a:pPr>
+            <a:r>
+              <a:rPr b="0" lang="en-US" sz="1800" spc="-1" strike="noStrike">
+                <a:solidFill>
+                  <a:srgbClr val="000000"/>
+                </a:solidFill>
+                <a:latin typeface="Arial"/>
+              </a:rPr>
+              <a:t>6</a:t>
+            </a:r>
+            <a:r>
+              <a:rPr b="0" lang="ja-JP" sz="1800" spc="-1" strike="noStrike">
+                <a:solidFill>
+                  <a:srgbClr val="000000"/>
+                </a:solidFill>
+                <a:latin typeface="Arial"/>
+              </a:rPr>
+              <a:t>レベル目のアウトライン</a:t>
+            </a:r>
+            <a:endParaRPr b="0" lang="en-US" sz="1800" spc="-1" strike="noStrike">
+              <a:solidFill>
+                <a:srgbClr val="000000"/>
+              </a:solidFill>
+              <a:latin typeface="Arial"/>
+            </a:endParaRPr>
+          </a:p>
+          <a:p>
+            <a:pPr lvl="6" marL="3024000" indent="-216000">
+              <a:spcBef>
+                <a:spcPts val="283"/>
+              </a:spcBef>
+              <a:buClr>
+                <a:srgbClr val="000000"/>
+              </a:buClr>
+              <a:buSzPct val="45000"/>
+              <a:buFont typeface="Wingdings" charset="2"/>
+              <a:buChar char=""/>
+            </a:pPr>
+            <a:r>
+              <a:rPr b="0" lang="en-US" sz="1800" spc="-1" strike="noStrike">
+                <a:solidFill>
+                  <a:srgbClr val="000000"/>
+                </a:solidFill>
+                <a:latin typeface="Arial"/>
+              </a:rPr>
+              <a:t>7</a:t>
+            </a:r>
+            <a:r>
+              <a:rPr b="0" lang="ja-JP" sz="1800" spc="-1" strike="noStrike">
+                <a:solidFill>
+                  <a:srgbClr val="000000"/>
+                </a:solidFill>
+                <a:latin typeface="Arial"/>
+              </a:rPr>
+              <a:t>レベル目のアウトライン</a:t>
+            </a:r>
+            <a:endParaRPr b="0" lang="en-US" sz="1800" spc="-1" strike="noStrike">
+              <a:solidFill>
+                <a:srgbClr val="000000"/>
+              </a:solidFill>
+              <a:latin typeface="Arial"/>
+            </a:endParaRPr>
+          </a:p>
+        </p:txBody>
+      </p:sp>
+      <p:sp>
+        <p:nvSpPr>
+          <p:cNvPr id="34" name="PlaceHolder 3"/>
           <p:cNvSpPr>
             <a:spLocks noGrp="1"/>
           </p:cNvSpPr>
@@ -5548,8 +4480,8 @@
         </p:nvSpPr>
         <p:spPr>
           <a:xfrm>
-            <a:off x="6267600" y="2057400"/>
-            <a:ext cx="4754520" cy="4023000"/>
+            <a:off x="6201720" y="2057400"/>
+            <a:ext cx="4817160" cy="4037760"/>
           </a:xfrm>
           <a:prstGeom prst="rect">
             <a:avLst/>
@@ -5560,192 +4492,275 @@
           </a:ln>
         </p:spPr>
         <p:txBody>
-          <a:bodyPr lIns="91440" rIns="91440" tIns="45720" bIns="45720" anchor="t">
-            <a:noAutofit/>
+          <a:bodyPr lIns="0" rIns="0" tIns="0" bIns="0" anchor="t">
+            <a:normAutofit fontScale="92222"/>
           </a:bodyPr>
           <a:p>
-            <a:pPr marL="228600" indent="-182880" defTabSz="914400">
-              <a:lnSpc>
-                <a:spcPct val="90000"/>
-              </a:lnSpc>
+            <a:pPr marL="432000" indent="-324000">
               <a:spcBef>
-                <a:spcPts val="1400"/>
+                <a:spcPts val="1417"/>
               </a:spcBef>
               <a:buClr>
-                <a:srgbClr val="a6b727"/>
+                <a:srgbClr val="000000"/>
               </a:buClr>
-              <a:buSzPct val="80000"/>
-              <a:buFont typeface="Corbel"/>
-              <a:buChar char="•"/>
-            </a:pPr>
-            <a:r>
-              <a:rPr b="0" lang="en-US" sz="2200" spc="-1" strike="noStrike">
-                <a:solidFill>
-                  <a:schemeClr val="accent1"/>
-                </a:solidFill>
-                <a:latin typeface="Corbel"/>
-              </a:rPr>
-              <a:t>Click to edit Master text styles</a:t>
-            </a:r>
-            <a:endParaRPr b="0" lang="en-US" sz="2200" spc="-1" strike="noStrike">
-              <a:solidFill>
-                <a:schemeClr val="accent1"/>
-              </a:solidFill>
-              <a:latin typeface="Corbel"/>
-            </a:endParaRPr>
-          </a:p>
-          <a:p>
-            <a:pPr lvl="1" marL="457200" indent="-182880" defTabSz="914400">
-              <a:lnSpc>
-                <a:spcPct val="90000"/>
-              </a:lnSpc>
+              <a:buSzPct val="45000"/>
+              <a:buFont typeface="Wingdings" charset="2"/>
+              <a:buChar char=""/>
+            </a:pPr>
+            <a:r>
+              <a:rPr b="0" lang="ja-JP" sz="1800" spc="-1" strike="noStrike">
+                <a:solidFill>
+                  <a:srgbClr val="000000"/>
+                </a:solidFill>
+                <a:latin typeface="Arial"/>
+              </a:rPr>
+              <a:t>クリックしてアウトラインのテキストを編集</a:t>
+            </a:r>
+            <a:endParaRPr b="0" lang="en-US" sz="1800" spc="-1" strike="noStrike">
+              <a:solidFill>
+                <a:srgbClr val="000000"/>
+              </a:solidFill>
+              <a:latin typeface="Arial"/>
+            </a:endParaRPr>
+          </a:p>
+          <a:p>
+            <a:pPr lvl="1" marL="864000" indent="-324000">
               <a:spcBef>
-                <a:spcPts val="201"/>
+                <a:spcPts val="1134"/>
               </a:spcBef>
-              <a:spcAft>
-                <a:spcPts val="400"/>
-              </a:spcAft>
               <a:buClr>
-                <a:srgbClr val="a6b727"/>
+                <a:srgbClr val="000000"/>
               </a:buClr>
-              <a:buSzPct val="80000"/>
-              <a:buFont typeface="Corbel"/>
-              <a:buChar char="•"/>
-            </a:pPr>
-            <a:r>
-              <a:rPr b="0" lang="en-US" sz="2000" spc="-1" strike="noStrike">
-                <a:solidFill>
-                  <a:schemeClr val="accent1"/>
-                </a:solidFill>
-                <a:latin typeface="Corbel"/>
-              </a:rPr>
-              <a:t>Second level</a:t>
-            </a:r>
-            <a:endParaRPr b="0" lang="en-US" sz="2000" spc="-1" strike="noStrike">
-              <a:solidFill>
-                <a:schemeClr val="accent1"/>
-              </a:solidFill>
-              <a:latin typeface="Corbel"/>
-            </a:endParaRPr>
-          </a:p>
-          <a:p>
-            <a:pPr lvl="2" marL="731520" indent="-182880" defTabSz="914400">
-              <a:lnSpc>
-                <a:spcPct val="90000"/>
-              </a:lnSpc>
+              <a:buSzPct val="75000"/>
+              <a:buFont typeface="Symbol" charset="2"/>
+              <a:buChar char=""/>
+            </a:pPr>
+            <a:r>
+              <a:rPr b="0" lang="en-US" sz="1800" spc="-1" strike="noStrike">
+                <a:solidFill>
+                  <a:srgbClr val="000000"/>
+                </a:solidFill>
+                <a:latin typeface="Arial"/>
+              </a:rPr>
+              <a:t>2</a:t>
+            </a:r>
+            <a:r>
+              <a:rPr b="0" lang="ja-JP" sz="1800" spc="-1" strike="noStrike">
+                <a:solidFill>
+                  <a:srgbClr val="000000"/>
+                </a:solidFill>
+                <a:latin typeface="Arial"/>
+              </a:rPr>
+              <a:t>レベル目のアウトライン</a:t>
+            </a:r>
+            <a:endParaRPr b="0" lang="en-US" sz="1800" spc="-1" strike="noStrike">
+              <a:solidFill>
+                <a:srgbClr val="000000"/>
+              </a:solidFill>
+              <a:latin typeface="Arial"/>
+            </a:endParaRPr>
+          </a:p>
+          <a:p>
+            <a:pPr lvl="2" marL="1296000" indent="-288000">
               <a:spcBef>
-                <a:spcPts val="201"/>
+                <a:spcPts val="850"/>
               </a:spcBef>
-              <a:spcAft>
-                <a:spcPts val="400"/>
-              </a:spcAft>
               <a:buClr>
-                <a:srgbClr val="a6b727"/>
+                <a:srgbClr val="000000"/>
               </a:buClr>
-              <a:buSzPct val="80000"/>
-              <a:buFont typeface="Corbel"/>
-              <a:buChar char="•"/>
+              <a:buSzPct val="45000"/>
+              <a:buFont typeface="Wingdings" charset="2"/>
+              <a:buChar char=""/>
             </a:pPr>
             <a:r>
               <a:rPr b="0" lang="en-US" sz="1800" spc="-1" strike="noStrike">
                 <a:solidFill>
-                  <a:schemeClr val="accent1"/>
-                </a:solidFill>
-                <a:latin typeface="Corbel"/>
-              </a:rPr>
-              <a:t>Third level</a:t>
+                  <a:srgbClr val="000000"/>
+                </a:solidFill>
+                <a:latin typeface="Arial"/>
+              </a:rPr>
+              <a:t>3</a:t>
+            </a:r>
+            <a:r>
+              <a:rPr b="0" lang="ja-JP" sz="1800" spc="-1" strike="noStrike">
+                <a:solidFill>
+                  <a:srgbClr val="000000"/>
+                </a:solidFill>
+                <a:latin typeface="Arial"/>
+              </a:rPr>
+              <a:t>レベル目のアウトライン</a:t>
             </a:r>
             <a:endParaRPr b="0" lang="en-US" sz="1800" spc="-1" strike="noStrike">
               <a:solidFill>
-                <a:schemeClr val="accent1"/>
-              </a:solidFill>
-              <a:latin typeface="Corbel"/>
-            </a:endParaRPr>
-          </a:p>
-          <a:p>
-            <a:pPr lvl="3" marL="1005840" indent="-182880" defTabSz="914400">
-              <a:lnSpc>
-                <a:spcPct val="90000"/>
-              </a:lnSpc>
+                <a:srgbClr val="000000"/>
+              </a:solidFill>
+              <a:latin typeface="Arial"/>
+            </a:endParaRPr>
+          </a:p>
+          <a:p>
+            <a:pPr lvl="3" marL="1728000" indent="-216000">
               <a:spcBef>
-                <a:spcPts val="201"/>
+                <a:spcPts val="567"/>
               </a:spcBef>
-              <a:spcAft>
-                <a:spcPts val="400"/>
-              </a:spcAft>
               <a:buClr>
-                <a:srgbClr val="a6b727"/>
+                <a:srgbClr val="000000"/>
               </a:buClr>
-              <a:buSzPct val="80000"/>
-              <a:buFont typeface="Corbel"/>
-              <a:buChar char="•"/>
-            </a:pPr>
-            <a:r>
-              <a:rPr b="0" lang="en-US" sz="1600" spc="-1" strike="noStrike">
-                <a:solidFill>
-                  <a:schemeClr val="accent1"/>
-                </a:solidFill>
-                <a:latin typeface="Corbel"/>
-              </a:rPr>
-              <a:t>Fourth level</a:t>
-            </a:r>
-            <a:endParaRPr b="0" lang="en-US" sz="1600" spc="-1" strike="noStrike">
-              <a:solidFill>
-                <a:schemeClr val="accent1"/>
-              </a:solidFill>
-              <a:latin typeface="Corbel"/>
-            </a:endParaRPr>
-          </a:p>
-          <a:p>
-            <a:pPr lvl="4" marL="1280160" indent="-182880" defTabSz="914400">
-              <a:lnSpc>
-                <a:spcPct val="90000"/>
-              </a:lnSpc>
+              <a:buSzPct val="75000"/>
+              <a:buFont typeface="Symbol" charset="2"/>
+              <a:buChar char=""/>
+            </a:pPr>
+            <a:r>
+              <a:rPr b="0" lang="en-US" sz="1800" spc="-1" strike="noStrike">
+                <a:solidFill>
+                  <a:srgbClr val="000000"/>
+                </a:solidFill>
+                <a:latin typeface="Arial"/>
+              </a:rPr>
+              <a:t>4</a:t>
+            </a:r>
+            <a:r>
+              <a:rPr b="0" lang="ja-JP" sz="1800" spc="-1" strike="noStrike">
+                <a:solidFill>
+                  <a:srgbClr val="000000"/>
+                </a:solidFill>
+                <a:latin typeface="Arial"/>
+              </a:rPr>
+              <a:t>レベル目のアウトライン</a:t>
+            </a:r>
+            <a:endParaRPr b="0" lang="en-US" sz="1800" spc="-1" strike="noStrike">
+              <a:solidFill>
+                <a:srgbClr val="000000"/>
+              </a:solidFill>
+              <a:latin typeface="Arial"/>
+            </a:endParaRPr>
+          </a:p>
+          <a:p>
+            <a:pPr lvl="4" marL="2160000" indent="-216000">
               <a:spcBef>
-                <a:spcPts val="201"/>
+                <a:spcPts val="283"/>
               </a:spcBef>
-              <a:spcAft>
-                <a:spcPts val="400"/>
-              </a:spcAft>
               <a:buClr>
-                <a:srgbClr val="a6b727"/>
+                <a:srgbClr val="000000"/>
               </a:buClr>
-              <a:buSzPct val="80000"/>
-              <a:buFont typeface="Corbel"/>
-              <a:buChar char="•"/>
-            </a:pPr>
-            <a:r>
-              <a:rPr b="0" lang="en-US" sz="1600" spc="-1" strike="noStrike">
-                <a:solidFill>
-                  <a:schemeClr val="accent1"/>
-                </a:solidFill>
-                <a:latin typeface="Corbel"/>
-              </a:rPr>
-              <a:t>Fifth level</a:t>
-            </a:r>
-            <a:endParaRPr b="0" lang="en-US" sz="1600" spc="-1" strike="noStrike">
-              <a:solidFill>
-                <a:schemeClr val="accent1"/>
-              </a:solidFill>
-              <a:latin typeface="Corbel"/>
-            </a:endParaRPr>
-          </a:p>
-        </p:txBody>
-      </p:sp>
-      <p:sp>
-        <p:nvSpPr>
-          <p:cNvPr id="41" name="PlaceHolder 4"/>
+              <a:buSzPct val="45000"/>
+              <a:buFont typeface="Wingdings" charset="2"/>
+              <a:buChar char=""/>
+            </a:pPr>
+            <a:r>
+              <a:rPr b="0" lang="en-US" sz="1800" spc="-1" strike="noStrike">
+                <a:solidFill>
+                  <a:srgbClr val="000000"/>
+                </a:solidFill>
+                <a:latin typeface="Arial"/>
+              </a:rPr>
+              <a:t>5</a:t>
+            </a:r>
+            <a:r>
+              <a:rPr b="0" lang="ja-JP" sz="1800" spc="-1" strike="noStrike">
+                <a:solidFill>
+                  <a:srgbClr val="000000"/>
+                </a:solidFill>
+                <a:latin typeface="Arial"/>
+              </a:rPr>
+              <a:t>レベル目のアウトライン</a:t>
+            </a:r>
+            <a:endParaRPr b="0" lang="en-US" sz="1800" spc="-1" strike="noStrike">
+              <a:solidFill>
+                <a:srgbClr val="000000"/>
+              </a:solidFill>
+              <a:latin typeface="Arial"/>
+            </a:endParaRPr>
+          </a:p>
+          <a:p>
+            <a:pPr lvl="5" marL="2592000" indent="-216000">
+              <a:spcBef>
+                <a:spcPts val="283"/>
+              </a:spcBef>
+              <a:buClr>
+                <a:srgbClr val="000000"/>
+              </a:buClr>
+              <a:buSzPct val="45000"/>
+              <a:buFont typeface="Wingdings" charset="2"/>
+              <a:buChar char=""/>
+            </a:pPr>
+            <a:r>
+              <a:rPr b="0" lang="en-US" sz="1800" spc="-1" strike="noStrike">
+                <a:solidFill>
+                  <a:srgbClr val="000000"/>
+                </a:solidFill>
+                <a:latin typeface="Arial"/>
+              </a:rPr>
+              <a:t>6</a:t>
+            </a:r>
+            <a:r>
+              <a:rPr b="0" lang="ja-JP" sz="1800" spc="-1" strike="noStrike">
+                <a:solidFill>
+                  <a:srgbClr val="000000"/>
+                </a:solidFill>
+                <a:latin typeface="Arial"/>
+              </a:rPr>
+              <a:t>レベル目のアウトライン</a:t>
+            </a:r>
+            <a:endParaRPr b="0" lang="en-US" sz="1800" spc="-1" strike="noStrike">
+              <a:solidFill>
+                <a:srgbClr val="000000"/>
+              </a:solidFill>
+              <a:latin typeface="Arial"/>
+            </a:endParaRPr>
+          </a:p>
+          <a:p>
+            <a:pPr lvl="6" marL="3024000" indent="-216000">
+              <a:spcBef>
+                <a:spcPts val="283"/>
+              </a:spcBef>
+              <a:buClr>
+                <a:srgbClr val="000000"/>
+              </a:buClr>
+              <a:buSzPct val="45000"/>
+              <a:buFont typeface="Wingdings" charset="2"/>
+              <a:buChar char=""/>
+            </a:pPr>
+            <a:r>
+              <a:rPr b="0" lang="en-US" sz="1800" spc="-1" strike="noStrike">
+                <a:solidFill>
+                  <a:srgbClr val="000000"/>
+                </a:solidFill>
+                <a:latin typeface="Arial"/>
+              </a:rPr>
+              <a:t>7</a:t>
+            </a:r>
+            <a:r>
+              <a:rPr b="0" lang="ja-JP" sz="1800" spc="-1" strike="noStrike">
+                <a:solidFill>
+                  <a:srgbClr val="000000"/>
+                </a:solidFill>
+                <a:latin typeface="Arial"/>
+              </a:rPr>
+              <a:t>レベル目のアウトライン</a:t>
+            </a:r>
+            <a:endParaRPr b="0" lang="en-US" sz="1800" spc="-1" strike="noStrike">
+              <a:solidFill>
+                <a:srgbClr val="000000"/>
+              </a:solidFill>
+              <a:latin typeface="Arial"/>
+            </a:endParaRPr>
+          </a:p>
+        </p:txBody>
+      </p:sp>
+      <p:sp>
+        <p:nvSpPr>
+          <p:cNvPr id="35" name="PlaceHolder 4"/>
           <p:cNvSpPr>
             <a:spLocks noGrp="1"/>
           </p:cNvSpPr>
           <p:nvPr>
-            <p:ph type="dt" idx="16"/>
+            <p:ph type="ftr" idx="16"/>
           </p:nvPr>
         </p:nvSpPr>
         <p:spPr>
           <a:xfrm>
-            <a:off x="1143000" y="6223680"/>
-            <a:ext cx="2328840" cy="364680"/>
+            <a:off x="3949200" y="6223680"/>
+            <a:ext cx="4717080" cy="364320"/>
           </a:xfrm>
           <a:prstGeom prst="rect">
             <a:avLst/>
@@ -5760,36 +4775,42 @@
             <a:noAutofit/>
           </a:bodyPr>
           <a:lstStyle>
-            <a:lvl1pPr indent="0" defTabSz="914400">
+            <a:lvl1pPr indent="0" algn="ctr">
               <a:lnSpc>
                 <a:spcPct val="100000"/>
               </a:lnSpc>
               <a:buNone/>
-              <a:defRPr b="0" lang="en-US" sz="1200" spc="-1" strike="noStrike">
-                <a:solidFill>
-                  <a:schemeClr val="accent1"/>
-                </a:solidFill>
-                <a:latin typeface="Corbel"/>
+              <a:tabLst>
+                <a:tab algn="l" pos="0"/>
+              </a:tabLst>
+              <a:defRPr b="0" lang="en-US" sz="1400" spc="-1" strike="noStrike">
+                <a:solidFill>
+                  <a:srgbClr val="000000"/>
+                </a:solidFill>
+                <a:latin typeface="Noto Serif JP"/>
               </a:defRPr>
             </a:lvl1pPr>
           </a:lstStyle>
           <a:p>
-            <a:pPr indent="0" defTabSz="914400">
+            <a:pPr indent="0" algn="ctr">
               <a:lnSpc>
                 <a:spcPct val="100000"/>
               </a:lnSpc>
               <a:buNone/>
-            </a:pPr>
-            <a:r>
-              <a:rPr b="0" lang="en-US" sz="1200" spc="-1" strike="noStrike">
-                <a:solidFill>
-                  <a:schemeClr val="accent1"/>
-                </a:solidFill>
-                <a:latin typeface="Corbel"/>
-              </a:rPr>
-              <a:t>&lt;日付/時刻&gt;</a:t>
-            </a:r>
-            <a:endParaRPr b="0" lang="en-US" sz="1200" spc="-1" strike="noStrike">
+              <a:tabLst>
+                <a:tab algn="l" pos="0"/>
+              </a:tabLst>
+            </a:pPr>
+            <a:r>
+              <a:rPr b="0" lang="en-US" sz="1400" spc="-1" strike="noStrike">
+                <a:solidFill>
+                  <a:srgbClr val="000000"/>
+                </a:solidFill>
+                <a:latin typeface="Noto Serif JP"/>
+              </a:rPr>
+              <a:t>&lt;フッター&gt;</a:t>
+            </a:r>
+            <a:endParaRPr b="0" lang="en-US" sz="1400" spc="-1" strike="noStrike">
               <a:solidFill>
                 <a:srgbClr val="000000"/>
               </a:solidFill>
@@ -5800,18 +4821,18 @@
       </p:sp>
       <p:sp>
         <p:nvSpPr>
-          <p:cNvPr id="42" name="PlaceHolder 5"/>
+          <p:cNvPr id="36" name="PlaceHolder 5"/>
           <p:cNvSpPr>
             <a:spLocks noGrp="1"/>
           </p:cNvSpPr>
           <p:nvPr>
-            <p:ph type="ftr" idx="17"/>
+            <p:ph type="sldNum" idx="17"/>
           </p:nvPr>
         </p:nvSpPr>
         <p:spPr>
           <a:xfrm>
-            <a:off x="3949200" y="6223680"/>
-            <a:ext cx="4717440" cy="364680"/>
+            <a:off x="9329400" y="6223680"/>
+            <a:ext cx="1705320" cy="364320"/>
           </a:xfrm>
           <a:prstGeom prst="rect">
             <a:avLst/>
@@ -5826,30 +4847,42 @@
             <a:noAutofit/>
           </a:bodyPr>
           <a:lstStyle>
-            <a:lvl1pPr indent="0" algn="ctr">
-              <a:buNone/>
-              <a:defRPr b="0" lang="en-US" sz="1400" spc="-1" strike="noStrike">
-                <a:solidFill>
-                  <a:srgbClr val="000000"/>
-                </a:solidFill>
-                <a:latin typeface="Noto Serif JP"/>
+            <a:lvl1pPr indent="0" algn="r" defTabSz="914400">
+              <a:lnSpc>
+                <a:spcPct val="100000"/>
+              </a:lnSpc>
+              <a:buNone/>
+              <a:tabLst>
+                <a:tab algn="l" pos="0"/>
+              </a:tabLst>
+              <a:defRPr b="0" lang="en-US" sz="1200" spc="-1" strike="noStrike">
+                <a:solidFill>
+                  <a:schemeClr val="accent1"/>
+                </a:solidFill>
+                <a:latin typeface="Corbel"/>
               </a:defRPr>
             </a:lvl1pPr>
           </a:lstStyle>
           <a:p>
-            <a:pPr indent="0" algn="ctr">
-              <a:buNone/>
-            </a:pPr>
-            <a:r>
-              <a:rPr b="0" lang="en-US" sz="1400" spc="-1" strike="noStrike">
-                <a:solidFill>
-                  <a:srgbClr val="000000"/>
-                </a:solidFill>
-                <a:latin typeface="Noto Serif JP"/>
-              </a:rPr>
-              <a:t>&lt;フッター&gt;</a:t>
-            </a:r>
-            <a:endParaRPr b="0" lang="en-US" sz="1400" spc="-1" strike="noStrike">
+            <a:pPr indent="0" algn="r" defTabSz="914400">
+              <a:lnSpc>
+                <a:spcPct val="100000"/>
+              </a:lnSpc>
+              <a:buNone/>
+              <a:tabLst>
+                <a:tab algn="l" pos="0"/>
+              </a:tabLst>
+            </a:pPr>
+            <a:fld id="{50891BB0-0EE4-4C44-B756-97BE1BDCFEE7}" type="slidenum">
+              <a:rPr b="0" lang="en-US" sz="1200" spc="-1" strike="noStrike">
+                <a:solidFill>
+                  <a:schemeClr val="accent1"/>
+                </a:solidFill>
+                <a:latin typeface="Corbel"/>
+              </a:rPr>
+              <a:t>&lt;番号&gt;</a:t>
+            </a:fld>
+            <a:endParaRPr b="0" lang="en-US" sz="1200" spc="-1" strike="noStrike">
               <a:solidFill>
                 <a:srgbClr val="000000"/>
               </a:solidFill>
@@ -5860,18 +4893,18 @@
       </p:sp>
       <p:sp>
         <p:nvSpPr>
-          <p:cNvPr id="43" name="PlaceHolder 6"/>
+          <p:cNvPr id="37" name="PlaceHolder 6"/>
           <p:cNvSpPr>
             <a:spLocks noGrp="1"/>
           </p:cNvSpPr>
           <p:nvPr>
-            <p:ph type="sldNum" idx="18"/>
+            <p:ph type="dt" idx="18"/>
           </p:nvPr>
         </p:nvSpPr>
         <p:spPr>
           <a:xfrm>
-            <a:off x="9329400" y="6223680"/>
-            <a:ext cx="1705680" cy="364680"/>
+            <a:off x="1143000" y="6223680"/>
+            <a:ext cx="2328480" cy="364320"/>
           </a:xfrm>
           <a:prstGeom prst="rect">
             <a:avLst/>
@@ -5886,36 +4919,30 @@
             <a:noAutofit/>
           </a:bodyPr>
           <a:lstStyle>
-            <a:lvl1pPr indent="0" algn="r" defTabSz="914400">
-              <a:lnSpc>
-                <a:spcPct val="100000"/>
-              </a:lnSpc>
-              <a:buNone/>
-              <a:defRPr b="0" lang="en-US" sz="1200" spc="-1" strike="noStrike">
-                <a:solidFill>
-                  <a:schemeClr val="accent1"/>
-                </a:solidFill>
-                <a:latin typeface="Corbel"/>
+            <a:lvl1pPr indent="0">
+              <a:buNone/>
+              <a:defRPr b="0" lang="en-US" sz="1400" spc="-1" strike="noStrike">
+                <a:solidFill>
+                  <a:srgbClr val="000000"/>
+                </a:solidFill>
+                <a:latin typeface="Noto Serif JP"/>
               </a:defRPr>
             </a:lvl1pPr>
           </a:lstStyle>
           <a:p>
-            <a:pPr indent="0" algn="r" defTabSz="914400">
-              <a:lnSpc>
-                <a:spcPct val="100000"/>
-              </a:lnSpc>
-              <a:buNone/>
-            </a:pPr>
-            <a:fld id="{18A28A7A-29E4-4B40-8D11-201D007BA086}" type="slidenum">
-              <a:rPr b="0" lang="en-US" sz="1200" spc="-1" strike="noStrike">
-                <a:solidFill>
-                  <a:schemeClr val="accent1"/>
-                </a:solidFill>
-                <a:latin typeface="Corbel"/>
-              </a:rPr>
-              <a:t>&lt;番号&gt;</a:t>
-            </a:fld>
-            <a:endParaRPr b="0" lang="en-US" sz="1200" spc="-1" strike="noStrike">
+            <a:pPr indent="0">
+              <a:buNone/>
+            </a:pPr>
+            <a:r>
+              <a:rPr b="0" lang="en-US" sz="1400" spc="-1" strike="noStrike">
+                <a:solidFill>
+                  <a:srgbClr val="000000"/>
+                </a:solidFill>
+                <a:latin typeface="Noto Serif JP"/>
+              </a:rPr>
+              <a:t>&lt;日付/時刻&gt;</a:t>
+            </a:r>
+            <a:endParaRPr b="0" lang="en-US" sz="1400" spc="-1" strike="noStrike">
               <a:solidFill>
                 <a:srgbClr val="000000"/>
               </a:solidFill>
@@ -5959,14 +4986,14 @@
       </p:grpSpPr>
       <p:sp>
         <p:nvSpPr>
-          <p:cNvPr id="47" name="Rectangle 6"/>
+          <p:cNvPr id="41" name="Rectangle 6"/>
           <p:cNvSpPr/>
           <p:nvPr/>
         </p:nvSpPr>
         <p:spPr>
           <a:xfrm>
             <a:off x="231120" y="243720"/>
-            <a:ext cx="11724120" cy="6377400"/>
+            <a:ext cx="11723760" cy="6377040"/>
           </a:xfrm>
           <a:prstGeom prst="rect">
             <a:avLst/>
@@ -5997,6 +5024,11 @@
             <a:noAutofit/>
           </a:bodyPr>
           <a:p>
+            <a:pPr>
+              <a:lnSpc>
+                <a:spcPct val="100000"/>
+              </a:lnSpc>
+            </a:pPr>
             <a:endParaRPr b="0" lang="en-US" sz="1800" spc="-1" strike="noStrike">
               <a:solidFill>
                 <a:srgbClr val="000000"/>
@@ -6008,18 +5040,18 @@
       </p:sp>
       <p:sp>
         <p:nvSpPr>
-          <p:cNvPr id="48" name="PlaceHolder 1"/>
+          <p:cNvPr id="42" name="PlaceHolder 1"/>
           <p:cNvSpPr>
             <a:spLocks noGrp="1"/>
           </p:cNvSpPr>
           <p:nvPr>
-            <p:ph type="title"/>
+            <p:ph type="ftr" idx="19"/>
           </p:nvPr>
         </p:nvSpPr>
         <p:spPr>
           <a:xfrm>
-            <a:off x="1143000" y="609480"/>
-            <a:ext cx="9875160" cy="1356120"/>
+            <a:off x="3949200" y="6223680"/>
+            <a:ext cx="4717080" cy="364320"/>
           </a:xfrm>
           <a:prstGeom prst="rect">
             <a:avLst/>
@@ -6033,45 +5065,65 @@
           <a:bodyPr lIns="91440" rIns="91440" tIns="45720" bIns="45720" anchor="ctr">
             <a:noAutofit/>
           </a:bodyPr>
-          <a:p>
-            <a:pPr indent="0" defTabSz="914400">
+          <a:lstStyle>
+            <a:lvl1pPr indent="0" algn="ctr">
               <a:lnSpc>
-                <a:spcPct val="90000"/>
+                <a:spcPct val="100000"/>
               </a:lnSpc>
               <a:buNone/>
-            </a:pPr>
-            <a:r>
-              <a:rPr b="0" lang="en-US" sz="4400" spc="-1" strike="noStrike">
-                <a:solidFill>
-                  <a:schemeClr val="accent1"/>
-                </a:solidFill>
-                <a:latin typeface="Corbel"/>
-              </a:rPr>
-              <a:t>Click to edit Master title style</a:t>
-            </a:r>
-            <a:endParaRPr b="0" lang="en-US" sz="4400" spc="-1" strike="noStrike">
-              <a:solidFill>
-                <a:schemeClr val="dk1"/>
-              </a:solidFill>
-              <a:latin typeface="Corbel"/>
-            </a:endParaRPr>
-          </a:p>
-        </p:txBody>
-      </p:sp>
-      <p:sp>
-        <p:nvSpPr>
-          <p:cNvPr id="49" name="PlaceHolder 2"/>
+              <a:tabLst>
+                <a:tab algn="l" pos="0"/>
+              </a:tabLst>
+              <a:defRPr b="0" lang="en-US" sz="1400" spc="-1" strike="noStrike">
+                <a:solidFill>
+                  <a:srgbClr val="000000"/>
+                </a:solidFill>
+                <a:latin typeface="Noto Serif JP"/>
+              </a:defRPr>
+            </a:lvl1pPr>
+          </a:lstStyle>
+          <a:p>
+            <a:pPr indent="0" algn="ctr">
+              <a:lnSpc>
+                <a:spcPct val="100000"/>
+              </a:lnSpc>
+              <a:buNone/>
+              <a:tabLst>
+                <a:tab algn="l" pos="0"/>
+              </a:tabLst>
+            </a:pPr>
+            <a:r>
+              <a:rPr b="0" lang="en-US" sz="1400" spc="-1" strike="noStrike">
+                <a:solidFill>
+                  <a:srgbClr val="000000"/>
+                </a:solidFill>
+                <a:latin typeface="Noto Serif JP"/>
+              </a:rPr>
+              <a:t>&lt;フッター&gt;</a:t>
+            </a:r>
+            <a:endParaRPr b="0" lang="en-US" sz="1400" spc="-1" strike="noStrike">
+              <a:solidFill>
+                <a:srgbClr val="000000"/>
+              </a:solidFill>
+              <a:latin typeface="Noto Serif JP"/>
+            </a:endParaRPr>
+          </a:p>
+        </p:txBody>
+      </p:sp>
+      <p:sp>
+        <p:nvSpPr>
+          <p:cNvPr id="43" name="PlaceHolder 2"/>
           <p:cNvSpPr>
             <a:spLocks noGrp="1"/>
           </p:cNvSpPr>
           <p:nvPr>
-            <p:ph type="body"/>
+            <p:ph type="sldNum" idx="20"/>
           </p:nvPr>
         </p:nvSpPr>
         <p:spPr>
           <a:xfrm>
-            <a:off x="1143000" y="2001600"/>
-            <a:ext cx="4754520" cy="776880"/>
+            <a:off x="9329400" y="6223680"/>
+            <a:ext cx="1705320" cy="364320"/>
           </a:xfrm>
           <a:prstGeom prst="rect">
             <a:avLst/>
@@ -6085,48 +5137,65 @@
           <a:bodyPr lIns="91440" rIns="91440" tIns="45720" bIns="45720" anchor="ctr">
             <a:noAutofit/>
           </a:bodyPr>
-          <a:p>
-            <a:pPr indent="0" defTabSz="914400">
+          <a:lstStyle>
+            <a:lvl1pPr indent="0" algn="r" defTabSz="914400">
               <a:lnSpc>
-                <a:spcPct val="90000"/>
+                <a:spcPct val="100000"/>
               </a:lnSpc>
               <a:buNone/>
               <a:tabLst>
                 <a:tab algn="l" pos="0"/>
               </a:tabLst>
-            </a:pPr>
-            <a:r>
-              <a:rPr b="1" lang="en-US" sz="2400" spc="-1" strike="noStrike">
+              <a:defRPr b="0" lang="en-US" sz="1200" spc="-1" strike="noStrike">
                 <a:solidFill>
                   <a:schemeClr val="accent1"/>
                 </a:solidFill>
                 <a:latin typeface="Corbel"/>
-              </a:rPr>
-              <a:t>Click to edit Master text styles</a:t>
-            </a:r>
-            <a:endParaRPr b="0" lang="en-US" sz="2400" spc="-1" strike="noStrike">
-              <a:solidFill>
-                <a:schemeClr val="accent1"/>
-              </a:solidFill>
-              <a:latin typeface="Corbel"/>
-            </a:endParaRPr>
-          </a:p>
-        </p:txBody>
-      </p:sp>
-      <p:sp>
-        <p:nvSpPr>
-          <p:cNvPr id="50" name="PlaceHolder 3"/>
+              </a:defRPr>
+            </a:lvl1pPr>
+          </a:lstStyle>
+          <a:p>
+            <a:pPr indent="0" algn="r" defTabSz="914400">
+              <a:lnSpc>
+                <a:spcPct val="100000"/>
+              </a:lnSpc>
+              <a:buNone/>
+              <a:tabLst>
+                <a:tab algn="l" pos="0"/>
+              </a:tabLst>
+            </a:pPr>
+            <a:fld id="{71E994C3-07B7-4253-862D-E4F70739E0BF}" type="slidenum">
+              <a:rPr b="0" lang="en-US" sz="1200" spc="-1" strike="noStrike">
+                <a:solidFill>
+                  <a:schemeClr val="accent1"/>
+                </a:solidFill>
+                <a:latin typeface="Corbel"/>
+              </a:rPr>
+              <a:t>&lt;番号&gt;</a:t>
+            </a:fld>
+            <a:endParaRPr b="0" lang="en-US" sz="1200" spc="-1" strike="noStrike">
+              <a:solidFill>
+                <a:srgbClr val="000000"/>
+              </a:solidFill>
+              <a:latin typeface="Noto Serif JP"/>
+            </a:endParaRPr>
+          </a:p>
+        </p:txBody>
+      </p:sp>
+      <p:sp>
+        <p:nvSpPr>
+          <p:cNvPr id="44" name="PlaceHolder 3"/>
           <p:cNvSpPr>
             <a:spLocks noGrp="1"/>
           </p:cNvSpPr>
           <p:nvPr>
-            <p:ph type="body"/>
+            <p:ph type="dt" idx="21"/>
           </p:nvPr>
         </p:nvSpPr>
         <p:spPr>
           <a:xfrm>
-            <a:off x="1143000" y="2721600"/>
-            <a:ext cx="4754520" cy="3382920"/>
+            <a:off x="1143000" y="6223680"/>
+            <a:ext cx="2328480" cy="364320"/>
           </a:xfrm>
           <a:prstGeom prst="rect">
             <a:avLst/>
@@ -6137,524 +5206,11 @@
           </a:ln>
         </p:spPr>
         <p:txBody>
-          <a:bodyPr lIns="91440" rIns="91440" tIns="45720" bIns="45720" anchor="t">
-            <a:noAutofit/>
-          </a:bodyPr>
-          <a:p>
-            <a:pPr marL="228600" indent="-182880" defTabSz="914400">
-              <a:lnSpc>
-                <a:spcPct val="90000"/>
-              </a:lnSpc>
-              <a:spcBef>
-                <a:spcPts val="1400"/>
-              </a:spcBef>
-              <a:buClr>
-                <a:srgbClr val="a6b727"/>
-              </a:buClr>
-              <a:buSzPct val="80000"/>
-              <a:buFont typeface="Corbel"/>
-              <a:buChar char="•"/>
-            </a:pPr>
-            <a:r>
-              <a:rPr b="0" lang="en-US" sz="2200" spc="-1" strike="noStrike">
-                <a:solidFill>
-                  <a:schemeClr val="accent1"/>
-                </a:solidFill>
-                <a:latin typeface="Corbel"/>
-              </a:rPr>
-              <a:t>Click to edit Master text styles</a:t>
-            </a:r>
-            <a:endParaRPr b="0" lang="en-US" sz="2200" spc="-1" strike="noStrike">
-              <a:solidFill>
-                <a:schemeClr val="accent1"/>
-              </a:solidFill>
-              <a:latin typeface="Corbel"/>
-            </a:endParaRPr>
-          </a:p>
-          <a:p>
-            <a:pPr lvl="1" marL="457200" indent="-182880" defTabSz="914400">
-              <a:lnSpc>
-                <a:spcPct val="90000"/>
-              </a:lnSpc>
-              <a:spcBef>
-                <a:spcPts val="201"/>
-              </a:spcBef>
-              <a:spcAft>
-                <a:spcPts val="400"/>
-              </a:spcAft>
-              <a:buClr>
-                <a:srgbClr val="a6b727"/>
-              </a:buClr>
-              <a:buSzPct val="80000"/>
-              <a:buFont typeface="Corbel"/>
-              <a:buChar char="•"/>
-            </a:pPr>
-            <a:r>
-              <a:rPr b="0" lang="en-US" sz="2000" spc="-1" strike="noStrike">
-                <a:solidFill>
-                  <a:schemeClr val="accent1"/>
-                </a:solidFill>
-                <a:latin typeface="Corbel"/>
-              </a:rPr>
-              <a:t>Second level</a:t>
-            </a:r>
-            <a:endParaRPr b="0" lang="en-US" sz="2000" spc="-1" strike="noStrike">
-              <a:solidFill>
-                <a:schemeClr val="accent1"/>
-              </a:solidFill>
-              <a:latin typeface="Corbel"/>
-            </a:endParaRPr>
-          </a:p>
-          <a:p>
-            <a:pPr lvl="2" marL="731520" indent="-182880" defTabSz="914400">
-              <a:lnSpc>
-                <a:spcPct val="90000"/>
-              </a:lnSpc>
-              <a:spcBef>
-                <a:spcPts val="201"/>
-              </a:spcBef>
-              <a:spcAft>
-                <a:spcPts val="400"/>
-              </a:spcAft>
-              <a:buClr>
-                <a:srgbClr val="a6b727"/>
-              </a:buClr>
-              <a:buSzPct val="80000"/>
-              <a:buFont typeface="Corbel"/>
-              <a:buChar char="•"/>
-            </a:pPr>
-            <a:r>
-              <a:rPr b="0" lang="en-US" sz="1800" spc="-1" strike="noStrike">
-                <a:solidFill>
-                  <a:schemeClr val="accent1"/>
-                </a:solidFill>
-                <a:latin typeface="Corbel"/>
-              </a:rPr>
-              <a:t>Third level</a:t>
-            </a:r>
-            <a:endParaRPr b="0" lang="en-US" sz="1800" spc="-1" strike="noStrike">
-              <a:solidFill>
-                <a:schemeClr val="accent1"/>
-              </a:solidFill>
-              <a:latin typeface="Corbel"/>
-            </a:endParaRPr>
-          </a:p>
-          <a:p>
-            <a:pPr lvl="3" marL="1005840" indent="-182880" defTabSz="914400">
-              <a:lnSpc>
-                <a:spcPct val="90000"/>
-              </a:lnSpc>
-              <a:spcBef>
-                <a:spcPts val="201"/>
-              </a:spcBef>
-              <a:spcAft>
-                <a:spcPts val="400"/>
-              </a:spcAft>
-              <a:buClr>
-                <a:srgbClr val="a6b727"/>
-              </a:buClr>
-              <a:buSzPct val="80000"/>
-              <a:buFont typeface="Corbel"/>
-              <a:buChar char="•"/>
-            </a:pPr>
-            <a:r>
-              <a:rPr b="0" lang="en-US" sz="1600" spc="-1" strike="noStrike">
-                <a:solidFill>
-                  <a:schemeClr val="accent1"/>
-                </a:solidFill>
-                <a:latin typeface="Corbel"/>
-              </a:rPr>
-              <a:t>Fourth level</a:t>
-            </a:r>
-            <a:endParaRPr b="0" lang="en-US" sz="1600" spc="-1" strike="noStrike">
-              <a:solidFill>
-                <a:schemeClr val="accent1"/>
-              </a:solidFill>
-              <a:latin typeface="Corbel"/>
-            </a:endParaRPr>
-          </a:p>
-          <a:p>
-            <a:pPr lvl="4" marL="1280160" indent="-182880" defTabSz="914400">
-              <a:lnSpc>
-                <a:spcPct val="90000"/>
-              </a:lnSpc>
-              <a:spcBef>
-                <a:spcPts val="201"/>
-              </a:spcBef>
-              <a:spcAft>
-                <a:spcPts val="400"/>
-              </a:spcAft>
-              <a:buClr>
-                <a:srgbClr val="a6b727"/>
-              </a:buClr>
-              <a:buSzPct val="80000"/>
-              <a:buFont typeface="Corbel"/>
-              <a:buChar char="•"/>
-            </a:pPr>
-            <a:r>
-              <a:rPr b="0" lang="en-US" sz="1600" spc="-1" strike="noStrike">
-                <a:solidFill>
-                  <a:schemeClr val="accent1"/>
-                </a:solidFill>
-                <a:latin typeface="Corbel"/>
-              </a:rPr>
-              <a:t>Fifth level</a:t>
-            </a:r>
-            <a:endParaRPr b="0" lang="en-US" sz="1600" spc="-1" strike="noStrike">
-              <a:solidFill>
-                <a:schemeClr val="accent1"/>
-              </a:solidFill>
-              <a:latin typeface="Corbel"/>
-            </a:endParaRPr>
-          </a:p>
-        </p:txBody>
-      </p:sp>
-      <p:sp>
-        <p:nvSpPr>
-          <p:cNvPr id="51" name="PlaceHolder 4"/>
-          <p:cNvSpPr>
-            <a:spLocks noGrp="1"/>
-          </p:cNvSpPr>
-          <p:nvPr>
-            <p:ph type="body"/>
-          </p:nvPr>
-        </p:nvSpPr>
-        <p:spPr>
-          <a:xfrm>
-            <a:off x="6269040" y="1999080"/>
-            <a:ext cx="4754520" cy="776880"/>
-          </a:xfrm>
-          <a:prstGeom prst="rect">
-            <a:avLst/>
-          </a:prstGeom>
-          <a:noFill/>
-          <a:ln w="0">
-            <a:noFill/>
-          </a:ln>
-        </p:spPr>
-        <p:txBody>
-          <a:bodyPr lIns="91440" rIns="91440" tIns="45720" bIns="45720" anchor="ctr">
-            <a:noAutofit/>
-          </a:bodyPr>
-          <a:p>
-            <a:pPr indent="0" defTabSz="914400">
-              <a:lnSpc>
-                <a:spcPct val="90000"/>
-              </a:lnSpc>
-              <a:buNone/>
-              <a:tabLst>
-                <a:tab algn="l" pos="0"/>
-              </a:tabLst>
-            </a:pPr>
-            <a:r>
-              <a:rPr b="1" lang="en-US" sz="2400" spc="-1" strike="noStrike">
-                <a:solidFill>
-                  <a:schemeClr val="accent1"/>
-                </a:solidFill>
-                <a:latin typeface="Corbel"/>
-              </a:rPr>
-              <a:t>Click to edit Master text styles</a:t>
-            </a:r>
-            <a:endParaRPr b="0" lang="en-US" sz="2400" spc="-1" strike="noStrike">
-              <a:solidFill>
-                <a:schemeClr val="accent1"/>
-              </a:solidFill>
-              <a:latin typeface="Corbel"/>
-            </a:endParaRPr>
-          </a:p>
-        </p:txBody>
-      </p:sp>
-      <p:sp>
-        <p:nvSpPr>
-          <p:cNvPr id="52" name="PlaceHolder 5"/>
-          <p:cNvSpPr>
-            <a:spLocks noGrp="1"/>
-          </p:cNvSpPr>
-          <p:nvPr>
-            <p:ph type="body"/>
-          </p:nvPr>
-        </p:nvSpPr>
-        <p:spPr>
-          <a:xfrm>
-            <a:off x="6269040" y="2719440"/>
-            <a:ext cx="4754520" cy="3382920"/>
-          </a:xfrm>
-          <a:prstGeom prst="rect">
-            <a:avLst/>
-          </a:prstGeom>
-          <a:noFill/>
-          <a:ln w="0">
-            <a:noFill/>
-          </a:ln>
-        </p:spPr>
-        <p:txBody>
-          <a:bodyPr lIns="91440" rIns="91440" tIns="45720" bIns="45720" anchor="t">
-            <a:noAutofit/>
-          </a:bodyPr>
-          <a:p>
-            <a:pPr marL="228600" indent="-182880" defTabSz="914400">
-              <a:lnSpc>
-                <a:spcPct val="90000"/>
-              </a:lnSpc>
-              <a:spcBef>
-                <a:spcPts val="1400"/>
-              </a:spcBef>
-              <a:buClr>
-                <a:srgbClr val="a6b727"/>
-              </a:buClr>
-              <a:buSzPct val="80000"/>
-              <a:buFont typeface="Corbel"/>
-              <a:buChar char="•"/>
-            </a:pPr>
-            <a:r>
-              <a:rPr b="0" lang="en-US" sz="2200" spc="-1" strike="noStrike">
-                <a:solidFill>
-                  <a:schemeClr val="accent1"/>
-                </a:solidFill>
-                <a:latin typeface="Corbel"/>
-              </a:rPr>
-              <a:t>Click to edit Master text styles</a:t>
-            </a:r>
-            <a:endParaRPr b="0" lang="en-US" sz="2200" spc="-1" strike="noStrike">
-              <a:solidFill>
-                <a:schemeClr val="accent1"/>
-              </a:solidFill>
-              <a:latin typeface="Corbel"/>
-            </a:endParaRPr>
-          </a:p>
-          <a:p>
-            <a:pPr lvl="1" marL="457200" indent="-182880" defTabSz="914400">
-              <a:lnSpc>
-                <a:spcPct val="90000"/>
-              </a:lnSpc>
-              <a:spcBef>
-                <a:spcPts val="201"/>
-              </a:spcBef>
-              <a:spcAft>
-                <a:spcPts val="400"/>
-              </a:spcAft>
-              <a:buClr>
-                <a:srgbClr val="a6b727"/>
-              </a:buClr>
-              <a:buSzPct val="80000"/>
-              <a:buFont typeface="Corbel"/>
-              <a:buChar char="•"/>
-            </a:pPr>
-            <a:r>
-              <a:rPr b="0" lang="en-US" sz="2000" spc="-1" strike="noStrike">
-                <a:solidFill>
-                  <a:schemeClr val="accent1"/>
-                </a:solidFill>
-                <a:latin typeface="Corbel"/>
-              </a:rPr>
-              <a:t>Second level</a:t>
-            </a:r>
-            <a:endParaRPr b="0" lang="en-US" sz="2000" spc="-1" strike="noStrike">
-              <a:solidFill>
-                <a:schemeClr val="accent1"/>
-              </a:solidFill>
-              <a:latin typeface="Corbel"/>
-            </a:endParaRPr>
-          </a:p>
-          <a:p>
-            <a:pPr lvl="2" marL="731520" indent="-182880" defTabSz="914400">
-              <a:lnSpc>
-                <a:spcPct val="90000"/>
-              </a:lnSpc>
-              <a:spcBef>
-                <a:spcPts val="201"/>
-              </a:spcBef>
-              <a:spcAft>
-                <a:spcPts val="400"/>
-              </a:spcAft>
-              <a:buClr>
-                <a:srgbClr val="a6b727"/>
-              </a:buClr>
-              <a:buSzPct val="80000"/>
-              <a:buFont typeface="Corbel"/>
-              <a:buChar char="•"/>
-            </a:pPr>
-            <a:r>
-              <a:rPr b="0" lang="en-US" sz="1800" spc="-1" strike="noStrike">
-                <a:solidFill>
-                  <a:schemeClr val="accent1"/>
-                </a:solidFill>
-                <a:latin typeface="Corbel"/>
-              </a:rPr>
-              <a:t>Third level</a:t>
-            </a:r>
-            <a:endParaRPr b="0" lang="en-US" sz="1800" spc="-1" strike="noStrike">
-              <a:solidFill>
-                <a:schemeClr val="accent1"/>
-              </a:solidFill>
-              <a:latin typeface="Corbel"/>
-            </a:endParaRPr>
-          </a:p>
-          <a:p>
-            <a:pPr lvl="3" marL="1005840" indent="-182880" defTabSz="914400">
-              <a:lnSpc>
-                <a:spcPct val="90000"/>
-              </a:lnSpc>
-              <a:spcBef>
-                <a:spcPts val="201"/>
-              </a:spcBef>
-              <a:spcAft>
-                <a:spcPts val="400"/>
-              </a:spcAft>
-              <a:buClr>
-                <a:srgbClr val="a6b727"/>
-              </a:buClr>
-              <a:buSzPct val="80000"/>
-              <a:buFont typeface="Corbel"/>
-              <a:buChar char="•"/>
-            </a:pPr>
-            <a:r>
-              <a:rPr b="0" lang="en-US" sz="1600" spc="-1" strike="noStrike">
-                <a:solidFill>
-                  <a:schemeClr val="accent1"/>
-                </a:solidFill>
-                <a:latin typeface="Corbel"/>
-              </a:rPr>
-              <a:t>Fourth level</a:t>
-            </a:r>
-            <a:endParaRPr b="0" lang="en-US" sz="1600" spc="-1" strike="noStrike">
-              <a:solidFill>
-                <a:schemeClr val="accent1"/>
-              </a:solidFill>
-              <a:latin typeface="Corbel"/>
-            </a:endParaRPr>
-          </a:p>
-          <a:p>
-            <a:pPr lvl="4" marL="1280160" indent="-182880" defTabSz="914400">
-              <a:lnSpc>
-                <a:spcPct val="90000"/>
-              </a:lnSpc>
-              <a:spcBef>
-                <a:spcPts val="201"/>
-              </a:spcBef>
-              <a:spcAft>
-                <a:spcPts val="400"/>
-              </a:spcAft>
-              <a:buClr>
-                <a:srgbClr val="a6b727"/>
-              </a:buClr>
-              <a:buSzPct val="80000"/>
-              <a:buFont typeface="Corbel"/>
-              <a:buChar char="•"/>
-            </a:pPr>
-            <a:r>
-              <a:rPr b="0" lang="en-US" sz="1600" spc="-1" strike="noStrike">
-                <a:solidFill>
-                  <a:schemeClr val="accent1"/>
-                </a:solidFill>
-                <a:latin typeface="Corbel"/>
-              </a:rPr>
-              <a:t>Fifth level</a:t>
-            </a:r>
-            <a:endParaRPr b="0" lang="en-US" sz="1600" spc="-1" strike="noStrike">
-              <a:solidFill>
-                <a:schemeClr val="accent1"/>
-              </a:solidFill>
-              <a:latin typeface="Corbel"/>
-            </a:endParaRPr>
-          </a:p>
-        </p:txBody>
-      </p:sp>
-      <p:sp>
-        <p:nvSpPr>
-          <p:cNvPr id="53" name="PlaceHolder 6"/>
-          <p:cNvSpPr>
-            <a:spLocks noGrp="1"/>
-          </p:cNvSpPr>
-          <p:nvPr>
-            <p:ph type="dt" idx="19"/>
-          </p:nvPr>
-        </p:nvSpPr>
-        <p:spPr>
-          <a:xfrm>
-            <a:off x="1143000" y="6223680"/>
-            <a:ext cx="2328840" cy="364680"/>
-          </a:xfrm>
-          <a:prstGeom prst="rect">
-            <a:avLst/>
-          </a:prstGeom>
-          <a:noFill/>
-          <a:ln w="0">
-            <a:noFill/>
-          </a:ln>
-        </p:spPr>
-        <p:txBody>
           <a:bodyPr lIns="91440" rIns="91440" tIns="45720" bIns="45720" anchor="ctr">
             <a:noAutofit/>
           </a:bodyPr>
           <a:lstStyle>
-            <a:lvl1pPr indent="0" defTabSz="914400">
-              <a:lnSpc>
-                <a:spcPct val="100000"/>
-              </a:lnSpc>
-              <a:buNone/>
-              <a:defRPr b="0" lang="en-US" sz="1200" spc="-1" strike="noStrike">
-                <a:solidFill>
-                  <a:schemeClr val="accent1"/>
-                </a:solidFill>
-                <a:latin typeface="Corbel"/>
-              </a:defRPr>
-            </a:lvl1pPr>
-          </a:lstStyle>
-          <a:p>
-            <a:pPr indent="0" defTabSz="914400">
-              <a:lnSpc>
-                <a:spcPct val="100000"/>
-              </a:lnSpc>
-              <a:buNone/>
-            </a:pPr>
-            <a:r>
-              <a:rPr b="0" lang="en-US" sz="1200" spc="-1" strike="noStrike">
-                <a:solidFill>
-                  <a:schemeClr val="accent1"/>
-                </a:solidFill>
-                <a:latin typeface="Corbel"/>
-              </a:rPr>
-              <a:t>&lt;日付/時刻&gt;</a:t>
-            </a:r>
-            <a:endParaRPr b="0" lang="en-US" sz="1200" spc="-1" strike="noStrike">
-              <a:solidFill>
-                <a:srgbClr val="000000"/>
-              </a:solidFill>
-              <a:latin typeface="Noto Serif JP"/>
-            </a:endParaRPr>
-          </a:p>
-        </p:txBody>
-      </p:sp>
-      <p:sp>
-        <p:nvSpPr>
-          <p:cNvPr id="54" name="PlaceHolder 7"/>
-          <p:cNvSpPr>
-            <a:spLocks noGrp="1"/>
-          </p:cNvSpPr>
-          <p:nvPr>
-            <p:ph type="ftr" idx="20"/>
-          </p:nvPr>
-        </p:nvSpPr>
-        <p:spPr>
-          <a:xfrm>
-            <a:off x="3949200" y="6223680"/>
-            <a:ext cx="4717440" cy="364680"/>
-          </a:xfrm>
-          <a:prstGeom prst="rect">
-            <a:avLst/>
-          </a:prstGeom>
-          <a:noFill/>
-          <a:ln w="0">
-            <a:noFill/>
-          </a:ln>
-        </p:spPr>
-        <p:txBody>
-          <a:bodyPr lIns="91440" rIns="91440" tIns="45720" bIns="45720" anchor="ctr">
-            <a:noAutofit/>
-          </a:bodyPr>
-          <a:lstStyle>
-            <a:lvl1pPr indent="0" algn="ctr">
+            <a:lvl1pPr indent="0">
               <a:buNone/>
               <a:defRPr b="0" lang="en-US" sz="1400" spc="-1" strike="noStrike">
                 <a:solidFill>
@@ -6665,7 +5221,7 @@
             </a:lvl1pPr>
           </a:lstStyle>
           <a:p>
-            <a:pPr indent="0" algn="ctr">
+            <a:pPr indent="0">
               <a:buNone/>
             </a:pPr>
             <a:r>
@@ -6675,75 +5231,9 @@
                 </a:solidFill>
                 <a:latin typeface="Noto Serif JP"/>
               </a:rPr>
-              <a:t>&lt;フッター&gt;</a:t>
+              <a:t>&lt;日付/時刻&gt;</a:t>
             </a:r>
             <a:endParaRPr b="0" lang="en-US" sz="1400" spc="-1" strike="noStrike">
-              <a:solidFill>
-                <a:srgbClr val="000000"/>
-              </a:solidFill>
-              <a:latin typeface="Noto Serif JP"/>
-            </a:endParaRPr>
-          </a:p>
-        </p:txBody>
-      </p:sp>
-      <p:sp>
-        <p:nvSpPr>
-          <p:cNvPr id="55" name="PlaceHolder 8"/>
-          <p:cNvSpPr>
-            <a:spLocks noGrp="1"/>
-          </p:cNvSpPr>
-          <p:nvPr>
-            <p:ph type="sldNum" idx="21"/>
-          </p:nvPr>
-        </p:nvSpPr>
-        <p:spPr>
-          <a:xfrm>
-            <a:off x="9329400" y="6223680"/>
-            <a:ext cx="1705680" cy="364680"/>
-          </a:xfrm>
-          <a:prstGeom prst="rect">
-            <a:avLst/>
-          </a:prstGeom>
-          <a:noFill/>
-          <a:ln w="0">
-            <a:noFill/>
-          </a:ln>
-        </p:spPr>
-        <p:txBody>
-          <a:bodyPr lIns="91440" rIns="91440" tIns="45720" bIns="45720" anchor="ctr">
-            <a:noAutofit/>
-          </a:bodyPr>
-          <a:lstStyle>
-            <a:lvl1pPr indent="0" algn="r" defTabSz="914400">
-              <a:lnSpc>
-                <a:spcPct val="100000"/>
-              </a:lnSpc>
-              <a:buNone/>
-              <a:defRPr b="0" lang="en-US" sz="1200" spc="-1" strike="noStrike">
-                <a:solidFill>
-                  <a:schemeClr val="accent1"/>
-                </a:solidFill>
-                <a:latin typeface="Corbel"/>
-              </a:defRPr>
-            </a:lvl1pPr>
-          </a:lstStyle>
-          <a:p>
-            <a:pPr indent="0" algn="r" defTabSz="914400">
-              <a:lnSpc>
-                <a:spcPct val="100000"/>
-              </a:lnSpc>
-              <a:buNone/>
-            </a:pPr>
-            <a:fld id="{076BE336-2B0D-451C-9125-EBE37075406D}" type="slidenum">
-              <a:rPr b="0" lang="en-US" sz="1200" spc="-1" strike="noStrike">
-                <a:solidFill>
-                  <a:schemeClr val="accent1"/>
-                </a:solidFill>
-                <a:latin typeface="Corbel"/>
-              </a:rPr>
-              <a:t>&lt;番号&gt;</a:t>
-            </a:fld>
-            <a:endParaRPr b="0" lang="en-US" sz="1200" spc="-1" strike="noStrike">
               <a:solidFill>
                 <a:srgbClr val="000000"/>
               </a:solidFill>
@@ -6787,14 +5277,14 @@
       </p:grpSpPr>
       <p:sp>
         <p:nvSpPr>
-          <p:cNvPr id="56" name="Rectangle 6"/>
+          <p:cNvPr id="45" name="Rectangle 6"/>
           <p:cNvSpPr/>
           <p:nvPr/>
         </p:nvSpPr>
         <p:spPr>
           <a:xfrm>
             <a:off x="231120" y="243720"/>
-            <a:ext cx="11724120" cy="6377400"/>
+            <a:ext cx="11723760" cy="6377040"/>
           </a:xfrm>
           <a:prstGeom prst="rect">
             <a:avLst/>
@@ -6825,6 +5315,11 @@
             <a:noAutofit/>
           </a:bodyPr>
           <a:p>
+            <a:pPr>
+              <a:lnSpc>
+                <a:spcPct val="100000"/>
+              </a:lnSpc>
+            </a:pPr>
             <a:endParaRPr b="0" lang="en-US" sz="1800" spc="-1" strike="noStrike">
               <a:solidFill>
                 <a:srgbClr val="000000"/>
@@ -6836,7 +5331,7 @@
       </p:sp>
       <p:sp>
         <p:nvSpPr>
-          <p:cNvPr id="57" name="PlaceHolder 1"/>
+          <p:cNvPr id="46" name="PlaceHolder 1"/>
           <p:cNvSpPr>
             <a:spLocks noGrp="1"/>
           </p:cNvSpPr>
@@ -6847,7 +5342,7 @@
         <p:spPr>
           <a:xfrm>
             <a:off x="1143000" y="609480"/>
-            <a:ext cx="9875160" cy="1356120"/>
+            <a:ext cx="9874800" cy="1355760"/>
           </a:xfrm>
           <a:prstGeom prst="rect">
             <a:avLst/>
@@ -6858,48 +5353,45 @@
           </a:ln>
         </p:spPr>
         <p:txBody>
-          <a:bodyPr lIns="91440" rIns="91440" tIns="45720" bIns="45720" anchor="ctr">
+          <a:bodyPr lIns="0" rIns="0" tIns="0" bIns="0" anchor="ctr">
             <a:noAutofit/>
           </a:bodyPr>
           <a:p>
-            <a:pPr indent="0" defTabSz="914400">
-              <a:lnSpc>
-                <a:spcPct val="90000"/>
-              </a:lnSpc>
-              <a:buNone/>
-            </a:pPr>
-            <a:r>
-              <a:rPr b="0" lang="en-US" sz="4400" spc="-1" strike="noStrike">
-                <a:solidFill>
-                  <a:schemeClr val="accent1"/>
-                </a:solidFill>
-                <a:latin typeface="Corbel"/>
-              </a:rPr>
-              <a:t>Click to edit Master title style</a:t>
-            </a:r>
-            <a:endParaRPr b="0" lang="en-US" sz="4400" spc="-1" strike="noStrike">
-              <a:solidFill>
-                <a:schemeClr val="dk1"/>
-              </a:solidFill>
-              <a:latin typeface="Corbel"/>
-            </a:endParaRPr>
-          </a:p>
-        </p:txBody>
-      </p:sp>
-      <p:sp>
-        <p:nvSpPr>
-          <p:cNvPr id="58" name="PlaceHolder 2"/>
+            <a:pPr indent="0">
+              <a:buNone/>
+            </a:pPr>
+            <a:r>
+              <a:rPr b="0" lang="ja-JP" sz="1800" spc="-1" strike="noStrike">
+                <a:solidFill>
+                  <a:srgbClr val="000000"/>
+                </a:solidFill>
+                <a:latin typeface="Arial"/>
+              </a:rPr>
+              <a:t>クリックしてタイトルテキストを編集</a:t>
+            </a:r>
+            <a:endParaRPr b="0" lang="en-US" sz="1800" spc="-1" strike="noStrike">
+              <a:solidFill>
+                <a:srgbClr val="000000"/>
+              </a:solidFill>
+              <a:latin typeface="Arial"/>
+            </a:endParaRPr>
+          </a:p>
+        </p:txBody>
+      </p:sp>
+      <p:sp>
+        <p:nvSpPr>
+          <p:cNvPr id="47" name="PlaceHolder 2"/>
           <p:cNvSpPr>
             <a:spLocks noGrp="1"/>
           </p:cNvSpPr>
           <p:nvPr>
-            <p:ph type="dt" idx="22"/>
+            <p:ph type="ftr" idx="22"/>
           </p:nvPr>
         </p:nvSpPr>
         <p:spPr>
           <a:xfrm>
-            <a:off x="1143000" y="6223680"/>
-            <a:ext cx="2328840" cy="364680"/>
+            <a:off x="3949200" y="6223680"/>
+            <a:ext cx="4717080" cy="364320"/>
           </a:xfrm>
           <a:prstGeom prst="rect">
             <a:avLst/>
@@ -6914,36 +5406,42 @@
             <a:noAutofit/>
           </a:bodyPr>
           <a:lstStyle>
-            <a:lvl1pPr indent="0" defTabSz="914400">
+            <a:lvl1pPr indent="0" algn="ctr">
               <a:lnSpc>
                 <a:spcPct val="100000"/>
               </a:lnSpc>
               <a:buNone/>
-              <a:defRPr b="0" lang="en-US" sz="1200" spc="-1" strike="noStrike">
-                <a:solidFill>
-                  <a:schemeClr val="accent1"/>
-                </a:solidFill>
-                <a:latin typeface="Corbel"/>
+              <a:tabLst>
+                <a:tab algn="l" pos="0"/>
+              </a:tabLst>
+              <a:defRPr b="0" lang="en-US" sz="1400" spc="-1" strike="noStrike">
+                <a:solidFill>
+                  <a:srgbClr val="000000"/>
+                </a:solidFill>
+                <a:latin typeface="Noto Serif JP"/>
               </a:defRPr>
             </a:lvl1pPr>
           </a:lstStyle>
           <a:p>
-            <a:pPr indent="0" defTabSz="914400">
+            <a:pPr indent="0" algn="ctr">
               <a:lnSpc>
                 <a:spcPct val="100000"/>
               </a:lnSpc>
               <a:buNone/>
-            </a:pPr>
-            <a:r>
-              <a:rPr b="0" lang="en-US" sz="1200" spc="-1" strike="noStrike">
-                <a:solidFill>
-                  <a:schemeClr val="accent1"/>
-                </a:solidFill>
-                <a:latin typeface="Corbel"/>
-              </a:rPr>
-              <a:t>&lt;日付/時刻&gt;</a:t>
-            </a:r>
-            <a:endParaRPr b="0" lang="en-US" sz="1200" spc="-1" strike="noStrike">
+              <a:tabLst>
+                <a:tab algn="l" pos="0"/>
+              </a:tabLst>
+            </a:pPr>
+            <a:r>
+              <a:rPr b="0" lang="en-US" sz="1400" spc="-1" strike="noStrike">
+                <a:solidFill>
+                  <a:srgbClr val="000000"/>
+                </a:solidFill>
+                <a:latin typeface="Noto Serif JP"/>
+              </a:rPr>
+              <a:t>&lt;フッター&gt;</a:t>
+            </a:r>
+            <a:endParaRPr b="0" lang="en-US" sz="1400" spc="-1" strike="noStrike">
               <a:solidFill>
                 <a:srgbClr val="000000"/>
               </a:solidFill>
@@ -6954,18 +5452,18 @@
       </p:sp>
       <p:sp>
         <p:nvSpPr>
-          <p:cNvPr id="59" name="PlaceHolder 3"/>
+          <p:cNvPr id="48" name="PlaceHolder 3"/>
           <p:cNvSpPr>
             <a:spLocks noGrp="1"/>
           </p:cNvSpPr>
           <p:nvPr>
-            <p:ph type="ftr" idx="23"/>
+            <p:ph type="sldNum" idx="23"/>
           </p:nvPr>
         </p:nvSpPr>
         <p:spPr>
           <a:xfrm>
-            <a:off x="3949200" y="6223680"/>
-            <a:ext cx="4717440" cy="364680"/>
+            <a:off x="9329400" y="6223680"/>
+            <a:ext cx="1705320" cy="364320"/>
           </a:xfrm>
           <a:prstGeom prst="rect">
             <a:avLst/>
@@ -6980,30 +5478,42 @@
             <a:noAutofit/>
           </a:bodyPr>
           <a:lstStyle>
-            <a:lvl1pPr indent="0" algn="ctr">
-              <a:buNone/>
-              <a:defRPr b="0" lang="en-US" sz="1400" spc="-1" strike="noStrike">
-                <a:solidFill>
-                  <a:srgbClr val="000000"/>
-                </a:solidFill>
-                <a:latin typeface="Noto Serif JP"/>
+            <a:lvl1pPr indent="0" algn="r" defTabSz="914400">
+              <a:lnSpc>
+                <a:spcPct val="100000"/>
+              </a:lnSpc>
+              <a:buNone/>
+              <a:tabLst>
+                <a:tab algn="l" pos="0"/>
+              </a:tabLst>
+              <a:defRPr b="0" lang="en-US" sz="1200" spc="-1" strike="noStrike">
+                <a:solidFill>
+                  <a:schemeClr val="accent1"/>
+                </a:solidFill>
+                <a:latin typeface="Corbel"/>
               </a:defRPr>
             </a:lvl1pPr>
           </a:lstStyle>
           <a:p>
-            <a:pPr indent="0" algn="ctr">
-              <a:buNone/>
-            </a:pPr>
-            <a:r>
-              <a:rPr b="0" lang="en-US" sz="1400" spc="-1" strike="noStrike">
-                <a:solidFill>
-                  <a:srgbClr val="000000"/>
-                </a:solidFill>
-                <a:latin typeface="Noto Serif JP"/>
-              </a:rPr>
-              <a:t>&lt;フッター&gt;</a:t>
-            </a:r>
-            <a:endParaRPr b="0" lang="en-US" sz="1400" spc="-1" strike="noStrike">
+            <a:pPr indent="0" algn="r" defTabSz="914400">
+              <a:lnSpc>
+                <a:spcPct val="100000"/>
+              </a:lnSpc>
+              <a:buNone/>
+              <a:tabLst>
+                <a:tab algn="l" pos="0"/>
+              </a:tabLst>
+            </a:pPr>
+            <a:fld id="{D6351999-D726-4A7C-989A-224CDAAD722B}" type="slidenum">
+              <a:rPr b="0" lang="en-US" sz="1200" spc="-1" strike="noStrike">
+                <a:solidFill>
+                  <a:schemeClr val="accent1"/>
+                </a:solidFill>
+                <a:latin typeface="Corbel"/>
+              </a:rPr>
+              <a:t>&lt;番号&gt;</a:t>
+            </a:fld>
+            <a:endParaRPr b="0" lang="en-US" sz="1200" spc="-1" strike="noStrike">
               <a:solidFill>
                 <a:srgbClr val="000000"/>
               </a:solidFill>
@@ -7014,18 +5524,18 @@
       </p:sp>
       <p:sp>
         <p:nvSpPr>
-          <p:cNvPr id="60" name="PlaceHolder 4"/>
+          <p:cNvPr id="49" name="PlaceHolder 4"/>
           <p:cNvSpPr>
             <a:spLocks noGrp="1"/>
           </p:cNvSpPr>
           <p:nvPr>
-            <p:ph type="sldNum" idx="24"/>
+            <p:ph type="dt" idx="24"/>
           </p:nvPr>
         </p:nvSpPr>
         <p:spPr>
           <a:xfrm>
-            <a:off x="9329400" y="6223680"/>
-            <a:ext cx="1705680" cy="364680"/>
+            <a:off x="1143000" y="6223680"/>
+            <a:ext cx="2328480" cy="364320"/>
           </a:xfrm>
           <a:prstGeom prst="rect">
             <a:avLst/>
@@ -7040,36 +5550,30 @@
             <a:noAutofit/>
           </a:bodyPr>
           <a:lstStyle>
-            <a:lvl1pPr indent="0" algn="r" defTabSz="914400">
-              <a:lnSpc>
-                <a:spcPct val="100000"/>
-              </a:lnSpc>
-              <a:buNone/>
-              <a:defRPr b="0" lang="en-US" sz="1200" spc="-1" strike="noStrike">
-                <a:solidFill>
-                  <a:schemeClr val="accent1"/>
-                </a:solidFill>
-                <a:latin typeface="Corbel"/>
+            <a:lvl1pPr indent="0">
+              <a:buNone/>
+              <a:defRPr b="0" lang="en-US" sz="1400" spc="-1" strike="noStrike">
+                <a:solidFill>
+                  <a:srgbClr val="000000"/>
+                </a:solidFill>
+                <a:latin typeface="Noto Serif JP"/>
               </a:defRPr>
             </a:lvl1pPr>
           </a:lstStyle>
           <a:p>
-            <a:pPr indent="0" algn="r" defTabSz="914400">
-              <a:lnSpc>
-                <a:spcPct val="100000"/>
-              </a:lnSpc>
-              <a:buNone/>
-            </a:pPr>
-            <a:fld id="{50ECB02D-CC6A-4FBC-9030-163D8C5B5750}" type="slidenum">
-              <a:rPr b="0" lang="en-US" sz="1200" spc="-1" strike="noStrike">
-                <a:solidFill>
-                  <a:schemeClr val="accent1"/>
-                </a:solidFill>
-                <a:latin typeface="Corbel"/>
-              </a:rPr>
-              <a:t>&lt;番号&gt;</a:t>
-            </a:fld>
-            <a:endParaRPr b="0" lang="en-US" sz="1200" spc="-1" strike="noStrike">
+            <a:pPr indent="0">
+              <a:buNone/>
+            </a:pPr>
+            <a:r>
+              <a:rPr b="0" lang="en-US" sz="1400" spc="-1" strike="noStrike">
+                <a:solidFill>
+                  <a:srgbClr val="000000"/>
+                </a:solidFill>
+                <a:latin typeface="Noto Serif JP"/>
+              </a:rPr>
+              <a:t>&lt;日付/時刻&gt;</a:t>
+            </a:r>
+            <a:endParaRPr b="0" lang="en-US" sz="1400" spc="-1" strike="noStrike">
               <a:solidFill>
                 <a:srgbClr val="000000"/>
               </a:solidFill>
@@ -7113,14 +5617,14 @@
       </p:grpSpPr>
       <p:sp>
         <p:nvSpPr>
-          <p:cNvPr id="62" name="Rectangle 6"/>
+          <p:cNvPr id="51" name="Rectangle 6"/>
           <p:cNvSpPr/>
           <p:nvPr/>
         </p:nvSpPr>
         <p:spPr>
           <a:xfrm>
             <a:off x="231120" y="243720"/>
-            <a:ext cx="11724120" cy="6377400"/>
+            <a:ext cx="11723760" cy="6377040"/>
           </a:xfrm>
           <a:prstGeom prst="rect">
             <a:avLst/>
@@ -7151,6 +5655,11 @@
             <a:noAutofit/>
           </a:bodyPr>
           <a:p>
+            <a:pPr>
+              <a:lnSpc>
+                <a:spcPct val="100000"/>
+              </a:lnSpc>
+            </a:pPr>
             <a:endParaRPr b="0" lang="en-US" sz="1800" spc="-1" strike="noStrike">
               <a:solidFill>
                 <a:srgbClr val="000000"/>
@@ -7162,18 +5671,18 @@
       </p:sp>
       <p:sp>
         <p:nvSpPr>
-          <p:cNvPr id="63" name="PlaceHolder 1"/>
+          <p:cNvPr id="52" name="PlaceHolder 1"/>
           <p:cNvSpPr>
             <a:spLocks noGrp="1"/>
           </p:cNvSpPr>
           <p:nvPr>
-            <p:ph type="dt" idx="25"/>
+            <p:ph type="ftr" idx="25"/>
           </p:nvPr>
         </p:nvSpPr>
         <p:spPr>
           <a:xfrm>
-            <a:off x="1143000" y="6223680"/>
-            <a:ext cx="2328840" cy="364680"/>
+            <a:off x="3949200" y="6223680"/>
+            <a:ext cx="4717080" cy="364320"/>
           </a:xfrm>
           <a:prstGeom prst="rect">
             <a:avLst/>
@@ -7188,36 +5697,42 @@
             <a:noAutofit/>
           </a:bodyPr>
           <a:lstStyle>
-            <a:lvl1pPr indent="0" defTabSz="914400">
+            <a:lvl1pPr indent="0" algn="ctr">
               <a:lnSpc>
                 <a:spcPct val="100000"/>
               </a:lnSpc>
               <a:buNone/>
-              <a:defRPr b="0" lang="en-US" sz="1200" spc="-1" strike="noStrike">
-                <a:solidFill>
-                  <a:schemeClr val="accent1"/>
-                </a:solidFill>
-                <a:latin typeface="Corbel"/>
+              <a:tabLst>
+                <a:tab algn="l" pos="0"/>
+              </a:tabLst>
+              <a:defRPr b="0" lang="en-US" sz="1400" spc="-1" strike="noStrike">
+                <a:solidFill>
+                  <a:srgbClr val="000000"/>
+                </a:solidFill>
+                <a:latin typeface="Noto Serif JP"/>
               </a:defRPr>
             </a:lvl1pPr>
           </a:lstStyle>
           <a:p>
-            <a:pPr indent="0" defTabSz="914400">
+            <a:pPr indent="0" algn="ctr">
               <a:lnSpc>
                 <a:spcPct val="100000"/>
               </a:lnSpc>
               <a:buNone/>
-            </a:pPr>
-            <a:r>
-              <a:rPr b="0" lang="en-US" sz="1200" spc="-1" strike="noStrike">
-                <a:solidFill>
-                  <a:schemeClr val="accent1"/>
-                </a:solidFill>
-                <a:latin typeface="Corbel"/>
-              </a:rPr>
-              <a:t>&lt;日付/時刻&gt;</a:t>
-            </a:r>
-            <a:endParaRPr b="0" lang="en-US" sz="1200" spc="-1" strike="noStrike">
+              <a:tabLst>
+                <a:tab algn="l" pos="0"/>
+              </a:tabLst>
+            </a:pPr>
+            <a:r>
+              <a:rPr b="0" lang="en-US" sz="1400" spc="-1" strike="noStrike">
+                <a:solidFill>
+                  <a:srgbClr val="000000"/>
+                </a:solidFill>
+                <a:latin typeface="Noto Serif JP"/>
+              </a:rPr>
+              <a:t>&lt;フッター&gt;</a:t>
+            </a:r>
+            <a:endParaRPr b="0" lang="en-US" sz="1400" spc="-1" strike="noStrike">
               <a:solidFill>
                 <a:srgbClr val="000000"/>
               </a:solidFill>
@@ -7228,18 +5743,18 @@
       </p:sp>
       <p:sp>
         <p:nvSpPr>
-          <p:cNvPr id="64" name="PlaceHolder 2"/>
+          <p:cNvPr id="53" name="PlaceHolder 2"/>
           <p:cNvSpPr>
             <a:spLocks noGrp="1"/>
           </p:cNvSpPr>
           <p:nvPr>
-            <p:ph type="ftr" idx="26"/>
+            <p:ph type="sldNum" idx="26"/>
           </p:nvPr>
         </p:nvSpPr>
         <p:spPr>
           <a:xfrm>
-            <a:off x="3949200" y="6223680"/>
-            <a:ext cx="4717440" cy="364680"/>
+            <a:off x="9329400" y="6223680"/>
+            <a:ext cx="1705320" cy="364320"/>
           </a:xfrm>
           <a:prstGeom prst="rect">
             <a:avLst/>
@@ -7254,30 +5769,42 @@
             <a:noAutofit/>
           </a:bodyPr>
           <a:lstStyle>
-            <a:lvl1pPr indent="0" algn="ctr">
-              <a:buNone/>
-              <a:defRPr b="0" lang="en-US" sz="1400" spc="-1" strike="noStrike">
-                <a:solidFill>
-                  <a:srgbClr val="000000"/>
-                </a:solidFill>
-                <a:latin typeface="Noto Serif JP"/>
+            <a:lvl1pPr indent="0" algn="r" defTabSz="914400">
+              <a:lnSpc>
+                <a:spcPct val="100000"/>
+              </a:lnSpc>
+              <a:buNone/>
+              <a:tabLst>
+                <a:tab algn="l" pos="0"/>
+              </a:tabLst>
+              <a:defRPr b="0" lang="en-US" sz="1200" spc="-1" strike="noStrike">
+                <a:solidFill>
+                  <a:schemeClr val="accent1"/>
+                </a:solidFill>
+                <a:latin typeface="Corbel"/>
               </a:defRPr>
             </a:lvl1pPr>
           </a:lstStyle>
           <a:p>
-            <a:pPr indent="0" algn="ctr">
-              <a:buNone/>
-            </a:pPr>
-            <a:r>
-              <a:rPr b="0" lang="en-US" sz="1400" spc="-1" strike="noStrike">
-                <a:solidFill>
-                  <a:srgbClr val="000000"/>
-                </a:solidFill>
-                <a:latin typeface="Noto Serif JP"/>
-              </a:rPr>
-              <a:t>&lt;フッター&gt;</a:t>
-            </a:r>
-            <a:endParaRPr b="0" lang="en-US" sz="1400" spc="-1" strike="noStrike">
+            <a:pPr indent="0" algn="r" defTabSz="914400">
+              <a:lnSpc>
+                <a:spcPct val="100000"/>
+              </a:lnSpc>
+              <a:buNone/>
+              <a:tabLst>
+                <a:tab algn="l" pos="0"/>
+              </a:tabLst>
+            </a:pPr>
+            <a:fld id="{4F98BA6B-CEF6-4A10-95F1-E013BF251A9E}" type="slidenum">
+              <a:rPr b="0" lang="en-US" sz="1200" spc="-1" strike="noStrike">
+                <a:solidFill>
+                  <a:schemeClr val="accent1"/>
+                </a:solidFill>
+                <a:latin typeface="Corbel"/>
+              </a:rPr>
+              <a:t>&lt;番号&gt;</a:t>
+            </a:fld>
+            <a:endParaRPr b="0" lang="en-US" sz="1200" spc="-1" strike="noStrike">
               <a:solidFill>
                 <a:srgbClr val="000000"/>
               </a:solidFill>
@@ -7288,18 +5815,18 @@
       </p:sp>
       <p:sp>
         <p:nvSpPr>
-          <p:cNvPr id="65" name="PlaceHolder 3"/>
+          <p:cNvPr id="54" name="PlaceHolder 3"/>
           <p:cNvSpPr>
             <a:spLocks noGrp="1"/>
           </p:cNvSpPr>
           <p:nvPr>
-            <p:ph type="sldNum" idx="27"/>
+            <p:ph type="dt" idx="27"/>
           </p:nvPr>
         </p:nvSpPr>
         <p:spPr>
           <a:xfrm>
-            <a:off x="9329400" y="6223680"/>
-            <a:ext cx="1705680" cy="364680"/>
+            <a:off x="1143000" y="6223680"/>
+            <a:ext cx="2328480" cy="364320"/>
           </a:xfrm>
           <a:prstGeom prst="rect">
             <a:avLst/>
@@ -7314,36 +5841,30 @@
             <a:noAutofit/>
           </a:bodyPr>
           <a:lstStyle>
-            <a:lvl1pPr indent="0" algn="r" defTabSz="914400">
-              <a:lnSpc>
-                <a:spcPct val="100000"/>
-              </a:lnSpc>
-              <a:buNone/>
-              <a:defRPr b="0" lang="en-US" sz="1200" spc="-1" strike="noStrike">
-                <a:solidFill>
-                  <a:schemeClr val="accent1"/>
-                </a:solidFill>
-                <a:latin typeface="Corbel"/>
+            <a:lvl1pPr indent="0">
+              <a:buNone/>
+              <a:defRPr b="0" lang="en-US" sz="1400" spc="-1" strike="noStrike">
+                <a:solidFill>
+                  <a:srgbClr val="000000"/>
+                </a:solidFill>
+                <a:latin typeface="Noto Serif JP"/>
               </a:defRPr>
             </a:lvl1pPr>
           </a:lstStyle>
           <a:p>
-            <a:pPr indent="0" algn="r" defTabSz="914400">
-              <a:lnSpc>
-                <a:spcPct val="100000"/>
-              </a:lnSpc>
-              <a:buNone/>
-            </a:pPr>
-            <a:fld id="{9F8D7877-90EA-452C-B810-5103C050B314}" type="slidenum">
-              <a:rPr b="0" lang="en-US" sz="1200" spc="-1" strike="noStrike">
-                <a:solidFill>
-                  <a:schemeClr val="accent1"/>
-                </a:solidFill>
-                <a:latin typeface="Corbel"/>
-              </a:rPr>
-              <a:t>&lt;番号&gt;</a:t>
-            </a:fld>
-            <a:endParaRPr b="0" lang="en-US" sz="1200" spc="-1" strike="noStrike">
+            <a:pPr indent="0">
+              <a:buNone/>
+            </a:pPr>
+            <a:r>
+              <a:rPr b="0" lang="en-US" sz="1400" spc="-1" strike="noStrike">
+                <a:solidFill>
+                  <a:srgbClr val="000000"/>
+                </a:solidFill>
+                <a:latin typeface="Noto Serif JP"/>
+              </a:rPr>
+              <a:t>&lt;日付/時刻&gt;</a:t>
+            </a:r>
+            <a:endParaRPr b="0" lang="en-US" sz="1400" spc="-1" strike="noStrike">
               <a:solidFill>
                 <a:srgbClr val="000000"/>
               </a:solidFill>
@@ -7380,7 +5901,7 @@
       </p:grpSpPr>
       <p:sp>
         <p:nvSpPr>
-          <p:cNvPr id="80" name="PlaceHolder 1"/>
+          <p:cNvPr id="63" name="PlaceHolder 1"/>
           <p:cNvSpPr>
             <a:spLocks noGrp="1"/>
           </p:cNvSpPr>
@@ -7391,7 +5912,7 @@
         <p:spPr>
           <a:xfrm>
             <a:off x="1109880" y="882360"/>
-            <a:ext cx="9966600" cy="2925720"/>
+            <a:ext cx="9966240" cy="2925360"/>
           </a:xfrm>
           <a:prstGeom prst="rect">
             <a:avLst/>
@@ -7411,6 +5932,9 @@
                 <a:spcPct val="85000"/>
               </a:lnSpc>
               <a:buNone/>
+              <a:tabLst>
+                <a:tab algn="l" pos="0"/>
+              </a:tabLst>
             </a:pPr>
             <a:r>
               <a:rPr b="1" lang="ja-JP" sz="8800" spc="-1" strike="noStrike" cap="all">
@@ -7424,16 +5948,16 @@
             </a:r>
             <a:endParaRPr b="0" lang="en-US" sz="8800" spc="-1" strike="noStrike">
               <a:solidFill>
-                <a:schemeClr val="dk1"/>
-              </a:solidFill>
-              <a:latin typeface="Corbel"/>
-            </a:endParaRPr>
-          </a:p>
-        </p:txBody>
-      </p:sp>
-      <p:sp>
-        <p:nvSpPr>
-          <p:cNvPr id="81" name="PlaceHolder 2"/>
+                <a:srgbClr val="000000"/>
+              </a:solidFill>
+              <a:latin typeface="Arial"/>
+            </a:endParaRPr>
+          </a:p>
+        </p:txBody>
+      </p:sp>
+      <p:sp>
+        <p:nvSpPr>
+          <p:cNvPr id="64" name="PlaceHolder 2"/>
           <p:cNvSpPr>
             <a:spLocks noGrp="1"/>
           </p:cNvSpPr>
@@ -7444,7 +5968,7 @@
         <p:spPr>
           <a:xfrm>
             <a:off x="1523880" y="3760200"/>
-            <a:ext cx="9963000" cy="1655280"/>
+            <a:ext cx="9962640" cy="1654920"/>
           </a:xfrm>
           <a:prstGeom prst="rect">
             <a:avLst/>
@@ -7642,7 +6166,7 @@
       </p:grpSpPr>
       <p:sp>
         <p:nvSpPr>
-          <p:cNvPr id="82" name="PlaceHolder 1"/>
+          <p:cNvPr id="65" name="PlaceHolder 1"/>
           <p:cNvSpPr>
             <a:spLocks noGrp="1"/>
           </p:cNvSpPr>
@@ -7653,7 +6177,7 @@
         <p:spPr>
           <a:xfrm>
             <a:off x="1143000" y="609480"/>
-            <a:ext cx="9875160" cy="1356120"/>
+            <a:ext cx="9874800" cy="1355760"/>
           </a:xfrm>
           <a:prstGeom prst="rect">
             <a:avLst/>
@@ -7673,6 +6197,9 @@
                 <a:spcPct val="90000"/>
               </a:lnSpc>
               <a:buNone/>
+              <a:tabLst>
+                <a:tab algn="l" pos="0"/>
+              </a:tabLst>
             </a:pPr>
             <a:r>
               <a:rPr b="1" lang="ja-JP" sz="7200" spc="-1" strike="noStrike">
@@ -7686,23 +6213,23 @@
             </a:r>
             <a:endParaRPr b="0" lang="en-US" sz="7200" spc="-1" strike="noStrike">
               <a:solidFill>
-                <a:schemeClr val="dk1"/>
-              </a:solidFill>
-              <a:latin typeface="Corbel"/>
-            </a:endParaRPr>
-          </a:p>
-        </p:txBody>
-      </p:sp>
-      <p:sp>
-        <p:nvSpPr>
-          <p:cNvPr id="83" name="テキスト ボックス 3"/>
+                <a:srgbClr val="000000"/>
+              </a:solidFill>
+              <a:latin typeface="Arial"/>
+            </a:endParaRPr>
+          </a:p>
+        </p:txBody>
+      </p:sp>
+      <p:sp>
+        <p:nvSpPr>
+          <p:cNvPr id="66" name="テキスト ボックス 3"/>
           <p:cNvSpPr/>
           <p:nvPr/>
         </p:nvSpPr>
         <p:spPr>
           <a:xfrm>
             <a:off x="1477800" y="1944720"/>
-            <a:ext cx="9714960" cy="3382920"/>
+            <a:ext cx="9714600" cy="3381480"/>
           </a:xfrm>
           <a:prstGeom prst="rect">
             <a:avLst/>
@@ -7719,7 +6246,7 @@
           <a:fontRef idx="minor"/>
         </p:style>
         <p:txBody>
-          <a:bodyPr numCol="1" spcCol="0" horzOverflow="overflow" anchor="t">
+          <a:bodyPr numCol="1" spcCol="0" horzOverflow="overflow" lIns="90000" rIns="90000" tIns="45000" bIns="45000" anchor="t">
             <a:spAutoFit/>
           </a:bodyPr>
           <a:p>
@@ -8125,7 +6652,7 @@
       </p:grpSpPr>
       <p:sp>
         <p:nvSpPr>
-          <p:cNvPr id="84" name="PlaceHolder 1"/>
+          <p:cNvPr id="67" name="PlaceHolder 1"/>
           <p:cNvSpPr>
             <a:spLocks noGrp="1"/>
           </p:cNvSpPr>
@@ -8136,7 +6663,7 @@
         <p:spPr>
           <a:xfrm>
             <a:off x="1143000" y="609480"/>
-            <a:ext cx="9875160" cy="1356120"/>
+            <a:ext cx="9874800" cy="1355760"/>
           </a:xfrm>
           <a:prstGeom prst="rect">
             <a:avLst/>
@@ -8156,6 +6683,9 @@
                 <a:spcPct val="90000"/>
               </a:lnSpc>
               <a:buNone/>
+              <a:tabLst>
+                <a:tab algn="l" pos="0"/>
+              </a:tabLst>
             </a:pPr>
             <a:r>
               <a:rPr b="1" lang="ja-JP" sz="7200" spc="-1" strike="noStrike">
@@ -8169,23 +6699,23 @@
             </a:r>
             <a:endParaRPr b="0" lang="en-US" sz="7200" spc="-1" strike="noStrike">
               <a:solidFill>
-                <a:schemeClr val="dk1"/>
-              </a:solidFill>
-              <a:latin typeface="Corbel"/>
-            </a:endParaRPr>
-          </a:p>
-        </p:txBody>
-      </p:sp>
-      <p:sp>
-        <p:nvSpPr>
-          <p:cNvPr id="85" name="テキスト ボックス 3"/>
+                <a:srgbClr val="000000"/>
+              </a:solidFill>
+              <a:latin typeface="Arial"/>
+            </a:endParaRPr>
+          </a:p>
+        </p:txBody>
+      </p:sp>
+      <p:sp>
+        <p:nvSpPr>
+          <p:cNvPr id="68" name="テキスト ボックス 3"/>
           <p:cNvSpPr/>
           <p:nvPr/>
         </p:nvSpPr>
         <p:spPr>
           <a:xfrm>
             <a:off x="2002680" y="1594080"/>
-            <a:ext cx="10384560" cy="2772720"/>
+            <a:ext cx="5917320" cy="3076200"/>
           </a:xfrm>
           <a:prstGeom prst="rect">
             <a:avLst/>
@@ -8202,7 +6732,7 @@
           <a:fontRef idx="minor"/>
         </p:style>
         <p:txBody>
-          <a:bodyPr numCol="1" spcCol="0" horzOverflow="overflow" anchor="t">
+          <a:bodyPr numCol="1" spcCol="0" horzOverflow="overflow" lIns="90000" rIns="90000" tIns="45000" bIns="45000" anchor="t">
             <a:spAutoFit/>
           </a:bodyPr>
           <a:p>
@@ -8255,7 +6785,7 @@
               <a:t>　</a:t>
             </a:r>
             <a:r>
-              <a:rPr b="1" lang="ja-JP" sz="8800" spc="-1" strike="noStrike">
+              <a:rPr b="1" lang="ja-JP" sz="5400" spc="-1" strike="noStrike">
                 <a:solidFill>
                   <a:srgbClr val="ff0000"/>
                 </a:solidFill>
@@ -8265,7 +6795,7 @@
               <a:t>格闘</a:t>
             </a:r>
             <a:r>
-              <a:rPr b="1" lang="ja-JP" sz="8800" spc="-1" strike="noStrike">
+              <a:rPr b="1" lang="ja-JP" sz="5400" spc="-1" strike="noStrike">
                 <a:solidFill>
                   <a:schemeClr val="dk1"/>
                 </a:solidFill>
@@ -8275,7 +6805,7 @@
               <a:t>　✖　</a:t>
             </a:r>
             <a:r>
-              <a:rPr b="1" lang="ja-JP" sz="8800" spc="-1" strike="noStrike">
+              <a:rPr b="1" lang="ja-JP" sz="5400" spc="-1" strike="noStrike">
                 <a:solidFill>
                   <a:schemeClr val="accent3">
                     <a:lumMod val="40000"/>
@@ -8285,10 +6815,10 @@
                 <a:latin typeface="Corbel"/>
                 <a:ea typeface="游ゴシック"/>
               </a:rPr>
-              <a:t>動物</a:t>
-            </a:r>
-            <a:r>
-              <a:rPr b="1" lang="ja-JP" sz="6000" spc="-1" strike="noStrike">
+              <a:t>動物   </a:t>
+            </a:r>
+            <a:r>
+              <a:rPr b="1" lang="ja-JP" sz="4000" spc="-1" strike="noStrike">
                 <a:solidFill>
                   <a:schemeClr val="dk1"/>
                 </a:solidFill>
@@ -8297,7 +6827,7 @@
               </a:rPr>
               <a:t>　</a:t>
             </a:r>
-            <a:endParaRPr b="0" lang="en-US" sz="6000" spc="-1" strike="noStrike">
+            <a:endParaRPr b="0" lang="en-US" sz="4000" spc="-1" strike="noStrike">
               <a:solidFill>
                 <a:srgbClr val="000000"/>
               </a:solidFill>
@@ -8321,14 +6851,14 @@
       </p:sp>
       <p:sp>
         <p:nvSpPr>
-          <p:cNvPr id="86" name="テキスト ボックス 2"/>
+          <p:cNvPr id="69" name="テキスト ボックス 2"/>
           <p:cNvSpPr/>
           <p:nvPr/>
         </p:nvSpPr>
         <p:spPr>
           <a:xfrm>
             <a:off x="2006640" y="4397040"/>
-            <a:ext cx="9630360" cy="639720"/>
+            <a:ext cx="9630000" cy="638280"/>
           </a:xfrm>
           <a:prstGeom prst="rect">
             <a:avLst/>
@@ -8345,7 +6875,7 @@
           <a:fontRef idx="minor"/>
         </p:style>
         <p:txBody>
-          <a:bodyPr numCol="1" spcCol="0" horzOverflow="overflow" anchor="t">
+          <a:bodyPr numCol="1" spcCol="0" horzOverflow="overflow" lIns="90000" rIns="90000" tIns="45000" bIns="45000" anchor="t">
             <a:spAutoFit/>
           </a:bodyPr>
           <a:p>
@@ -8445,7 +6975,7 @@
       </p:grpSpPr>
       <p:sp>
         <p:nvSpPr>
-          <p:cNvPr id="87" name="PlaceHolder 1"/>
+          <p:cNvPr id="70" name="PlaceHolder 1"/>
           <p:cNvSpPr>
             <a:spLocks noGrp="1"/>
           </p:cNvSpPr>
@@ -8456,7 +6986,7 @@
         <p:spPr>
           <a:xfrm>
             <a:off x="1143000" y="609480"/>
-            <a:ext cx="9875160" cy="1356120"/>
+            <a:ext cx="9874800" cy="1355760"/>
           </a:xfrm>
           <a:prstGeom prst="rect">
             <a:avLst/>
@@ -8476,6 +7006,9 @@
                 <a:spcPct val="90000"/>
               </a:lnSpc>
               <a:buNone/>
+              <a:tabLst>
+                <a:tab algn="l" pos="0"/>
+              </a:tabLst>
             </a:pPr>
             <a:r>
               <a:rPr b="1" lang="ja-JP" sz="7200" spc="-1" strike="noStrike">
@@ -8489,16 +7022,16 @@
             </a:r>
             <a:endParaRPr b="0" lang="en-US" sz="7200" spc="-1" strike="noStrike">
               <a:solidFill>
-                <a:schemeClr val="dk1"/>
-              </a:solidFill>
-              <a:latin typeface="Corbel"/>
-            </a:endParaRPr>
-          </a:p>
-        </p:txBody>
-      </p:sp>
-      <p:sp>
-        <p:nvSpPr>
-          <p:cNvPr id="88" name="PlaceHolder 2"/>
+                <a:srgbClr val="000000"/>
+              </a:solidFill>
+              <a:latin typeface="Arial"/>
+            </a:endParaRPr>
+          </a:p>
+        </p:txBody>
+      </p:sp>
+      <p:sp>
+        <p:nvSpPr>
+          <p:cNvPr id="71" name="PlaceHolder 2"/>
           <p:cNvSpPr>
             <a:spLocks noGrp="1"/>
           </p:cNvSpPr>
@@ -8509,7 +7042,7 @@
         <p:spPr>
           <a:xfrm>
             <a:off x="838080" y="1764720"/>
-            <a:ext cx="11703960" cy="4411800"/>
+            <a:ext cx="11703600" cy="4411440"/>
           </a:xfrm>
           <a:prstGeom prst="rect">
             <a:avLst/>
@@ -8548,9 +7081,9 @@
             </a:r>
             <a:endParaRPr b="0" lang="en-US" sz="3200" spc="-1" strike="noStrike">
               <a:solidFill>
-                <a:schemeClr val="accent1"/>
-              </a:solidFill>
-              <a:latin typeface="Corbel"/>
+                <a:srgbClr val="000000"/>
+              </a:solidFill>
+              <a:latin typeface="Arial"/>
             </a:endParaRPr>
           </a:p>
           <a:p>
@@ -8588,9 +7121,9 @@
             </a:r>
             <a:endParaRPr b="0" lang="en-US" sz="3200" spc="-1" strike="noStrike">
               <a:solidFill>
-                <a:schemeClr val="accent1"/>
-              </a:solidFill>
-              <a:latin typeface="Corbel"/>
+                <a:srgbClr val="000000"/>
+              </a:solidFill>
+              <a:latin typeface="Arial"/>
             </a:endParaRPr>
           </a:p>
           <a:p>
@@ -8608,9 +7141,9 @@
             </a:pPr>
             <a:endParaRPr b="0" lang="en-US" sz="3200" spc="-1" strike="noStrike">
               <a:solidFill>
-                <a:schemeClr val="accent1"/>
-              </a:solidFill>
-              <a:latin typeface="Corbel"/>
+                <a:srgbClr val="000000"/>
+              </a:solidFill>
+              <a:latin typeface="Arial"/>
             </a:endParaRPr>
           </a:p>
           <a:p>
@@ -8688,9 +7221,9 @@
             </a:r>
             <a:endParaRPr b="0" lang="en-US" sz="3200" spc="-1" strike="noStrike">
               <a:solidFill>
-                <a:schemeClr val="accent1"/>
-              </a:solidFill>
-              <a:latin typeface="Corbel"/>
+                <a:srgbClr val="000000"/>
+              </a:solidFill>
+              <a:latin typeface="Arial"/>
             </a:endParaRPr>
           </a:p>
           <a:p>
@@ -8708,9 +7241,9 @@
             </a:pPr>
             <a:endParaRPr b="0" lang="en-US" sz="3200" spc="-1" strike="noStrike">
               <a:solidFill>
-                <a:schemeClr val="accent1"/>
-              </a:solidFill>
-              <a:latin typeface="Corbel"/>
+                <a:srgbClr val="000000"/>
+              </a:solidFill>
+              <a:latin typeface="Arial"/>
             </a:endParaRPr>
           </a:p>
           <a:p>
@@ -8758,9 +7291,9 @@
             </a:r>
             <a:endParaRPr b="0" lang="en-US" sz="3200" spc="-1" strike="noStrike">
               <a:solidFill>
-                <a:schemeClr val="accent1"/>
-              </a:solidFill>
-              <a:latin typeface="Corbel"/>
+                <a:srgbClr val="000000"/>
+              </a:solidFill>
+              <a:latin typeface="Arial"/>
             </a:endParaRPr>
           </a:p>
           <a:p>
@@ -8798,9 +7331,9 @@
             </a:r>
             <a:endParaRPr b="0" lang="en-US" sz="3200" spc="-1" strike="noStrike">
               <a:solidFill>
-                <a:schemeClr val="accent1"/>
-              </a:solidFill>
-              <a:latin typeface="Corbel"/>
+                <a:srgbClr val="000000"/>
+              </a:solidFill>
+              <a:latin typeface="Arial"/>
             </a:endParaRPr>
           </a:p>
         </p:txBody>
@@ -8837,7 +7370,7 @@
       </p:grpSpPr>
       <p:sp>
         <p:nvSpPr>
-          <p:cNvPr id="89" name="PlaceHolder 1"/>
+          <p:cNvPr id="72" name="PlaceHolder 1"/>
           <p:cNvSpPr>
             <a:spLocks noGrp="1"/>
           </p:cNvSpPr>
@@ -8848,7 +7381,7 @@
         <p:spPr>
           <a:xfrm>
             <a:off x="1143000" y="609480"/>
-            <a:ext cx="9875160" cy="1356120"/>
+            <a:ext cx="9874800" cy="1355760"/>
           </a:xfrm>
           <a:prstGeom prst="rect">
             <a:avLst/>
@@ -8868,6 +7401,9 @@
                 <a:spcPct val="90000"/>
               </a:lnSpc>
               <a:buNone/>
+              <a:tabLst>
+                <a:tab algn="l" pos="0"/>
+              </a:tabLst>
             </a:pPr>
             <a:r>
               <a:rPr b="1" lang="ja-JP" sz="7200" spc="-1" strike="noStrike">
@@ -8881,23 +7417,23 @@
             </a:r>
             <a:endParaRPr b="0" lang="en-US" sz="7200" spc="-1" strike="noStrike">
               <a:solidFill>
-                <a:schemeClr val="dk1"/>
-              </a:solidFill>
-              <a:latin typeface="Corbel"/>
-            </a:endParaRPr>
-          </a:p>
-        </p:txBody>
-      </p:sp>
-      <p:sp>
-        <p:nvSpPr>
-          <p:cNvPr id="90" name="四角形: 角を丸くする 3"/>
+                <a:srgbClr val="000000"/>
+              </a:solidFill>
+              <a:latin typeface="Arial"/>
+            </a:endParaRPr>
+          </a:p>
+        </p:txBody>
+      </p:sp>
+      <p:sp>
+        <p:nvSpPr>
+          <p:cNvPr id="73" name="四角形: 角を丸くする 3"/>
           <p:cNvSpPr/>
           <p:nvPr/>
         </p:nvSpPr>
         <p:spPr>
           <a:xfrm>
             <a:off x="465840" y="2868120"/>
-            <a:ext cx="2189520" cy="980640"/>
+            <a:ext cx="2189160" cy="980280"/>
           </a:xfrm>
           <a:prstGeom prst="roundRect">
             <a:avLst>
@@ -8959,14 +7495,14 @@
       </p:sp>
       <p:sp>
         <p:nvSpPr>
-          <p:cNvPr id="91" name="矢印: 右 4"/>
+          <p:cNvPr id="74" name="矢印: 右 4"/>
           <p:cNvSpPr/>
           <p:nvPr/>
         </p:nvSpPr>
         <p:spPr>
           <a:xfrm>
             <a:off x="2862360" y="2999160"/>
-            <a:ext cx="781200" cy="722520"/>
+            <a:ext cx="780840" cy="722160"/>
           </a:xfrm>
           <a:prstGeom prst="rightArrow">
             <a:avLst>
@@ -9019,14 +7555,14 @@
       </p:sp>
       <p:sp>
         <p:nvSpPr>
-          <p:cNvPr id="92" name="四角形: 角を丸くする 5"/>
+          <p:cNvPr id="75" name="四角形: 角を丸くする 5"/>
           <p:cNvSpPr/>
           <p:nvPr/>
         </p:nvSpPr>
         <p:spPr>
           <a:xfrm>
             <a:off x="3904920" y="2868120"/>
-            <a:ext cx="2189520" cy="980640"/>
+            <a:ext cx="2189160" cy="980280"/>
           </a:xfrm>
           <a:prstGeom prst="roundRect">
             <a:avLst>
@@ -9058,7 +7594,7 @@
           <a:fontRef idx="minor"/>
         </p:style>
         <p:txBody>
-          <a:bodyPr anchor="ctr">
+          <a:bodyPr lIns="90000" rIns="90000" tIns="45000" bIns="45000" anchor="ctr">
             <a:noAutofit/>
           </a:bodyPr>
           <a:p>
@@ -9088,14 +7624,14 @@
       </p:sp>
       <p:sp>
         <p:nvSpPr>
-          <p:cNvPr id="93" name="矢印: 右 6"/>
+          <p:cNvPr id="76" name="矢印: 右 6"/>
           <p:cNvSpPr/>
           <p:nvPr/>
         </p:nvSpPr>
         <p:spPr>
           <a:xfrm>
             <a:off x="6537240" y="2998080"/>
-            <a:ext cx="781200" cy="722520"/>
+            <a:ext cx="780840" cy="722160"/>
           </a:xfrm>
           <a:prstGeom prst="rightArrow">
             <a:avLst>
@@ -9148,14 +7684,14 @@
       </p:sp>
       <p:sp>
         <p:nvSpPr>
-          <p:cNvPr id="94" name="四角形: 角を丸くする 7"/>
+          <p:cNvPr id="77" name="四角形: 角を丸くする 7"/>
           <p:cNvSpPr/>
           <p:nvPr/>
         </p:nvSpPr>
         <p:spPr>
           <a:xfrm>
             <a:off x="7676640" y="2868120"/>
-            <a:ext cx="2189520" cy="980640"/>
+            <a:ext cx="2189160" cy="980280"/>
           </a:xfrm>
           <a:prstGeom prst="roundRect">
             <a:avLst>
@@ -9187,7 +7723,7 @@
           <a:fontRef idx="minor"/>
         </p:style>
         <p:txBody>
-          <a:bodyPr anchor="ctr">
+          <a:bodyPr lIns="90000" rIns="90000" tIns="45000" bIns="45000" anchor="ctr">
             <a:noAutofit/>
           </a:bodyPr>
           <a:p>
@@ -9217,14 +7753,14 @@
       </p:sp>
       <p:sp>
         <p:nvSpPr>
-          <p:cNvPr id="95" name="矢印: 右 8"/>
+          <p:cNvPr id="78" name="矢印: 右 8"/>
           <p:cNvSpPr/>
           <p:nvPr/>
         </p:nvSpPr>
         <p:spPr>
           <a:xfrm rot="5400000">
-            <a:off x="8383320" y="4076280"/>
-            <a:ext cx="781200" cy="722520"/>
+            <a:off x="8383680" y="4076280"/>
+            <a:ext cx="780840" cy="722160"/>
           </a:xfrm>
           <a:prstGeom prst="rightArrow">
             <a:avLst>
@@ -9277,14 +7813,14 @@
       </p:sp>
       <p:sp>
         <p:nvSpPr>
-          <p:cNvPr id="96" name="四角形: 角を丸くする 9"/>
+          <p:cNvPr id="79" name="四角形: 角を丸くする 9"/>
           <p:cNvSpPr/>
           <p:nvPr/>
         </p:nvSpPr>
         <p:spPr>
           <a:xfrm>
             <a:off x="7676640" y="5265000"/>
-            <a:ext cx="2189520" cy="980640"/>
+            <a:ext cx="2189160" cy="980280"/>
           </a:xfrm>
           <a:prstGeom prst="roundRect">
             <a:avLst>
@@ -9316,7 +7852,7 @@
           <a:fontRef idx="minor"/>
         </p:style>
         <p:txBody>
-          <a:bodyPr anchor="ctr">
+          <a:bodyPr lIns="90000" rIns="90000" tIns="45000" bIns="45000" anchor="ctr">
             <a:noAutofit/>
           </a:bodyPr>
           <a:p>
@@ -9376,7 +7912,7 @@
       </p:grpSpPr>
       <p:sp>
         <p:nvSpPr>
-          <p:cNvPr id="97" name="PlaceHolder 1"/>
+          <p:cNvPr id="80" name="PlaceHolder 1"/>
           <p:cNvSpPr>
             <a:spLocks noGrp="1"/>
           </p:cNvSpPr>
@@ -9387,7 +7923,7 @@
         <p:spPr>
           <a:xfrm>
             <a:off x="1157040" y="245160"/>
-            <a:ext cx="9875160" cy="1356120"/>
+            <a:ext cx="9874800" cy="1355760"/>
           </a:xfrm>
           <a:prstGeom prst="rect">
             <a:avLst/>
@@ -9399,7 +7935,7 @@
         </p:spPr>
         <p:txBody>
           <a:bodyPr lIns="91440" rIns="91440" tIns="45720" bIns="45720" anchor="ctr">
-            <a:normAutofit fontScale="91831"/>
+            <a:normAutofit fontScale="91111"/>
           </a:bodyPr>
           <a:p>
             <a:pPr indent="0" defTabSz="914400">
@@ -9407,6 +7943,9 @@
                 <a:spcPct val="90000"/>
               </a:lnSpc>
               <a:buNone/>
+              <a:tabLst>
+                <a:tab algn="l" pos="0"/>
+              </a:tabLst>
             </a:pPr>
             <a:r>
               <a:rPr b="1" lang="ja-JP" sz="7200" spc="-1" strike="noStrike">
@@ -9450,16 +7989,16 @@
             </a:r>
             <a:endParaRPr b="0" lang="en-US" sz="7200" spc="-1" strike="noStrike">
               <a:solidFill>
-                <a:schemeClr val="dk1"/>
-              </a:solidFill>
-              <a:latin typeface="Corbel"/>
+                <a:srgbClr val="000000"/>
+              </a:solidFill>
+              <a:latin typeface="Arial"/>
             </a:endParaRPr>
           </a:p>
         </p:txBody>
       </p:sp>
       <p:pic>
         <p:nvPicPr>
-          <p:cNvPr id="98" name="Picture 4" descr=""/>
+          <p:cNvPr id="81" name="Picture 4" descr=""/>
           <p:cNvPicPr/>
           <p:nvPr/>
         </p:nvPicPr>
@@ -9470,7 +8009,7 @@
         <p:spPr>
           <a:xfrm>
             <a:off x="1814760" y="1611360"/>
-            <a:ext cx="8562240" cy="4527720"/>
+            <a:ext cx="8561880" cy="4527360"/>
           </a:xfrm>
           <a:prstGeom prst="rect">
             <a:avLst/>
@@ -9512,7 +8051,7 @@
       </p:grpSpPr>
       <p:sp>
         <p:nvSpPr>
-          <p:cNvPr id="99" name="PlaceHolder 1"/>
+          <p:cNvPr id="82" name="PlaceHolder 1"/>
           <p:cNvSpPr>
             <a:spLocks noGrp="1"/>
           </p:cNvSpPr>
@@ -9523,7 +8062,7 @@
         <p:spPr>
           <a:xfrm>
             <a:off x="397800" y="271080"/>
-            <a:ext cx="11590560" cy="1356120"/>
+            <a:ext cx="11590200" cy="1355760"/>
           </a:xfrm>
           <a:prstGeom prst="rect">
             <a:avLst/>
@@ -9543,6 +8082,9 @@
                 <a:spcPct val="90000"/>
               </a:lnSpc>
               <a:buNone/>
+              <a:tabLst>
+                <a:tab algn="l" pos="0"/>
+              </a:tabLst>
             </a:pPr>
             <a:r>
               <a:rPr b="0" lang="ja-JP" sz="4400" spc="-1" strike="noStrike">
@@ -9618,16 +8160,16 @@
             </a:r>
             <a:endParaRPr b="0" lang="en-US" sz="4400" spc="-1" strike="noStrike">
               <a:solidFill>
-                <a:schemeClr val="dk1"/>
-              </a:solidFill>
-              <a:latin typeface="Corbel"/>
-            </a:endParaRPr>
-          </a:p>
-        </p:txBody>
-      </p:sp>
-      <p:sp>
-        <p:nvSpPr>
-          <p:cNvPr id="100" name="PlaceHolder 2"/>
+                <a:srgbClr val="000000"/>
+              </a:solidFill>
+              <a:latin typeface="Arial"/>
+            </a:endParaRPr>
+          </a:p>
+        </p:txBody>
+      </p:sp>
+      <p:sp>
+        <p:nvSpPr>
+          <p:cNvPr id="83" name="PlaceHolder 2"/>
           <p:cNvSpPr>
             <a:spLocks noGrp="1"/>
           </p:cNvSpPr>
@@ -9638,7 +8180,7 @@
         <p:spPr>
           <a:xfrm>
             <a:off x="1143000" y="2057400"/>
-            <a:ext cx="9872640" cy="4038120"/>
+            <a:ext cx="9872280" cy="4037760"/>
           </a:xfrm>
           <a:prstGeom prst="rect">
             <a:avLst/>
@@ -9650,7 +8192,7 @@
         </p:spPr>
         <p:txBody>
           <a:bodyPr lIns="91440" rIns="91440" tIns="45720" bIns="45720" anchor="t">
-            <a:normAutofit fontScale="90012"/>
+            <a:normAutofit fontScale="89999"/>
           </a:bodyPr>
           <a:p>
             <a:pPr marL="45720" indent="0" defTabSz="914400">
@@ -9694,9 +8236,9 @@
             </a:r>
             <a:endParaRPr b="0" lang="en-US" sz="2200" spc="-1" strike="noStrike">
               <a:solidFill>
-                <a:schemeClr val="accent1"/>
-              </a:solidFill>
-              <a:latin typeface="Corbel"/>
+                <a:srgbClr val="000000"/>
+              </a:solidFill>
+              <a:latin typeface="Arial"/>
             </a:endParaRPr>
           </a:p>
           <a:p>
@@ -9732,9 +8274,9 @@
             </a:r>
             <a:endParaRPr b="0" lang="en-US" sz="2200" spc="-1" strike="noStrike">
               <a:solidFill>
-                <a:schemeClr val="accent1"/>
-              </a:solidFill>
-              <a:latin typeface="Corbel"/>
+                <a:srgbClr val="000000"/>
+              </a:solidFill>
+              <a:latin typeface="Arial"/>
             </a:endParaRPr>
           </a:p>
           <a:p>
@@ -9797,9 +8339,9 @@
             </a:r>
             <a:endParaRPr b="0" lang="en-US" sz="2200" spc="-1" strike="noStrike">
               <a:solidFill>
-                <a:schemeClr val="accent1"/>
-              </a:solidFill>
-              <a:latin typeface="Corbel"/>
+                <a:srgbClr val="000000"/>
+              </a:solidFill>
+              <a:latin typeface="Arial"/>
             </a:endParaRPr>
           </a:p>
           <a:p>
@@ -9835,9 +8377,9 @@
             </a:r>
             <a:endParaRPr b="0" lang="en-US" sz="2200" spc="-1" strike="noStrike">
               <a:solidFill>
-                <a:schemeClr val="accent1"/>
-              </a:solidFill>
-              <a:latin typeface="Corbel"/>
+                <a:srgbClr val="000000"/>
+              </a:solidFill>
+              <a:latin typeface="Arial"/>
             </a:endParaRPr>
           </a:p>
           <a:p>
@@ -9873,9 +8415,9 @@
             </a:r>
             <a:endParaRPr b="0" lang="en-US" sz="2200" spc="-1" strike="noStrike">
               <a:solidFill>
-                <a:schemeClr val="accent1"/>
-              </a:solidFill>
-              <a:latin typeface="Corbel"/>
+                <a:srgbClr val="000000"/>
+              </a:solidFill>
+              <a:latin typeface="Arial"/>
             </a:endParaRPr>
           </a:p>
           <a:p>
@@ -9902,9 +8444,9 @@
             </a:r>
             <a:endParaRPr b="0" lang="en-US" sz="2200" spc="-1" strike="noStrike">
               <a:solidFill>
-                <a:schemeClr val="accent1"/>
-              </a:solidFill>
-              <a:latin typeface="Corbel"/>
+                <a:srgbClr val="000000"/>
+              </a:solidFill>
+              <a:latin typeface="Arial"/>
             </a:endParaRPr>
           </a:p>
           <a:p>
@@ -9967,9 +8509,9 @@
             </a:r>
             <a:endParaRPr b="0" lang="en-US" sz="2200" spc="-1" strike="noStrike">
               <a:solidFill>
-                <a:schemeClr val="accent1"/>
-              </a:solidFill>
-              <a:latin typeface="Corbel"/>
+                <a:srgbClr val="000000"/>
+              </a:solidFill>
+              <a:latin typeface="Arial"/>
             </a:endParaRPr>
           </a:p>
           <a:p>
@@ -9996,9 +8538,9 @@
             </a:r>
             <a:endParaRPr b="0" lang="en-US" sz="2200" spc="-1" strike="noStrike">
               <a:solidFill>
-                <a:schemeClr val="accent1"/>
-              </a:solidFill>
-              <a:latin typeface="Corbel"/>
+                <a:srgbClr val="000000"/>
+              </a:solidFill>
+              <a:latin typeface="Arial"/>
             </a:endParaRPr>
           </a:p>
           <a:p>
@@ -10043,13 +8585,13 @@
             </a:r>
             <a:endParaRPr b="0" lang="en-US" sz="2200" spc="-1" strike="noStrike">
               <a:solidFill>
-                <a:schemeClr val="accent1"/>
-              </a:solidFill>
-              <a:latin typeface="Corbel"/>
-            </a:endParaRPr>
-          </a:p>
-          <a:p>
-            <a:pPr indent="0" defTabSz="914400">
+                <a:srgbClr val="000000"/>
+              </a:solidFill>
+              <a:latin typeface="Arial"/>
+            </a:endParaRPr>
+          </a:p>
+          <a:p>
+            <a:pPr marL="45720" indent="0" defTabSz="914400">
               <a:lnSpc>
                 <a:spcPct val="90000"/>
               </a:lnSpc>
@@ -10063,23 +8605,23 @@
             </a:pPr>
             <a:endParaRPr b="0" lang="en-US" sz="2200" spc="-1" strike="noStrike">
               <a:solidFill>
-                <a:schemeClr val="accent1"/>
-              </a:solidFill>
-              <a:latin typeface="Corbel"/>
-            </a:endParaRPr>
-          </a:p>
-        </p:txBody>
-      </p:sp>
-      <p:sp>
-        <p:nvSpPr>
-          <p:cNvPr id="101" name=""/>
-          <p:cNvSpPr txBox="1"/>
+                <a:srgbClr val="000000"/>
+              </a:solidFill>
+              <a:latin typeface="Arial"/>
+            </a:endParaRPr>
+          </a:p>
+        </p:txBody>
+      </p:sp>
+      <p:sp>
+        <p:nvSpPr>
+          <p:cNvPr id="84" name=""/>
+          <p:cNvSpPr/>
           <p:nvPr/>
         </p:nvSpPr>
         <p:spPr>
           <a:xfrm>
             <a:off x="7560000" y="2235240"/>
-            <a:ext cx="4680000" cy="644760"/>
+            <a:ext cx="4679640" cy="644400"/>
           </a:xfrm>
           <a:prstGeom prst="rect">
             <a:avLst/>
@@ -10089,11 +8631,22 @@
             <a:noFill/>
           </a:ln>
         </p:spPr>
+        <p:style>
+          <a:lnRef idx="0"/>
+          <a:fillRef idx="0"/>
+          <a:effectRef idx="0"/>
+          <a:fontRef idx="minor"/>
+        </p:style>
         <p:txBody>
           <a:bodyPr lIns="90000" rIns="90000" tIns="45000" bIns="45000" anchor="t">
             <a:noAutofit/>
           </a:bodyPr>
           <a:p>
+            <a:pPr>
+              <a:lnSpc>
+                <a:spcPct val="100000"/>
+              </a:lnSpc>
+            </a:pPr>
             <a:r>
               <a:rPr b="0" lang="en-US" sz="1800" spc="-1" strike="noStrike">
                 <a:solidFill>
@@ -10150,7 +8703,7 @@
       </p:sp>
       <p:pic>
         <p:nvPicPr>
-          <p:cNvPr id="102" name="" descr=""/>
+          <p:cNvPr id="85" name="" descr=""/>
           <p:cNvPicPr/>
           <p:nvPr/>
         </p:nvPicPr>
@@ -10161,7 +8714,7 @@
         <p:spPr>
           <a:xfrm>
             <a:off x="7560000" y="2880000"/>
-            <a:ext cx="3780000" cy="2340000"/>
+            <a:ext cx="3779640" cy="2339640"/>
           </a:xfrm>
           <a:prstGeom prst="rect">
             <a:avLst/>
